--- a/docs/2022005052-王晨阳-毕业答辩PPT codex版本.pptx
+++ b/docs/2022005052-王晨阳-毕业答辩PPT codex版本.pptx
@@ -2915,7 +2915,7 @@
 </file>
 
 <file path=ppt/slides/slide1.xml><?xml version="1.0" encoding="utf-8"?>
-<p:sld xmlns:a="http://schemas.openxmlformats.org/drawingml/2006/main" xmlns:r="http://schemas.openxmlformats.org/officeDocument/2006/relationships" xmlns:p="http://schemas.openxmlformats.org/presentationml/2006/main">
+<p:sld xmlns:a="http://schemas.openxmlformats.org/drawingml/2006/main" xmlns:ns2="http://schemas.microsoft.com/office/drawing/2014/main" xmlns:ns3="http://schemas.microsoft.com/office/powerpoint/2010/main" xmlns:p="http://schemas.openxmlformats.org/presentationml/2006/main">
   <p:cSld>
     <p:spTree>
       <p:nvGrpSpPr>
@@ -2936,7 +2936,7 @@
           <p:cNvPr id="22" name="矩形 21">
             <a:extLst>
               <a:ext uri="{FF2B5EF4-FFF2-40B4-BE49-F238E27FC236}">
-                <a16:creationId xmlns:a16="http://schemas.microsoft.com/office/drawing/2014/main" id="{2CB15CB1-F266-47DF-A3C0-A22F9A72861E}"/>
+                <ns2:creationId id="{2CB15CB1-F266-47DF-A3C0-A22F9A72861E}"/>
               </a:ext>
             </a:extLst>
           </p:cNvPr>
@@ -2963,7 +2963,7 @@
           <p:cNvPr id="2" name="矩形: 圆角 1">
             <a:extLst>
               <a:ext uri="{FF2B5EF4-FFF2-40B4-BE49-F238E27FC236}">
-                <a16:creationId xmlns:a16="http://schemas.microsoft.com/office/drawing/2014/main" id="{B0DD4433-5C11-4C37-BF0A-CE9E93969C03}"/>
+                <ns2:creationId id="{B0DD4433-5C11-4C37-BF0A-CE9E93969C03}"/>
               </a:ext>
             </a:extLst>
           </p:cNvPr>
@@ -2992,7 +2992,7 @@
           <p:cNvPr id="3" name="矩形 2">
             <a:extLst>
               <a:ext uri="{FF2B5EF4-FFF2-40B4-BE49-F238E27FC236}">
-                <a16:creationId xmlns:a16="http://schemas.microsoft.com/office/drawing/2014/main" id="{8BA64FEC-999D-403E-BE19-04627611B10F}"/>
+                <ns2:creationId id="{8BA64FEC-999D-403E-BE19-04627611B10F}"/>
               </a:ext>
             </a:extLst>
           </p:cNvPr>
@@ -3027,7 +3027,7 @@
                   <a:srgbClr val="FFFFFF"/>
                 </a:solidFill>
               </a:rPr>
-              <a:t>本科毕业设计答辩</a:t>
+              <a:t>本科毕业设计汇报</a:t>
             </a:r>
           </a:p>
         </p:txBody>
@@ -3037,7 +3037,7 @@
           <p:cNvPr id="4" name="矩形: 圆角 3">
             <a:extLst>
               <a:ext uri="{FF2B5EF4-FFF2-40B4-BE49-F238E27FC236}">
-                <a16:creationId xmlns:a16="http://schemas.microsoft.com/office/drawing/2014/main" id="{284DEC42-B736-477D-A5C7-3CFEC558E49A}"/>
+                <ns2:creationId id="{284DEC42-B736-477D-A5C7-3CFEC558E49A}"/>
               </a:ext>
             </a:extLst>
           </p:cNvPr>
@@ -3066,7 +3066,7 @@
           <p:cNvPr id="5" name="矩形 4">
             <a:extLst>
               <a:ext uri="{FF2B5EF4-FFF2-40B4-BE49-F238E27FC236}">
-                <a16:creationId xmlns:a16="http://schemas.microsoft.com/office/drawing/2014/main" id="{4FCEC48E-8210-4C10-8871-65CAB094D078}"/>
+                <ns2:creationId id="{4FCEC48E-8210-4C10-8871-65CAB094D078}"/>
               </a:ext>
             </a:extLst>
           </p:cNvPr>
@@ -3101,7 +3101,7 @@
                   <a:srgbClr val="FFFFFF"/>
                 </a:solidFill>
               </a:rPr>
-              <a:t>深度学习异常检测</a:t>
+              <a:t>物联网智能燃气表异常检测</a:t>
             </a:r>
           </a:p>
         </p:txBody>
@@ -3111,7 +3111,7 @@
           <p:cNvPr id="6" name="矩形 5">
             <a:extLst>
               <a:ext uri="{FF2B5EF4-FFF2-40B4-BE49-F238E27FC236}">
-                <a16:creationId xmlns:a16="http://schemas.microsoft.com/office/drawing/2014/main" id="{ABC489AD-A2B1-4876-A409-7188EF841FB4}"/>
+                <ns2:creationId id="{ABC489AD-A2B1-4876-A409-7188EF841FB4}"/>
               </a:ext>
             </a:extLst>
           </p:cNvPr>
@@ -3156,7 +3156,7 @@
           <p:cNvPr id="7" name="矩形 6">
             <a:extLst>
               <a:ext uri="{FF2B5EF4-FFF2-40B4-BE49-F238E27FC236}">
-                <a16:creationId xmlns:a16="http://schemas.microsoft.com/office/drawing/2014/main" id="{1ECF171B-66D1-4D07-A758-54549CC3EA0A}"/>
+                <ns2:creationId id="{1ECF171B-66D1-4D07-A758-54549CC3EA0A}"/>
               </a:ext>
             </a:extLst>
           </p:cNvPr>
@@ -3189,7 +3189,7 @@
           <p:cNvPr id="8" name="矩形 7">
             <a:extLst>
               <a:ext uri="{FF2B5EF4-FFF2-40B4-BE49-F238E27FC236}">
-                <a16:creationId xmlns:a16="http://schemas.microsoft.com/office/drawing/2014/main" id="{CC8048B9-FEEC-4EB8-8C44-C345E4D4622C}"/>
+                <ns2:creationId id="{CC8048B9-FEEC-4EB8-8C44-C345E4D4622C}"/>
               </a:ext>
             </a:extLst>
           </p:cNvPr>
@@ -3224,7 +3224,7 @@
                   <a:srgbClr val="C9D9E8"/>
                 </a:solidFill>
               </a:rPr>
-              <a:t>LSTM AutoEncoder 驱动的多维时序重构、异常评分与运维闭环</a:t>
+              <a:t>面向燃气表多维时序数据的 LSTM AutoEncoder 异常识别与运维闭环</a:t>
             </a:r>
           </a:p>
         </p:txBody>
@@ -3234,7 +3234,7 @@
           <p:cNvPr id="9" name="矩形: 圆角 8">
             <a:extLst>
               <a:ext uri="{FF2B5EF4-FFF2-40B4-BE49-F238E27FC236}">
-                <a16:creationId xmlns:a16="http://schemas.microsoft.com/office/drawing/2014/main" id="{23A9CFA9-0587-4803-AB56-3AB1366035DF}"/>
+                <ns2:creationId id="{23A9CFA9-0587-4803-AB56-3AB1366035DF}"/>
               </a:ext>
             </a:extLst>
           </p:cNvPr>
@@ -3263,7 +3263,7 @@
           <p:cNvPr id="10" name="矩形 9">
             <a:extLst>
               <a:ext uri="{FF2B5EF4-FFF2-40B4-BE49-F238E27FC236}">
-                <a16:creationId xmlns:a16="http://schemas.microsoft.com/office/drawing/2014/main" id="{BC2BE42B-82AE-4010-BF41-CD1B1A5A7FA7}"/>
+                <ns2:creationId id="{BC2BE42B-82AE-4010-BF41-CD1B1A5A7FA7}"/>
               </a:ext>
             </a:extLst>
           </p:cNvPr>
@@ -3308,7 +3308,7 @@
           <p:cNvPr id="11" name="矩形 10">
             <a:extLst>
               <a:ext uri="{FF2B5EF4-FFF2-40B4-BE49-F238E27FC236}">
-                <a16:creationId xmlns:a16="http://schemas.microsoft.com/office/drawing/2014/main" id="{0787652D-E3A9-4C23-80B9-E6AE2F46FED4}"/>
+                <ns2:creationId id="{0787652D-E3A9-4C23-80B9-E6AE2F46FED4}"/>
               </a:ext>
             </a:extLst>
           </p:cNvPr>
@@ -3353,7 +3353,7 @@
           <p:cNvPr id="12" name="矩形 11">
             <a:extLst>
               <a:ext uri="{FF2B5EF4-FFF2-40B4-BE49-F238E27FC236}">
-                <a16:creationId xmlns:a16="http://schemas.microsoft.com/office/drawing/2014/main" id="{10EF8D51-A06E-4544-82EF-BD2DDD3AB072}"/>
+                <ns2:creationId id="{10EF8D51-A06E-4544-82EF-BD2DDD3AB072}"/>
               </a:ext>
             </a:extLst>
           </p:cNvPr>
@@ -3388,7 +3388,7 @@
                   <a:srgbClr val="526274"/>
                 </a:solidFill>
               </a:rPr>
-              <a:t>24 个时间步，7 个燃气表特征</a:t>
+              <a:t>24 个时间步，7 类燃气表运行特征</a:t>
             </a:r>
           </a:p>
         </p:txBody>
@@ -3398,7 +3398,7 @@
           <p:cNvPr id="13" name="矩形 12">
             <a:extLst>
               <a:ext uri="{FF2B5EF4-FFF2-40B4-BE49-F238E27FC236}">
-                <a16:creationId xmlns:a16="http://schemas.microsoft.com/office/drawing/2014/main" id="{65A35FB2-4C9B-4F43-9E16-B16C1FF4FA6C}"/>
+                <ns2:creationId id="{65A35FB2-4C9B-4F43-9E16-B16C1FF4FA6C}"/>
               </a:ext>
             </a:extLst>
           </p:cNvPr>
@@ -3431,7 +3431,7 @@
           <p:cNvPr id="14" name="矩形 13">
             <a:extLst>
               <a:ext uri="{FF2B5EF4-FFF2-40B4-BE49-F238E27FC236}">
-                <a16:creationId xmlns:a16="http://schemas.microsoft.com/office/drawing/2014/main" id="{F03E37E2-3CFD-42DB-8CA8-FD01B4BCD455}"/>
+                <ns2:creationId id="{F03E37E2-3CFD-42DB-8CA8-FD01B4BCD455}"/>
               </a:ext>
             </a:extLst>
           </p:cNvPr>
@@ -3476,7 +3476,7 @@
           <p:cNvPr id="15" name="矩形 14">
             <a:extLst>
               <a:ext uri="{FF2B5EF4-FFF2-40B4-BE49-F238E27FC236}">
-                <a16:creationId xmlns:a16="http://schemas.microsoft.com/office/drawing/2014/main" id="{EF61DDD8-0AAF-4930-9B89-BEE1E516C66C}"/>
+                <ns2:creationId id="{EF61DDD8-0AAF-4930-9B89-BEE1E516C66C}"/>
               </a:ext>
             </a:extLst>
           </p:cNvPr>
@@ -3511,7 +3511,7 @@
                   <a:srgbClr val="102033"/>
                 </a:solidFill>
               </a:rPr>
-              <a:t>模型结构</a:t>
+              <a:t>核心模型</a:t>
             </a:r>
           </a:p>
         </p:txBody>
@@ -3521,7 +3521,7 @@
           <p:cNvPr id="16" name="矩形 15">
             <a:extLst>
               <a:ext uri="{FF2B5EF4-FFF2-40B4-BE49-F238E27FC236}">
-                <a16:creationId xmlns:a16="http://schemas.microsoft.com/office/drawing/2014/main" id="{EC262A5E-91A5-4769-AF98-78275A7CFF5B}"/>
+                <ns2:creationId id="{EC262A5E-91A5-4769-AF98-78275A7CFF5B}"/>
               </a:ext>
             </a:extLst>
           </p:cNvPr>
@@ -3556,7 +3556,7 @@
                   <a:srgbClr val="526274"/>
                 </a:solidFill>
               </a:rPr>
-              <a:t>编码、压缩、重构正常时序模式</a:t>
+              <a:t>学习正常时序模式并计算重构误差</a:t>
             </a:r>
           </a:p>
         </p:txBody>
@@ -3566,7 +3566,7 @@
           <p:cNvPr id="17" name="矩形 16">
             <a:extLst>
               <a:ext uri="{FF2B5EF4-FFF2-40B4-BE49-F238E27FC236}">
-                <a16:creationId xmlns:a16="http://schemas.microsoft.com/office/drawing/2014/main" id="{94AC2BF2-D1AA-4B54-9FC5-7172C4257EB6}"/>
+                <ns2:creationId id="{94AC2BF2-D1AA-4B54-9FC5-7172C4257EB6}"/>
               </a:ext>
             </a:extLst>
           </p:cNvPr>
@@ -3599,7 +3599,7 @@
           <p:cNvPr id="18" name="矩形 17">
             <a:extLst>
               <a:ext uri="{FF2B5EF4-FFF2-40B4-BE49-F238E27FC236}">
-                <a16:creationId xmlns:a16="http://schemas.microsoft.com/office/drawing/2014/main" id="{5DC254D1-A75D-417F-98DA-75B804C20415}"/>
+                <ns2:creationId id="{5DC254D1-A75D-417F-98DA-75B804C20415}"/>
               </a:ext>
             </a:extLst>
           </p:cNvPr>
@@ -3644,7 +3644,7 @@
           <p:cNvPr id="19" name="矩形 18">
             <a:extLst>
               <a:ext uri="{FF2B5EF4-FFF2-40B4-BE49-F238E27FC236}">
-                <a16:creationId xmlns:a16="http://schemas.microsoft.com/office/drawing/2014/main" id="{095666CB-AE8F-4971-9D21-1886F503BE3D}"/>
+                <ns2:creationId id="{095666CB-AE8F-4971-9D21-1886F503BE3D}"/>
               </a:ext>
             </a:extLst>
           </p:cNvPr>
@@ -3679,7 +3679,7 @@
                   <a:srgbClr val="102033"/>
                 </a:solidFill>
               </a:rPr>
-              <a:t>端到端响应</a:t>
+              <a:t>平均响应</a:t>
             </a:r>
           </a:p>
         </p:txBody>
@@ -3689,7 +3689,7 @@
           <p:cNvPr id="20" name="矩形 19">
             <a:extLst>
               <a:ext uri="{FF2B5EF4-FFF2-40B4-BE49-F238E27FC236}">
-                <a16:creationId xmlns:a16="http://schemas.microsoft.com/office/drawing/2014/main" id="{7105395A-4C8E-471A-8A8F-F9582F0CC4A3}"/>
+                <ns2:creationId id="{7105395A-4C8E-471A-8A8F-F9582F0CC4A3}"/>
               </a:ext>
             </a:extLst>
           </p:cNvPr>
@@ -3724,7 +3724,7 @@
                   <a:srgbClr val="526274"/>
                 </a:solidFill>
               </a:rPr>
-              <a:t>平均从上报到前端告警</a:t>
+              <a:t>从设备上报到前端告警的端到端耗时</a:t>
             </a:r>
           </a:p>
         </p:txBody>
@@ -3734,7 +3734,7 @@
           <p:cNvPr id="21" name="矩形 20">
             <a:extLst>
               <a:ext uri="{FF2B5EF4-FFF2-40B4-BE49-F238E27FC236}">
-                <a16:creationId xmlns:a16="http://schemas.microsoft.com/office/drawing/2014/main" id="{E1F461A8-1F7F-4488-806D-AEDF4D69F515}"/>
+                <ns2:creationId id="{E1F461A8-1F7F-4488-806D-AEDF4D69F515}"/>
               </a:ext>
             </a:extLst>
           </p:cNvPr>
@@ -3777,7 +3777,7 @@
     </p:spTree>
     <p:extLst>
       <p:ext uri="{BB962C8B-B14F-4D97-AF65-F5344CB8AC3E}">
-        <p14:creationId xmlns:p14="http://schemas.microsoft.com/office/powerpoint/2010/main" val="1547712151"/>
+        <ns3:creationId val="1547712151"/>
       </p:ext>
     </p:extLst>
   </p:cSld>
@@ -3788,7 +3788,7 @@
 </file>
 
 <file path=ppt/slides/slide10.xml><?xml version="1.0" encoding="utf-8"?>
-<p:sld xmlns:a="http://schemas.openxmlformats.org/drawingml/2006/main" xmlns:r="http://schemas.openxmlformats.org/officeDocument/2006/relationships" xmlns:p="http://schemas.openxmlformats.org/presentationml/2006/main">
+<p:sld xmlns:a="http://schemas.openxmlformats.org/drawingml/2006/main" xmlns:ns2="http://schemas.microsoft.com/office/drawing/2014/main" xmlns:ns3="http://schemas.microsoft.com/office/powerpoint/2010/main" xmlns:p="http://schemas.openxmlformats.org/presentationml/2006/main">
   <p:cSld>
     <p:spTree>
       <p:nvGrpSpPr>
@@ -3809,7 +3809,7 @@
           <p:cNvPr id="20" name="slide-bg">
             <a:extLst>
               <a:ext uri="{FF2B5EF4-FFF2-40B4-BE49-F238E27FC236}">
-                <a16:creationId xmlns:a16="http://schemas.microsoft.com/office/drawing/2014/main" id="{0C419E0A-B808-40A1-84CD-0C75A8EFAEB8}"/>
+                <ns2:creationId id="{0C419E0A-B808-40A1-84CD-0C75A8EFAEB8}"/>
               </a:ext>
             </a:extLst>
           </p:cNvPr>
@@ -3836,7 +3836,7 @@
           <p:cNvPr id="2" name="title">
             <a:extLst>
               <a:ext uri="{FF2B5EF4-FFF2-40B4-BE49-F238E27FC236}">
-                <a16:creationId xmlns:a16="http://schemas.microsoft.com/office/drawing/2014/main" id="{411F1286-FB73-4C64-8ED0-A6CD39AFC4A1}"/>
+                <ns2:creationId id="{411F1286-FB73-4C64-8ED0-A6CD39AFC4A1}"/>
               </a:ext>
             </a:extLst>
           </p:cNvPr>
@@ -3871,7 +3871,7 @@
                   <a:srgbClr val="102033"/>
                 </a:solidFill>
               </a:rPr>
-              <a:t>异常判定逻辑</a:t>
+              <a:t>异常判定与可解释性设计</a:t>
             </a:r>
           </a:p>
         </p:txBody>
@@ -3881,7 +3881,7 @@
           <p:cNvPr id="3" name="subtitle">
             <a:extLst>
               <a:ext uri="{FF2B5EF4-FFF2-40B4-BE49-F238E27FC236}">
-                <a16:creationId xmlns:a16="http://schemas.microsoft.com/office/drawing/2014/main" id="{520781E7-BA22-4F87-B816-96C0C376C83A}"/>
+                <ns2:creationId id="{520781E7-BA22-4F87-B816-96C0C376C83A}"/>
               </a:ext>
             </a:extLst>
           </p:cNvPr>
@@ -3926,7 +3926,7 @@
           <p:cNvPr id="4" name="title-rule">
             <a:extLst>
               <a:ext uri="{FF2B5EF4-FFF2-40B4-BE49-F238E27FC236}">
-                <a16:creationId xmlns:a16="http://schemas.microsoft.com/office/drawing/2014/main" id="{AAD65187-366C-4246-8853-92A2F8693B93}"/>
+                <ns2:creationId id="{AAD65187-366C-4246-8853-92A2F8693B93}"/>
               </a:ext>
             </a:extLst>
           </p:cNvPr>
@@ -3959,7 +3959,7 @@
           <p:cNvPr id="5" name="矩形: 圆角 4">
             <a:extLst>
               <a:ext uri="{FF2B5EF4-FFF2-40B4-BE49-F238E27FC236}">
-                <a16:creationId xmlns:a16="http://schemas.microsoft.com/office/drawing/2014/main" id="{A8B1CDBB-5E35-47F8-AFD7-0C6F3151DB05}"/>
+                <ns2:creationId id="{A8B1CDBB-5E35-47F8-AFD7-0C6F3151DB05}"/>
               </a:ext>
             </a:extLst>
           </p:cNvPr>
@@ -3988,7 +3988,7 @@
           <p:cNvPr id="6" name="矩形 5">
             <a:extLst>
               <a:ext uri="{FF2B5EF4-FFF2-40B4-BE49-F238E27FC236}">
-                <a16:creationId xmlns:a16="http://schemas.microsoft.com/office/drawing/2014/main" id="{2A8F90A8-6D5D-4A9F-9666-2C28A32F5112}"/>
+                <ns2:creationId id="{2A8F90A8-6D5D-4A9F-9666-2C28A32F5112}"/>
               </a:ext>
             </a:extLst>
           </p:cNvPr>
@@ -4033,7 +4033,7 @@
           <p:cNvPr id="7" name="矩形 6">
             <a:extLst>
               <a:ext uri="{FF2B5EF4-FFF2-40B4-BE49-F238E27FC236}">
-                <a16:creationId xmlns:a16="http://schemas.microsoft.com/office/drawing/2014/main" id="{0854BAB5-4741-4D9B-B3D4-EC1C1419EE23}"/>
+                <ns2:creationId id="{0854BAB5-4741-4D9B-B3D4-EC1C1419EE23}"/>
               </a:ext>
             </a:extLst>
           </p:cNvPr>
@@ -4078,7 +4078,7 @@
           <p:cNvPr id="8" name="bullet-0">
             <a:extLst>
               <a:ext uri="{FF2B5EF4-FFF2-40B4-BE49-F238E27FC236}">
-                <a16:creationId xmlns:a16="http://schemas.microsoft.com/office/drawing/2014/main" id="{C348EA7A-5376-433F-A287-53693CF0230E}"/>
+                <ns2:creationId id="{C348EA7A-5376-433F-A287-53693CF0230E}"/>
               </a:ext>
             </a:extLst>
           </p:cNvPr>
@@ -4123,7 +4123,7 @@
           <p:cNvPr id="9" name="bullet-1">
             <a:extLst>
               <a:ext uri="{FF2B5EF4-FFF2-40B4-BE49-F238E27FC236}">
-                <a16:creationId xmlns:a16="http://schemas.microsoft.com/office/drawing/2014/main" id="{0906F5BA-B033-4D8D-B25E-07F26FA7D3C9}"/>
+                <ns2:creationId id="{0906F5BA-B033-4D8D-B25E-07F26FA7D3C9}"/>
               </a:ext>
             </a:extLst>
           </p:cNvPr>
@@ -4168,7 +4168,7 @@
           <p:cNvPr id="10" name="bullet-2">
             <a:extLst>
               <a:ext uri="{FF2B5EF4-FFF2-40B4-BE49-F238E27FC236}">
-                <a16:creationId xmlns:a16="http://schemas.microsoft.com/office/drawing/2014/main" id="{4B012C6E-7A80-4E71-8966-93FDD70ECC38}"/>
+                <ns2:creationId id="{4B012C6E-7A80-4E71-8966-93FDD70ECC38}"/>
               </a:ext>
             </a:extLst>
           </p:cNvPr>
@@ -4213,7 +4213,7 @@
           <p:cNvPr id="11" name="矩形: 圆角 10">
             <a:extLst>
               <a:ext uri="{FF2B5EF4-FFF2-40B4-BE49-F238E27FC236}">
-                <a16:creationId xmlns:a16="http://schemas.microsoft.com/office/drawing/2014/main" id="{33128F51-E7C7-4371-AD5D-A7D0C500076D}"/>
+                <ns2:creationId id="{33128F51-E7C7-4371-AD5D-A7D0C500076D}"/>
               </a:ext>
             </a:extLst>
           </p:cNvPr>
@@ -4242,7 +4242,7 @@
           <p:cNvPr id="12" name="矩形 11">
             <a:extLst>
               <a:ext uri="{FF2B5EF4-FFF2-40B4-BE49-F238E27FC236}">
-                <a16:creationId xmlns:a16="http://schemas.microsoft.com/office/drawing/2014/main" id="{4ECB1EA2-4241-4033-B0F2-72BBC70FE6F5}"/>
+                <ns2:creationId id="{4ECB1EA2-4241-4033-B0F2-72BBC70FE6F5}"/>
               </a:ext>
             </a:extLst>
           </p:cNvPr>
@@ -4287,7 +4287,7 @@
           <p:cNvPr id="13" name="bullet-0">
             <a:extLst>
               <a:ext uri="{FF2B5EF4-FFF2-40B4-BE49-F238E27FC236}">
-                <a16:creationId xmlns:a16="http://schemas.microsoft.com/office/drawing/2014/main" id="{9D1760D7-DF2F-4CDC-8CA8-77BF2F198C2D}"/>
+                <ns2:creationId id="{9D1760D7-DF2F-4CDC-8CA8-77BF2F198C2D}"/>
               </a:ext>
             </a:extLst>
           </p:cNvPr>
@@ -4332,7 +4332,7 @@
           <p:cNvPr id="14" name="bullet-1">
             <a:extLst>
               <a:ext uri="{FF2B5EF4-FFF2-40B4-BE49-F238E27FC236}">
-                <a16:creationId xmlns:a16="http://schemas.microsoft.com/office/drawing/2014/main" id="{51CCC2BE-7A37-4CFB-95FC-F5952FB30312}"/>
+                <ns2:creationId id="{51CCC2BE-7A37-4CFB-95FC-F5952FB30312}"/>
               </a:ext>
             </a:extLst>
           </p:cNvPr>
@@ -4377,7 +4377,7 @@
           <p:cNvPr id="15" name="bullet-2">
             <a:extLst>
               <a:ext uri="{FF2B5EF4-FFF2-40B4-BE49-F238E27FC236}">
-                <a16:creationId xmlns:a16="http://schemas.microsoft.com/office/drawing/2014/main" id="{BD16EC53-B750-4744-B39E-04F3DFD1E32F}"/>
+                <ns2:creationId id="{BD16EC53-B750-4744-B39E-04F3DFD1E32F}"/>
               </a:ext>
             </a:extLst>
           </p:cNvPr>
@@ -4422,7 +4422,7 @@
           <p:cNvPr id="16" name="bullet-3">
             <a:extLst>
               <a:ext uri="{FF2B5EF4-FFF2-40B4-BE49-F238E27FC236}">
-                <a16:creationId xmlns:a16="http://schemas.microsoft.com/office/drawing/2014/main" id="{2120150C-B76E-4D32-A73D-249CF01D747C}"/>
+                <ns2:creationId id="{2120150C-B76E-4D32-A73D-249CF01D747C}"/>
               </a:ext>
             </a:extLst>
           </p:cNvPr>
@@ -4467,7 +4467,7 @@
           <p:cNvPr id="17" name="bullet-4">
             <a:extLst>
               <a:ext uri="{FF2B5EF4-FFF2-40B4-BE49-F238E27FC236}">
-                <a16:creationId xmlns:a16="http://schemas.microsoft.com/office/drawing/2014/main" id="{14E11480-603F-4FE2-825D-294228B47096}"/>
+                <ns2:creationId id="{14E11480-603F-4FE2-825D-294228B47096}"/>
               </a:ext>
             </a:extLst>
           </p:cNvPr>
@@ -4512,7 +4512,7 @@
           <p:cNvPr id="18" name="矩形: 圆角 17">
             <a:extLst>
               <a:ext uri="{FF2B5EF4-FFF2-40B4-BE49-F238E27FC236}">
-                <a16:creationId xmlns:a16="http://schemas.microsoft.com/office/drawing/2014/main" id="{6E0F94AE-FB57-4198-877C-121F29111640}"/>
+                <ns2:creationId id="{6E0F94AE-FB57-4198-877C-121F29111640}"/>
               </a:ext>
             </a:extLst>
           </p:cNvPr>
@@ -4541,7 +4541,7 @@
           <p:cNvPr id="19" name="矩形 18">
             <a:extLst>
               <a:ext uri="{FF2B5EF4-FFF2-40B4-BE49-F238E27FC236}">
-                <a16:creationId xmlns:a16="http://schemas.microsoft.com/office/drawing/2014/main" id="{8469B215-C53F-44C2-949C-4CE649C84562}"/>
+                <ns2:creationId id="{8469B215-C53F-44C2-949C-4CE649C84562}"/>
               </a:ext>
             </a:extLst>
           </p:cNvPr>
@@ -4576,7 +4576,7 @@
                   <a:srgbClr val="98610D"/>
                 </a:solidFill>
               </a:rPr>
-              <a:t>设计要点：LSTM AutoEncoder 负责发现复杂时序偏离，业务规则负责增强可解释性和落地可处理性。</a:t>
+              <a:t>设计要点：LSTM AutoEncoder 负责发现复杂时序偏离，业务规则负责解释异常原因并支持运维处置。</a:t>
             </a:r>
           </a:p>
         </p:txBody>
@@ -4584,7 +4584,7 @@
     </p:spTree>
     <p:extLst>
       <p:ext uri="{BB962C8B-B14F-4D97-AF65-F5344CB8AC3E}">
-        <p14:creationId xmlns:p14="http://schemas.microsoft.com/office/powerpoint/2010/main" val="602539327"/>
+        <ns3:creationId val="602539327"/>
       </p:ext>
     </p:extLst>
   </p:cSld>
@@ -4595,7 +4595,7 @@
 </file>
 
 <file path=ppt/slides/slide11.xml><?xml version="1.0" encoding="utf-8"?>
-<p:sld xmlns:a="http://schemas.openxmlformats.org/drawingml/2006/main" xmlns:r="http://schemas.openxmlformats.org/officeDocument/2006/relationships" xmlns:p="http://schemas.openxmlformats.org/presentationml/2006/main">
+<p:sld xmlns:a="http://schemas.openxmlformats.org/drawingml/2006/main" xmlns:ns2="http://schemas.microsoft.com/office/drawing/2014/main" xmlns:ns3="http://schemas.microsoft.com/office/powerpoint/2010/main" xmlns:p="http://schemas.openxmlformats.org/presentationml/2006/main">
   <p:cSld>
     <p:spTree>
       <p:nvGrpSpPr>
@@ -4616,7 +4616,7 @@
           <p:cNvPr id="54" name="slide-bg">
             <a:extLst>
               <a:ext uri="{FF2B5EF4-FFF2-40B4-BE49-F238E27FC236}">
-                <a16:creationId xmlns:a16="http://schemas.microsoft.com/office/drawing/2014/main" id="{B4B1A19D-E9D9-4364-BB07-74BA66600E4C}"/>
+                <ns2:creationId id="{B4B1A19D-E9D9-4364-BB07-74BA66600E4C}"/>
               </a:ext>
             </a:extLst>
           </p:cNvPr>
@@ -4643,7 +4643,7 @@
           <p:cNvPr id="2" name="title">
             <a:extLst>
               <a:ext uri="{FF2B5EF4-FFF2-40B4-BE49-F238E27FC236}">
-                <a16:creationId xmlns:a16="http://schemas.microsoft.com/office/drawing/2014/main" id="{DA398C3B-C315-4ED9-A8D8-7344BDAA37CD}"/>
+                <ns2:creationId id="{DA398C3B-C315-4ED9-A8D8-7344BDAA37CD}"/>
               </a:ext>
             </a:extLst>
           </p:cNvPr>
@@ -4678,7 +4678,7 @@
                   <a:srgbClr val="102033"/>
                 </a:solidFill>
               </a:rPr>
-              <a:t>系统实现与关键技术栈</a:t>
+              <a:t>系统实现与关键技术</a:t>
             </a:r>
           </a:p>
         </p:txBody>
@@ -4688,7 +4688,7 @@
           <p:cNvPr id="3" name="subtitle">
             <a:extLst>
               <a:ext uri="{FF2B5EF4-FFF2-40B4-BE49-F238E27FC236}">
-                <a16:creationId xmlns:a16="http://schemas.microsoft.com/office/drawing/2014/main" id="{31D70B8E-99C6-4FFD-9E85-70C1CF77ABFB}"/>
+                <ns2:creationId id="{31D70B8E-99C6-4FFD-9E85-70C1CF77ABFB}"/>
               </a:ext>
             </a:extLst>
           </p:cNvPr>
@@ -4733,7 +4733,7 @@
           <p:cNvPr id="4" name="title-rule">
             <a:extLst>
               <a:ext uri="{FF2B5EF4-FFF2-40B4-BE49-F238E27FC236}">
-                <a16:creationId xmlns:a16="http://schemas.microsoft.com/office/drawing/2014/main" id="{045D415D-543D-429B-BE5B-01FB3C4A8E1F}"/>
+                <ns2:creationId id="{045D415D-543D-429B-BE5B-01FB3C4A8E1F}"/>
               </a:ext>
             </a:extLst>
           </p:cNvPr>
@@ -4766,7 +4766,7 @@
           <p:cNvPr id="5" name="矩形 4">
             <a:extLst>
               <a:ext uri="{FF2B5EF4-FFF2-40B4-BE49-F238E27FC236}">
-                <a16:creationId xmlns:a16="http://schemas.microsoft.com/office/drawing/2014/main" id="{7C110C71-381E-4BC5-B13C-AF945D518CDE}"/>
+                <ns2:creationId id="{7C110C71-381E-4BC5-B13C-AF945D518CDE}"/>
               </a:ext>
             </a:extLst>
           </p:cNvPr>
@@ -4793,7 +4793,7 @@
           <p:cNvPr id="6" name="矩形 5">
             <a:extLst>
               <a:ext uri="{FF2B5EF4-FFF2-40B4-BE49-F238E27FC236}">
-                <a16:creationId xmlns:a16="http://schemas.microsoft.com/office/drawing/2014/main" id="{43D373DE-BC45-4569-9ECD-84D30B1BD152}"/>
+                <ns2:creationId id="{43D373DE-BC45-4569-9ECD-84D30B1BD152}"/>
               </a:ext>
             </a:extLst>
           </p:cNvPr>
@@ -4838,7 +4838,7 @@
           <p:cNvPr id="7" name="矩形 6">
             <a:extLst>
               <a:ext uri="{FF2B5EF4-FFF2-40B4-BE49-F238E27FC236}">
-                <a16:creationId xmlns:a16="http://schemas.microsoft.com/office/drawing/2014/main" id="{5D2D7675-65D8-48E5-969A-E2EA15059F54}"/>
+                <ns2:creationId id="{5D2D7675-65D8-48E5-969A-E2EA15059F54}"/>
               </a:ext>
             </a:extLst>
           </p:cNvPr>
@@ -4865,7 +4865,7 @@
           <p:cNvPr id="8" name="矩形 7">
             <a:extLst>
               <a:ext uri="{FF2B5EF4-FFF2-40B4-BE49-F238E27FC236}">
-                <a16:creationId xmlns:a16="http://schemas.microsoft.com/office/drawing/2014/main" id="{DB365924-38EE-4007-8C8F-64A0D68B8365}"/>
+                <ns2:creationId id="{DB365924-38EE-4007-8C8F-64A0D68B8365}"/>
               </a:ext>
             </a:extLst>
           </p:cNvPr>
@@ -4910,7 +4910,7 @@
           <p:cNvPr id="9" name="矩形 8">
             <a:extLst>
               <a:ext uri="{FF2B5EF4-FFF2-40B4-BE49-F238E27FC236}">
-                <a16:creationId xmlns:a16="http://schemas.microsoft.com/office/drawing/2014/main" id="{CC6B63C8-648F-43FB-BDE2-78928893C155}"/>
+                <ns2:creationId id="{CC6B63C8-648F-43FB-BDE2-78928893C155}"/>
               </a:ext>
             </a:extLst>
           </p:cNvPr>
@@ -4937,7 +4937,7 @@
           <p:cNvPr id="10" name="矩形 9">
             <a:extLst>
               <a:ext uri="{FF2B5EF4-FFF2-40B4-BE49-F238E27FC236}">
-                <a16:creationId xmlns:a16="http://schemas.microsoft.com/office/drawing/2014/main" id="{0FC94656-EC47-496C-9465-9D0451745DE6}"/>
+                <ns2:creationId id="{0FC94656-EC47-496C-9465-9D0451745DE6}"/>
               </a:ext>
             </a:extLst>
           </p:cNvPr>
@@ -4982,7 +4982,7 @@
           <p:cNvPr id="11" name="矩形 10">
             <a:extLst>
               <a:ext uri="{FF2B5EF4-FFF2-40B4-BE49-F238E27FC236}">
-                <a16:creationId xmlns:a16="http://schemas.microsoft.com/office/drawing/2014/main" id="{F05502BD-44FE-4184-A86E-8FF328CA0A8D}"/>
+                <ns2:creationId id="{F05502BD-44FE-4184-A86E-8FF328CA0A8D}"/>
               </a:ext>
             </a:extLst>
           </p:cNvPr>
@@ -5009,7 +5009,7 @@
           <p:cNvPr id="12" name="矩形 11">
             <a:extLst>
               <a:ext uri="{FF2B5EF4-FFF2-40B4-BE49-F238E27FC236}">
-                <a16:creationId xmlns:a16="http://schemas.microsoft.com/office/drawing/2014/main" id="{79CBE618-8EC7-47D5-AE50-DD0F6E0FAD86}"/>
+                <ns2:creationId id="{79CBE618-8EC7-47D5-AE50-DD0F6E0FAD86}"/>
               </a:ext>
             </a:extLst>
           </p:cNvPr>
@@ -5054,7 +5054,7 @@
           <p:cNvPr id="13" name="矩形 12">
             <a:extLst>
               <a:ext uri="{FF2B5EF4-FFF2-40B4-BE49-F238E27FC236}">
-                <a16:creationId xmlns:a16="http://schemas.microsoft.com/office/drawing/2014/main" id="{F3C3EA3A-6930-4246-930A-FC30DEDFADE8}"/>
+                <ns2:creationId id="{F3C3EA3A-6930-4246-930A-FC30DEDFADE8}"/>
               </a:ext>
             </a:extLst>
           </p:cNvPr>
@@ -5081,7 +5081,7 @@
           <p:cNvPr id="14" name="矩形 13">
             <a:extLst>
               <a:ext uri="{FF2B5EF4-FFF2-40B4-BE49-F238E27FC236}">
-                <a16:creationId xmlns:a16="http://schemas.microsoft.com/office/drawing/2014/main" id="{02C6F802-AEB7-4AF6-8405-966BE27AD731}"/>
+                <ns2:creationId id="{02C6F802-AEB7-4AF6-8405-966BE27AD731}"/>
               </a:ext>
             </a:extLst>
           </p:cNvPr>
@@ -5126,7 +5126,7 @@
           <p:cNvPr id="15" name="矩形 14">
             <a:extLst>
               <a:ext uri="{FF2B5EF4-FFF2-40B4-BE49-F238E27FC236}">
-                <a16:creationId xmlns:a16="http://schemas.microsoft.com/office/drawing/2014/main" id="{089F7113-B2B6-4908-8D35-67B0D0136B58}"/>
+                <ns2:creationId id="{089F7113-B2B6-4908-8D35-67B0D0136B58}"/>
               </a:ext>
             </a:extLst>
           </p:cNvPr>
@@ -5153,7 +5153,7 @@
           <p:cNvPr id="16" name="矩形 15">
             <a:extLst>
               <a:ext uri="{FF2B5EF4-FFF2-40B4-BE49-F238E27FC236}">
-                <a16:creationId xmlns:a16="http://schemas.microsoft.com/office/drawing/2014/main" id="{B90ABC6B-BEFB-4253-B793-D8BC57018CAA}"/>
+                <ns2:creationId id="{B90ABC6B-BEFB-4253-B793-D8BC57018CAA}"/>
               </a:ext>
             </a:extLst>
           </p:cNvPr>
@@ -5198,7 +5198,7 @@
           <p:cNvPr id="17" name="矩形 16">
             <a:extLst>
               <a:ext uri="{FF2B5EF4-FFF2-40B4-BE49-F238E27FC236}">
-                <a16:creationId xmlns:a16="http://schemas.microsoft.com/office/drawing/2014/main" id="{29B6FA18-EEC2-4E32-9539-AD59A2379299}"/>
+                <ns2:creationId id="{29B6FA18-EEC2-4E32-9539-AD59A2379299}"/>
               </a:ext>
             </a:extLst>
           </p:cNvPr>
@@ -5225,7 +5225,7 @@
           <p:cNvPr id="18" name="矩形 17">
             <a:extLst>
               <a:ext uri="{FF2B5EF4-FFF2-40B4-BE49-F238E27FC236}">
-                <a16:creationId xmlns:a16="http://schemas.microsoft.com/office/drawing/2014/main" id="{36DFF816-D6A1-4954-AB8A-6EF3644A05E3}"/>
+                <ns2:creationId id="{36DFF816-D6A1-4954-AB8A-6EF3644A05E3}"/>
               </a:ext>
             </a:extLst>
           </p:cNvPr>
@@ -5270,7 +5270,7 @@
           <p:cNvPr id="19" name="矩形 18">
             <a:extLst>
               <a:ext uri="{FF2B5EF4-FFF2-40B4-BE49-F238E27FC236}">
-                <a16:creationId xmlns:a16="http://schemas.microsoft.com/office/drawing/2014/main" id="{BBE6073E-4632-4D24-9109-DAB9F020CBA3}"/>
+                <ns2:creationId id="{BBE6073E-4632-4D24-9109-DAB9F020CBA3}"/>
               </a:ext>
             </a:extLst>
           </p:cNvPr>
@@ -5297,7 +5297,7 @@
           <p:cNvPr id="20" name="矩形 19">
             <a:extLst>
               <a:ext uri="{FF2B5EF4-FFF2-40B4-BE49-F238E27FC236}">
-                <a16:creationId xmlns:a16="http://schemas.microsoft.com/office/drawing/2014/main" id="{F6008CF8-B9C6-47CA-A20D-C950E789D4F4}"/>
+                <ns2:creationId id="{F6008CF8-B9C6-47CA-A20D-C950E789D4F4}"/>
               </a:ext>
             </a:extLst>
           </p:cNvPr>
@@ -5342,7 +5342,7 @@
           <p:cNvPr id="21" name="矩形 20">
             <a:extLst>
               <a:ext uri="{FF2B5EF4-FFF2-40B4-BE49-F238E27FC236}">
-                <a16:creationId xmlns:a16="http://schemas.microsoft.com/office/drawing/2014/main" id="{9DDAE8B8-6850-40D4-9217-DDCBE1724E12}"/>
+                <ns2:creationId id="{9DDAE8B8-6850-40D4-9217-DDCBE1724E12}"/>
               </a:ext>
             </a:extLst>
           </p:cNvPr>
@@ -5369,7 +5369,7 @@
           <p:cNvPr id="22" name="矩形 21">
             <a:extLst>
               <a:ext uri="{FF2B5EF4-FFF2-40B4-BE49-F238E27FC236}">
-                <a16:creationId xmlns:a16="http://schemas.microsoft.com/office/drawing/2014/main" id="{2E38C2F8-03B3-4D3F-85E3-80F84D5ADA18}"/>
+                <ns2:creationId id="{2E38C2F8-03B3-4D3F-85E3-80F84D5ADA18}"/>
               </a:ext>
             </a:extLst>
           </p:cNvPr>
@@ -5414,7 +5414,7 @@
           <p:cNvPr id="23" name="矩形 22">
             <a:extLst>
               <a:ext uri="{FF2B5EF4-FFF2-40B4-BE49-F238E27FC236}">
-                <a16:creationId xmlns:a16="http://schemas.microsoft.com/office/drawing/2014/main" id="{2E08F934-CF43-4B5B-B127-FC1795E6A16E}"/>
+                <ns2:creationId id="{2E08F934-CF43-4B5B-B127-FC1795E6A16E}"/>
               </a:ext>
             </a:extLst>
           </p:cNvPr>
@@ -5441,7 +5441,7 @@
           <p:cNvPr id="24" name="矩形 23">
             <a:extLst>
               <a:ext uri="{FF2B5EF4-FFF2-40B4-BE49-F238E27FC236}">
-                <a16:creationId xmlns:a16="http://schemas.microsoft.com/office/drawing/2014/main" id="{690954A8-6FD5-4A9C-B36A-6AD91C820F8A}"/>
+                <ns2:creationId id="{690954A8-6FD5-4A9C-B36A-6AD91C820F8A}"/>
               </a:ext>
             </a:extLst>
           </p:cNvPr>
@@ -5486,7 +5486,7 @@
           <p:cNvPr id="25" name="矩形 24">
             <a:extLst>
               <a:ext uri="{FF2B5EF4-FFF2-40B4-BE49-F238E27FC236}">
-                <a16:creationId xmlns:a16="http://schemas.microsoft.com/office/drawing/2014/main" id="{5F27E8E8-89E1-4B1F-BFD1-3D0BF565258C}"/>
+                <ns2:creationId id="{5F27E8E8-89E1-4B1F-BFD1-3D0BF565258C}"/>
               </a:ext>
             </a:extLst>
           </p:cNvPr>
@@ -5513,7 +5513,7 @@
           <p:cNvPr id="26" name="矩形 25">
             <a:extLst>
               <a:ext uri="{FF2B5EF4-FFF2-40B4-BE49-F238E27FC236}">
-                <a16:creationId xmlns:a16="http://schemas.microsoft.com/office/drawing/2014/main" id="{734FBEBB-E254-499D-83E8-B7097B4645F1}"/>
+                <ns2:creationId id="{734FBEBB-E254-499D-83E8-B7097B4645F1}"/>
               </a:ext>
             </a:extLst>
           </p:cNvPr>
@@ -5558,7 +5558,7 @@
           <p:cNvPr id="27" name="矩形 26">
             <a:extLst>
               <a:ext uri="{FF2B5EF4-FFF2-40B4-BE49-F238E27FC236}">
-                <a16:creationId xmlns:a16="http://schemas.microsoft.com/office/drawing/2014/main" id="{CC2DBD1E-E365-484F-8906-DA8AD97808B5}"/>
+                <ns2:creationId id="{CC2DBD1E-E365-484F-8906-DA8AD97808B5}"/>
               </a:ext>
             </a:extLst>
           </p:cNvPr>
@@ -5585,7 +5585,7 @@
           <p:cNvPr id="28" name="矩形 27">
             <a:extLst>
               <a:ext uri="{FF2B5EF4-FFF2-40B4-BE49-F238E27FC236}">
-                <a16:creationId xmlns:a16="http://schemas.microsoft.com/office/drawing/2014/main" id="{B339C749-D733-4701-8B7B-42341BA84DB6}"/>
+                <ns2:creationId id="{B339C749-D733-4701-8B7B-42341BA84DB6}"/>
               </a:ext>
             </a:extLst>
           </p:cNvPr>
@@ -5630,7 +5630,7 @@
           <p:cNvPr id="29" name="矩形 28">
             <a:extLst>
               <a:ext uri="{FF2B5EF4-FFF2-40B4-BE49-F238E27FC236}">
-                <a16:creationId xmlns:a16="http://schemas.microsoft.com/office/drawing/2014/main" id="{76B13E4F-DF9B-44D9-9DC1-575532B29CF4}"/>
+                <ns2:creationId id="{76B13E4F-DF9B-44D9-9DC1-575532B29CF4}"/>
               </a:ext>
             </a:extLst>
           </p:cNvPr>
@@ -5657,7 +5657,7 @@
           <p:cNvPr id="30" name="矩形 29">
             <a:extLst>
               <a:ext uri="{FF2B5EF4-FFF2-40B4-BE49-F238E27FC236}">
-                <a16:creationId xmlns:a16="http://schemas.microsoft.com/office/drawing/2014/main" id="{E07EC137-C721-4866-9812-49D912B2976D}"/>
+                <ns2:creationId id="{E07EC137-C721-4866-9812-49D912B2976D}"/>
               </a:ext>
             </a:extLst>
           </p:cNvPr>
@@ -5702,7 +5702,7 @@
           <p:cNvPr id="31" name="矩形 30">
             <a:extLst>
               <a:ext uri="{FF2B5EF4-FFF2-40B4-BE49-F238E27FC236}">
-                <a16:creationId xmlns:a16="http://schemas.microsoft.com/office/drawing/2014/main" id="{694F4F31-C72C-4C7F-BDF7-F7FA8F5DA12B}"/>
+                <ns2:creationId id="{694F4F31-C72C-4C7F-BDF7-F7FA8F5DA12B}"/>
               </a:ext>
             </a:extLst>
           </p:cNvPr>
@@ -5729,7 +5729,7 @@
           <p:cNvPr id="32" name="矩形 31">
             <a:extLst>
               <a:ext uri="{FF2B5EF4-FFF2-40B4-BE49-F238E27FC236}">
-                <a16:creationId xmlns:a16="http://schemas.microsoft.com/office/drawing/2014/main" id="{A3BDB61F-F624-46F7-A404-BA1C946EEA70}"/>
+                <ns2:creationId id="{A3BDB61F-F624-46F7-A404-BA1C946EEA70}"/>
               </a:ext>
             </a:extLst>
           </p:cNvPr>
@@ -5774,7 +5774,7 @@
           <p:cNvPr id="33" name="矩形 32">
             <a:extLst>
               <a:ext uri="{FF2B5EF4-FFF2-40B4-BE49-F238E27FC236}">
-                <a16:creationId xmlns:a16="http://schemas.microsoft.com/office/drawing/2014/main" id="{43FBFCDB-24C9-4920-A303-8F30596EBCDD}"/>
+                <ns2:creationId id="{43FBFCDB-24C9-4920-A303-8F30596EBCDD}"/>
               </a:ext>
             </a:extLst>
           </p:cNvPr>
@@ -5801,7 +5801,7 @@
           <p:cNvPr id="34" name="矩形 33">
             <a:extLst>
               <a:ext uri="{FF2B5EF4-FFF2-40B4-BE49-F238E27FC236}">
-                <a16:creationId xmlns:a16="http://schemas.microsoft.com/office/drawing/2014/main" id="{18DDD072-6D8C-4650-A1D2-49522441D0BE}"/>
+                <ns2:creationId id="{18DDD072-6D8C-4650-A1D2-49522441D0BE}"/>
               </a:ext>
             </a:extLst>
           </p:cNvPr>
@@ -5846,7 +5846,7 @@
           <p:cNvPr id="35" name="矩形 34">
             <a:extLst>
               <a:ext uri="{FF2B5EF4-FFF2-40B4-BE49-F238E27FC236}">
-                <a16:creationId xmlns:a16="http://schemas.microsoft.com/office/drawing/2014/main" id="{CBA0D63B-C437-4079-8020-C9AB92D3C67D}"/>
+                <ns2:creationId id="{CBA0D63B-C437-4079-8020-C9AB92D3C67D}"/>
               </a:ext>
             </a:extLst>
           </p:cNvPr>
@@ -5873,7 +5873,7 @@
           <p:cNvPr id="36" name="矩形 35">
             <a:extLst>
               <a:ext uri="{FF2B5EF4-FFF2-40B4-BE49-F238E27FC236}">
-                <a16:creationId xmlns:a16="http://schemas.microsoft.com/office/drawing/2014/main" id="{400C34B5-3737-4A06-A690-0761857101E8}"/>
+                <ns2:creationId id="{400C34B5-3737-4A06-A690-0761857101E8}"/>
               </a:ext>
             </a:extLst>
           </p:cNvPr>
@@ -5918,7 +5918,7 @@
           <p:cNvPr id="37" name="矩形 36">
             <a:extLst>
               <a:ext uri="{FF2B5EF4-FFF2-40B4-BE49-F238E27FC236}">
-                <a16:creationId xmlns:a16="http://schemas.microsoft.com/office/drawing/2014/main" id="{D1FECAA0-DEB5-441D-8A81-C211D6B5AADB}"/>
+                <ns2:creationId id="{D1FECAA0-DEB5-441D-8A81-C211D6B5AADB}"/>
               </a:ext>
             </a:extLst>
           </p:cNvPr>
@@ -5945,7 +5945,7 @@
           <p:cNvPr id="38" name="矩形 37">
             <a:extLst>
               <a:ext uri="{FF2B5EF4-FFF2-40B4-BE49-F238E27FC236}">
-                <a16:creationId xmlns:a16="http://schemas.microsoft.com/office/drawing/2014/main" id="{58F0B008-E1A2-4D14-BBEF-6DBEF2D775AF}"/>
+                <ns2:creationId id="{58F0B008-E1A2-4D14-BBEF-6DBEF2D775AF}"/>
               </a:ext>
             </a:extLst>
           </p:cNvPr>
@@ -5990,7 +5990,7 @@
           <p:cNvPr id="39" name="矩形 38">
             <a:extLst>
               <a:ext uri="{FF2B5EF4-FFF2-40B4-BE49-F238E27FC236}">
-                <a16:creationId xmlns:a16="http://schemas.microsoft.com/office/drawing/2014/main" id="{F6A9BA3D-0B04-48F9-A8C6-447E51D65C2C}"/>
+                <ns2:creationId id="{F6A9BA3D-0B04-48F9-A8C6-447E51D65C2C}"/>
               </a:ext>
             </a:extLst>
           </p:cNvPr>
@@ -6017,7 +6017,7 @@
           <p:cNvPr id="40" name="矩形 39">
             <a:extLst>
               <a:ext uri="{FF2B5EF4-FFF2-40B4-BE49-F238E27FC236}">
-                <a16:creationId xmlns:a16="http://schemas.microsoft.com/office/drawing/2014/main" id="{8DB914F8-1A82-4E65-84A8-939EC2D310A3}"/>
+                <ns2:creationId id="{8DB914F8-1A82-4E65-84A8-939EC2D310A3}"/>
               </a:ext>
             </a:extLst>
           </p:cNvPr>
@@ -6062,7 +6062,7 @@
           <p:cNvPr id="41" name="矩形 40">
             <a:extLst>
               <a:ext uri="{FF2B5EF4-FFF2-40B4-BE49-F238E27FC236}">
-                <a16:creationId xmlns:a16="http://schemas.microsoft.com/office/drawing/2014/main" id="{16A3C051-E4C1-4AAE-B96A-63B974F7090C}"/>
+                <ns2:creationId id="{16A3C051-E4C1-4AAE-B96A-63B974F7090C}"/>
               </a:ext>
             </a:extLst>
           </p:cNvPr>
@@ -6089,7 +6089,7 @@
           <p:cNvPr id="42" name="矩形 41">
             <a:extLst>
               <a:ext uri="{FF2B5EF4-FFF2-40B4-BE49-F238E27FC236}">
-                <a16:creationId xmlns:a16="http://schemas.microsoft.com/office/drawing/2014/main" id="{14014A1D-6480-4C29-AF2B-C8DEB0CE40BD}"/>
+                <ns2:creationId id="{14014A1D-6480-4C29-AF2B-C8DEB0CE40BD}"/>
               </a:ext>
             </a:extLst>
           </p:cNvPr>
@@ -6134,7 +6134,7 @@
           <p:cNvPr id="43" name="矩形 42">
             <a:extLst>
               <a:ext uri="{FF2B5EF4-FFF2-40B4-BE49-F238E27FC236}">
-                <a16:creationId xmlns:a16="http://schemas.microsoft.com/office/drawing/2014/main" id="{72617CF0-B1F9-44A6-BE15-5CE5F8C6701A}"/>
+                <ns2:creationId id="{72617CF0-B1F9-44A6-BE15-5CE5F8C6701A}"/>
               </a:ext>
             </a:extLst>
           </p:cNvPr>
@@ -6161,7 +6161,7 @@
           <p:cNvPr id="44" name="矩形 43">
             <a:extLst>
               <a:ext uri="{FF2B5EF4-FFF2-40B4-BE49-F238E27FC236}">
-                <a16:creationId xmlns:a16="http://schemas.microsoft.com/office/drawing/2014/main" id="{D2CF40FB-D022-4389-B07F-430CA935FC2D}"/>
+                <ns2:creationId id="{D2CF40FB-D022-4389-B07F-430CA935FC2D}"/>
               </a:ext>
             </a:extLst>
           </p:cNvPr>
@@ -6206,7 +6206,7 @@
           <p:cNvPr id="45" name="矩形 44">
             <a:extLst>
               <a:ext uri="{FF2B5EF4-FFF2-40B4-BE49-F238E27FC236}">
-                <a16:creationId xmlns:a16="http://schemas.microsoft.com/office/drawing/2014/main" id="{B33ADC50-9DBA-4181-89BB-3126AF288B76}"/>
+                <ns2:creationId id="{B33ADC50-9DBA-4181-89BB-3126AF288B76}"/>
               </a:ext>
             </a:extLst>
           </p:cNvPr>
@@ -6251,7 +6251,7 @@
           <p:cNvPr id="46" name="矩形 45">
             <a:extLst>
               <a:ext uri="{FF2B5EF4-FFF2-40B4-BE49-F238E27FC236}">
-                <a16:creationId xmlns:a16="http://schemas.microsoft.com/office/drawing/2014/main" id="{2EBBEEAD-F09F-489C-B330-37D3D2526582}"/>
+                <ns2:creationId id="{2EBBEEAD-F09F-489C-B330-37D3D2526582}"/>
               </a:ext>
             </a:extLst>
           </p:cNvPr>
@@ -6296,7 +6296,7 @@
           <p:cNvPr id="47" name="矩形 46">
             <a:extLst>
               <a:ext uri="{FF2B5EF4-FFF2-40B4-BE49-F238E27FC236}">
-                <a16:creationId xmlns:a16="http://schemas.microsoft.com/office/drawing/2014/main" id="{E635E81E-D71C-49B1-B1F0-0A1E69DB7A9C}"/>
+                <ns2:creationId id="{E635E81E-D71C-49B1-B1F0-0A1E69DB7A9C}"/>
               </a:ext>
             </a:extLst>
           </p:cNvPr>
@@ -6341,7 +6341,7 @@
           <p:cNvPr id="48" name="矩形 47">
             <a:extLst>
               <a:ext uri="{FF2B5EF4-FFF2-40B4-BE49-F238E27FC236}">
-                <a16:creationId xmlns:a16="http://schemas.microsoft.com/office/drawing/2014/main" id="{0126E29C-4DC5-4F3A-B8C0-574B64659CA5}"/>
+                <ns2:creationId id="{0126E29C-4DC5-4F3A-B8C0-574B64659CA5}"/>
               </a:ext>
             </a:extLst>
           </p:cNvPr>
@@ -6386,7 +6386,7 @@
           <p:cNvPr id="49" name="矩形 48">
             <a:extLst>
               <a:ext uri="{FF2B5EF4-FFF2-40B4-BE49-F238E27FC236}">
-                <a16:creationId xmlns:a16="http://schemas.microsoft.com/office/drawing/2014/main" id="{22E1E977-C279-4E7C-AB60-1589DCB9A1C1}"/>
+                <ns2:creationId id="{22E1E977-C279-4E7C-AB60-1589DCB9A1C1}"/>
               </a:ext>
             </a:extLst>
           </p:cNvPr>
@@ -6431,7 +6431,7 @@
           <p:cNvPr id="50" name="矩形 49">
             <a:extLst>
               <a:ext uri="{FF2B5EF4-FFF2-40B4-BE49-F238E27FC236}">
-                <a16:creationId xmlns:a16="http://schemas.microsoft.com/office/drawing/2014/main" id="{A1B82272-BA4B-42AC-89BD-AC83ACA79DCC}"/>
+                <ns2:creationId id="{A1B82272-BA4B-42AC-89BD-AC83ACA79DCC}"/>
               </a:ext>
             </a:extLst>
           </p:cNvPr>
@@ -6476,7 +6476,7 @@
           <p:cNvPr id="51" name="矩形 50">
             <a:extLst>
               <a:ext uri="{FF2B5EF4-FFF2-40B4-BE49-F238E27FC236}">
-                <a16:creationId xmlns:a16="http://schemas.microsoft.com/office/drawing/2014/main" id="{E5D55816-B6B5-400E-93E3-19A2B2F4CB59}"/>
+                <ns2:creationId id="{E5D55816-B6B5-400E-93E3-19A2B2F4CB59}"/>
               </a:ext>
             </a:extLst>
           </p:cNvPr>
@@ -6521,7 +6521,7 @@
           <p:cNvPr id="52" name="矩形 51">
             <a:extLst>
               <a:ext uri="{FF2B5EF4-FFF2-40B4-BE49-F238E27FC236}">
-                <a16:creationId xmlns:a16="http://schemas.microsoft.com/office/drawing/2014/main" id="{94E305B5-AE9C-4947-AECE-DD409CE39A64}"/>
+                <ns2:creationId id="{94E305B5-AE9C-4947-AECE-DD409CE39A64}"/>
               </a:ext>
             </a:extLst>
           </p:cNvPr>
@@ -6566,7 +6566,7 @@
           <p:cNvPr id="53" name="矩形 52">
             <a:extLst>
               <a:ext uri="{FF2B5EF4-FFF2-40B4-BE49-F238E27FC236}">
-                <a16:creationId xmlns:a16="http://schemas.microsoft.com/office/drawing/2014/main" id="{8AF1300D-E296-4200-85C6-65461B4AE2E1}"/>
+                <ns2:creationId id="{8AF1300D-E296-4200-85C6-65461B4AE2E1}"/>
               </a:ext>
             </a:extLst>
           </p:cNvPr>
@@ -6609,7 +6609,7 @@
     </p:spTree>
     <p:extLst>
       <p:ext uri="{BB962C8B-B14F-4D97-AF65-F5344CB8AC3E}">
-        <p14:creationId xmlns:p14="http://schemas.microsoft.com/office/powerpoint/2010/main" val="146336667"/>
+        <ns3:creationId val="146336667"/>
       </p:ext>
     </p:extLst>
   </p:cSld>
@@ -6620,7 +6620,7 @@
 </file>
 
 <file path=ppt/slides/slide12.xml><?xml version="1.0" encoding="utf-8"?>
-<p:sld xmlns:a="http://schemas.openxmlformats.org/drawingml/2006/main" xmlns:r="http://schemas.openxmlformats.org/officeDocument/2006/relationships" xmlns:p="http://schemas.openxmlformats.org/presentationml/2006/main">
+<p:sld xmlns:a="http://schemas.openxmlformats.org/drawingml/2006/main" xmlns:ns2="http://schemas.microsoft.com/office/drawing/2014/main" xmlns:ns3="http://schemas.microsoft.com/office/powerpoint/2010/main" xmlns:p="http://schemas.openxmlformats.org/presentationml/2006/main">
   <p:cSld>
     <p:spTree>
       <p:nvGrpSpPr>
@@ -6641,7 +6641,7 @@
           <p:cNvPr id="18" name="slide-bg">
             <a:extLst>
               <a:ext uri="{FF2B5EF4-FFF2-40B4-BE49-F238E27FC236}">
-                <a16:creationId xmlns:a16="http://schemas.microsoft.com/office/drawing/2014/main" id="{B9416BBE-33A7-4061-A52F-4FBF407AA81C}"/>
+                <ns2:creationId id="{B9416BBE-33A7-4061-A52F-4FBF407AA81C}"/>
               </a:ext>
             </a:extLst>
           </p:cNvPr>
@@ -6668,7 +6668,7 @@
           <p:cNvPr id="2" name="title">
             <a:extLst>
               <a:ext uri="{FF2B5EF4-FFF2-40B4-BE49-F238E27FC236}">
-                <a16:creationId xmlns:a16="http://schemas.microsoft.com/office/drawing/2014/main" id="{3FBD8D7F-0F8F-492C-9820-6FE44FB6AD04}"/>
+                <ns2:creationId id="{3FBD8D7F-0F8F-492C-9820-6FE44FB6AD04}"/>
               </a:ext>
             </a:extLst>
           </p:cNvPr>
@@ -6703,7 +6703,7 @@
                   <a:srgbClr val="102033"/>
                 </a:solidFill>
               </a:rPr>
-              <a:t>实验评价指标</a:t>
+              <a:t>测试方案与评价指标</a:t>
             </a:r>
           </a:p>
         </p:txBody>
@@ -6713,7 +6713,7 @@
           <p:cNvPr id="3" name="subtitle">
             <a:extLst>
               <a:ext uri="{FF2B5EF4-FFF2-40B4-BE49-F238E27FC236}">
-                <a16:creationId xmlns:a16="http://schemas.microsoft.com/office/drawing/2014/main" id="{79C02000-8D38-491C-8CB0-DA88B7076DF9}"/>
+                <ns2:creationId id="{79C02000-8D38-491C-8CB0-DA88B7076DF9}"/>
               </a:ext>
             </a:extLst>
           </p:cNvPr>
@@ -6748,7 +6748,7 @@
                   <a:srgbClr val="526274"/>
                 </a:solidFill>
               </a:rPr>
-              <a:t>从检测准确性和工程性能两个角度验证系统</a:t>
+              <a:t>从检测准确性、实时性和业务闭环三个角度验证系统</a:t>
             </a:r>
           </a:p>
         </p:txBody>
@@ -6758,7 +6758,7 @@
           <p:cNvPr id="4" name="title-rule">
             <a:extLst>
               <a:ext uri="{FF2B5EF4-FFF2-40B4-BE49-F238E27FC236}">
-                <a16:creationId xmlns:a16="http://schemas.microsoft.com/office/drawing/2014/main" id="{C15C887C-B4E9-48F8-A76F-82F46D5F5DA4}"/>
+                <ns2:creationId id="{C15C887C-B4E9-48F8-A76F-82F46D5F5DA4}"/>
               </a:ext>
             </a:extLst>
           </p:cNvPr>
@@ -6791,7 +6791,7 @@
           <p:cNvPr id="5" name="矩形: 圆角 4">
             <a:extLst>
               <a:ext uri="{FF2B5EF4-FFF2-40B4-BE49-F238E27FC236}">
-                <a16:creationId xmlns:a16="http://schemas.microsoft.com/office/drawing/2014/main" id="{ECD93C26-C677-41D7-88C0-D299DEC16E3B}"/>
+                <ns2:creationId id="{ECD93C26-C677-41D7-88C0-D299DEC16E3B}"/>
               </a:ext>
             </a:extLst>
           </p:cNvPr>
@@ -6820,7 +6820,7 @@
           <p:cNvPr id="6" name="矩形 5">
             <a:extLst>
               <a:ext uri="{FF2B5EF4-FFF2-40B4-BE49-F238E27FC236}">
-                <a16:creationId xmlns:a16="http://schemas.microsoft.com/office/drawing/2014/main" id="{D17C8EAB-2DDC-4D41-BDBC-E00A830ACA22}"/>
+                <ns2:creationId id="{D17C8EAB-2DDC-4D41-BDBC-E00A830ACA22}"/>
               </a:ext>
             </a:extLst>
           </p:cNvPr>
@@ -6865,7 +6865,7 @@
           <p:cNvPr id="7" name="bullet-0">
             <a:extLst>
               <a:ext uri="{FF2B5EF4-FFF2-40B4-BE49-F238E27FC236}">
-                <a16:creationId xmlns:a16="http://schemas.microsoft.com/office/drawing/2014/main" id="{311C35E8-BB41-4F07-A61D-86ED87D1765B}"/>
+                <ns2:creationId id="{311C35E8-BB41-4F07-A61D-86ED87D1765B}"/>
               </a:ext>
             </a:extLst>
           </p:cNvPr>
@@ -6910,7 +6910,7 @@
           <p:cNvPr id="8" name="bullet-1">
             <a:extLst>
               <a:ext uri="{FF2B5EF4-FFF2-40B4-BE49-F238E27FC236}">
-                <a16:creationId xmlns:a16="http://schemas.microsoft.com/office/drawing/2014/main" id="{C6A817E2-0BC6-4806-8903-1D62A9E1CFEF}"/>
+                <ns2:creationId id="{C6A817E2-0BC6-4806-8903-1D62A9E1CFEF}"/>
               </a:ext>
             </a:extLst>
           </p:cNvPr>
@@ -6955,7 +6955,7 @@
           <p:cNvPr id="9" name="bullet-2">
             <a:extLst>
               <a:ext uri="{FF2B5EF4-FFF2-40B4-BE49-F238E27FC236}">
-                <a16:creationId xmlns:a16="http://schemas.microsoft.com/office/drawing/2014/main" id="{95772805-D150-4BC2-9513-B44D63F5743F}"/>
+                <ns2:creationId id="{95772805-D150-4BC2-9513-B44D63F5743F}"/>
               </a:ext>
             </a:extLst>
           </p:cNvPr>
@@ -7000,7 +7000,7 @@
           <p:cNvPr id="10" name="bullet-3">
             <a:extLst>
               <a:ext uri="{FF2B5EF4-FFF2-40B4-BE49-F238E27FC236}">
-                <a16:creationId xmlns:a16="http://schemas.microsoft.com/office/drawing/2014/main" id="{0AA1CC60-67D9-4136-B17D-A9D7A5D1BCC8}"/>
+                <ns2:creationId id="{0AA1CC60-67D9-4136-B17D-A9D7A5D1BCC8}"/>
               </a:ext>
             </a:extLst>
           </p:cNvPr>
@@ -7045,7 +7045,7 @@
           <p:cNvPr id="11" name="矩形 10">
             <a:extLst>
               <a:ext uri="{FF2B5EF4-FFF2-40B4-BE49-F238E27FC236}">
-                <a16:creationId xmlns:a16="http://schemas.microsoft.com/office/drawing/2014/main" id="{41D1C75B-C1A3-4499-A44F-95D95247A549}"/>
+                <ns2:creationId id="{41D1C75B-C1A3-4499-A44F-95D95247A549}"/>
               </a:ext>
             </a:extLst>
           </p:cNvPr>
@@ -7090,7 +7090,7 @@
           <p:cNvPr id="12" name="矩形: 圆角 11">
             <a:extLst>
               <a:ext uri="{FF2B5EF4-FFF2-40B4-BE49-F238E27FC236}">
-                <a16:creationId xmlns:a16="http://schemas.microsoft.com/office/drawing/2014/main" id="{7E3615AB-4F7F-4DDE-B032-155A37F6C9DE}"/>
+                <ns2:creationId id="{7E3615AB-4F7F-4DDE-B032-155A37F6C9DE}"/>
               </a:ext>
             </a:extLst>
           </p:cNvPr>
@@ -7119,7 +7119,7 @@
           <p:cNvPr id="13" name="矩形 12">
             <a:extLst>
               <a:ext uri="{FF2B5EF4-FFF2-40B4-BE49-F238E27FC236}">
-                <a16:creationId xmlns:a16="http://schemas.microsoft.com/office/drawing/2014/main" id="{86B78265-762E-48B6-BEBB-42D39FCF2537}"/>
+                <ns2:creationId id="{86B78265-762E-48B6-BEBB-42D39FCF2537}"/>
               </a:ext>
             </a:extLst>
           </p:cNvPr>
@@ -7164,7 +7164,7 @@
           <p:cNvPr id="14" name="bullet-0">
             <a:extLst>
               <a:ext uri="{FF2B5EF4-FFF2-40B4-BE49-F238E27FC236}">
-                <a16:creationId xmlns:a16="http://schemas.microsoft.com/office/drawing/2014/main" id="{81E5D023-62CD-4997-ACFE-C88ECA3A87A8}"/>
+                <ns2:creationId id="{81E5D023-62CD-4997-ACFE-C88ECA3A87A8}"/>
               </a:ext>
             </a:extLst>
           </p:cNvPr>
@@ -7209,7 +7209,7 @@
           <p:cNvPr id="15" name="bullet-1">
             <a:extLst>
               <a:ext uri="{FF2B5EF4-FFF2-40B4-BE49-F238E27FC236}">
-                <a16:creationId xmlns:a16="http://schemas.microsoft.com/office/drawing/2014/main" id="{6198AEB5-BD90-49C3-9B16-FB905E76A8E9}"/>
+                <ns2:creationId id="{6198AEB5-BD90-49C3-9B16-FB905E76A8E9}"/>
               </a:ext>
             </a:extLst>
           </p:cNvPr>
@@ -7254,7 +7254,7 @@
           <p:cNvPr id="16" name="bullet-2">
             <a:extLst>
               <a:ext uri="{FF2B5EF4-FFF2-40B4-BE49-F238E27FC236}">
-                <a16:creationId xmlns:a16="http://schemas.microsoft.com/office/drawing/2014/main" id="{785333A2-C0B1-47C1-94AE-6543E497C5F1}"/>
+                <ns2:creationId id="{785333A2-C0B1-47C1-94AE-6543E497C5F1}"/>
               </a:ext>
             </a:extLst>
           </p:cNvPr>
@@ -7299,7 +7299,7 @@
           <p:cNvPr id="17" name="bullet-3">
             <a:extLst>
               <a:ext uri="{FF2B5EF4-FFF2-40B4-BE49-F238E27FC236}">
-                <a16:creationId xmlns:a16="http://schemas.microsoft.com/office/drawing/2014/main" id="{846B5AF4-3A3F-4806-A461-EAE4490EE09D}"/>
+                <ns2:creationId id="{846B5AF4-3A3F-4806-A461-EAE4490EE09D}"/>
               </a:ext>
             </a:extLst>
           </p:cNvPr>
@@ -7342,7 +7342,7 @@
     </p:spTree>
     <p:extLst>
       <p:ext uri="{BB962C8B-B14F-4D97-AF65-F5344CB8AC3E}">
-        <p14:creationId xmlns:p14="http://schemas.microsoft.com/office/powerpoint/2010/main" val="502876269"/>
+        <ns3:creationId val="502876269"/>
       </p:ext>
     </p:extLst>
   </p:cSld>
@@ -7353,7 +7353,7 @@
 </file>
 
 <file path=ppt/slides/slide13.xml><?xml version="1.0" encoding="utf-8"?>
-<p:sld xmlns:a="http://schemas.openxmlformats.org/drawingml/2006/main" xmlns:r="http://schemas.openxmlformats.org/officeDocument/2006/relationships" xmlns:p="http://schemas.openxmlformats.org/presentationml/2006/main">
+<p:sld xmlns:a="http://schemas.openxmlformats.org/drawingml/2006/main" xmlns:ns2="http://schemas.microsoft.com/office/drawing/2014/main" xmlns:ns3="http://schemas.openxmlformats.org/drawingml/2006/chart" xmlns:ns5="http://schemas.microsoft.com/office/powerpoint/2010/main" xmlns:p="http://schemas.openxmlformats.org/presentationml/2006/main" xmlns:r="http://schemas.openxmlformats.org/officeDocument/2006/relationships">
   <p:cSld>
     <p:spTree>
       <p:nvGrpSpPr>
@@ -7374,7 +7374,7 @@
           <p:cNvPr id="48" name="slide-bg">
             <a:extLst>
               <a:ext uri="{FF2B5EF4-FFF2-40B4-BE49-F238E27FC236}">
-                <a16:creationId xmlns:a16="http://schemas.microsoft.com/office/drawing/2014/main" id="{C3A8CA18-3593-4D27-B66B-A369A3B5F19B}"/>
+                <ns2:creationId id="{C3A8CA18-3593-4D27-B66B-A369A3B5F19B}"/>
               </a:ext>
             </a:extLst>
           </p:cNvPr>
@@ -7401,7 +7401,7 @@
           <p:cNvPr id="2" name="title">
             <a:extLst>
               <a:ext uri="{FF2B5EF4-FFF2-40B4-BE49-F238E27FC236}">
-                <a16:creationId xmlns:a16="http://schemas.microsoft.com/office/drawing/2014/main" id="{2588E8B5-1486-45A3-8EB9-23DE961FDB44}"/>
+                <ns2:creationId id="{2588E8B5-1486-45A3-8EB9-23DE961FDB44}"/>
               </a:ext>
             </a:extLst>
           </p:cNvPr>
@@ -7436,7 +7436,7 @@
                   <a:srgbClr val="102033"/>
                 </a:solidFill>
               </a:rPr>
-              <a:t>实验结果一：与传统检测方法对比</a:t>
+              <a:t>测试结果一：检测效果对比</a:t>
             </a:r>
           </a:p>
         </p:txBody>
@@ -7446,7 +7446,7 @@
           <p:cNvPr id="3" name="subtitle">
             <a:extLst>
               <a:ext uri="{FF2B5EF4-FFF2-40B4-BE49-F238E27FC236}">
-                <a16:creationId xmlns:a16="http://schemas.microsoft.com/office/drawing/2014/main" id="{CEB8D80C-1157-4D17-B6E6-4BAB9D9EB2D7}"/>
+                <ns2:creationId id="{CEB8D80C-1157-4D17-B6E6-4BAB9D9EB2D7}"/>
               </a:ext>
             </a:extLst>
           </p:cNvPr>
@@ -7481,7 +7481,7 @@
                   <a:srgbClr val="526274"/>
                 </a:solidFill>
               </a:rPr>
-              <a:t>LSTM AutoEncoder 在准确率和 F1-score 上取得最优综合表现</a:t>
+              <a:t>LSTM AutoEncoder 在准确率和 F1-score 上取得较好的综合表现</a:t>
             </a:r>
           </a:p>
         </p:txBody>
@@ -7491,7 +7491,7 @@
           <p:cNvPr id="4" name="title-rule">
             <a:extLst>
               <a:ext uri="{FF2B5EF4-FFF2-40B4-BE49-F238E27FC236}">
-                <a16:creationId xmlns:a16="http://schemas.microsoft.com/office/drawing/2014/main" id="{B5FECAD5-9A4C-41A7-8B60-CBA781D0BC94}"/>
+                <ns2:creationId id="{B5FECAD5-9A4C-41A7-8B60-CBA781D0BC94}"/>
               </a:ext>
             </a:extLst>
           </p:cNvPr>
@@ -7531,7 +7531,7 @@
         </p:xfrm>
         <a:graphic>
           <a:graphicData uri="http://schemas.openxmlformats.org/drawingml/2006/chart">
-            <c:chart xmlns:c="http://schemas.openxmlformats.org/drawingml/2006/chart" xmlns:r="http://schemas.openxmlformats.org/officeDocument/2006/relationships" r:id="rId3"/>
+            <ns3:chart r:id="rId3"/>
           </a:graphicData>
         </a:graphic>
       </p:graphicFrame>
@@ -7540,7 +7540,7 @@
           <p:cNvPr id="6" name="矩形 5">
             <a:extLst>
               <a:ext uri="{FF2B5EF4-FFF2-40B4-BE49-F238E27FC236}">
-                <a16:creationId xmlns:a16="http://schemas.microsoft.com/office/drawing/2014/main" id="{E0E95244-23F2-4714-9236-ABD4AFE43121}"/>
+                <ns2:creationId id="{E0E95244-23F2-4714-9236-ABD4AFE43121}"/>
               </a:ext>
             </a:extLst>
           </p:cNvPr>
@@ -7567,7 +7567,7 @@
           <p:cNvPr id="7" name="矩形 6">
             <a:extLst>
               <a:ext uri="{FF2B5EF4-FFF2-40B4-BE49-F238E27FC236}">
-                <a16:creationId xmlns:a16="http://schemas.microsoft.com/office/drawing/2014/main" id="{D8699282-CB3C-4CFF-BF63-E5BDDDE4265D}"/>
+                <ns2:creationId id="{D8699282-CB3C-4CFF-BF63-E5BDDDE4265D}"/>
               </a:ext>
             </a:extLst>
           </p:cNvPr>
@@ -7612,7 +7612,7 @@
           <p:cNvPr id="8" name="矩形 7">
             <a:extLst>
               <a:ext uri="{FF2B5EF4-FFF2-40B4-BE49-F238E27FC236}">
-                <a16:creationId xmlns:a16="http://schemas.microsoft.com/office/drawing/2014/main" id="{FC15F224-CD5E-4E2E-851F-2CE6F9041431}"/>
+                <ns2:creationId id="{FC15F224-CD5E-4E2E-851F-2CE6F9041431}"/>
               </a:ext>
             </a:extLst>
           </p:cNvPr>
@@ -7639,7 +7639,7 @@
           <p:cNvPr id="9" name="矩形 8">
             <a:extLst>
               <a:ext uri="{FF2B5EF4-FFF2-40B4-BE49-F238E27FC236}">
-                <a16:creationId xmlns:a16="http://schemas.microsoft.com/office/drawing/2014/main" id="{EDEDB6D2-7D71-448D-8D88-F17527C8ECB6}"/>
+                <ns2:creationId id="{EDEDB6D2-7D71-448D-8D88-F17527C8ECB6}"/>
               </a:ext>
             </a:extLst>
           </p:cNvPr>
@@ -7684,7 +7684,7 @@
           <p:cNvPr id="10" name="矩形 9">
             <a:extLst>
               <a:ext uri="{FF2B5EF4-FFF2-40B4-BE49-F238E27FC236}">
-                <a16:creationId xmlns:a16="http://schemas.microsoft.com/office/drawing/2014/main" id="{3CC42785-96E3-4E56-B964-1860E9841E7B}"/>
+                <ns2:creationId id="{3CC42785-96E3-4E56-B964-1860E9841E7B}"/>
               </a:ext>
             </a:extLst>
           </p:cNvPr>
@@ -7711,7 +7711,7 @@
           <p:cNvPr id="11" name="矩形 10">
             <a:extLst>
               <a:ext uri="{FF2B5EF4-FFF2-40B4-BE49-F238E27FC236}">
-                <a16:creationId xmlns:a16="http://schemas.microsoft.com/office/drawing/2014/main" id="{37C06A8A-09A8-4C7E-86C2-483970844BF0}"/>
+                <ns2:creationId id="{37C06A8A-09A8-4C7E-86C2-483970844BF0}"/>
               </a:ext>
             </a:extLst>
           </p:cNvPr>
@@ -7756,7 +7756,7 @@
           <p:cNvPr id="12" name="矩形 11">
             <a:extLst>
               <a:ext uri="{FF2B5EF4-FFF2-40B4-BE49-F238E27FC236}">
-                <a16:creationId xmlns:a16="http://schemas.microsoft.com/office/drawing/2014/main" id="{C17DD3C6-3980-4473-BF8C-42D807774827}"/>
+                <ns2:creationId id="{C17DD3C6-3980-4473-BF8C-42D807774827}"/>
               </a:ext>
             </a:extLst>
           </p:cNvPr>
@@ -7783,7 +7783,7 @@
           <p:cNvPr id="13" name="矩形 12">
             <a:extLst>
               <a:ext uri="{FF2B5EF4-FFF2-40B4-BE49-F238E27FC236}">
-                <a16:creationId xmlns:a16="http://schemas.microsoft.com/office/drawing/2014/main" id="{9A6E2A6B-CD6C-42DF-898D-F6E45CC5618D}"/>
+                <ns2:creationId id="{9A6E2A6B-CD6C-42DF-898D-F6E45CC5618D}"/>
               </a:ext>
             </a:extLst>
           </p:cNvPr>
@@ -7828,7 +7828,7 @@
           <p:cNvPr id="14" name="矩形 13">
             <a:extLst>
               <a:ext uri="{FF2B5EF4-FFF2-40B4-BE49-F238E27FC236}">
-                <a16:creationId xmlns:a16="http://schemas.microsoft.com/office/drawing/2014/main" id="{1F458272-4B51-4937-92C8-CD1CB00B15DA}"/>
+                <ns2:creationId id="{1F458272-4B51-4937-92C8-CD1CB00B15DA}"/>
               </a:ext>
             </a:extLst>
           </p:cNvPr>
@@ -7855,7 +7855,7 @@
           <p:cNvPr id="15" name="矩形 14">
             <a:extLst>
               <a:ext uri="{FF2B5EF4-FFF2-40B4-BE49-F238E27FC236}">
-                <a16:creationId xmlns:a16="http://schemas.microsoft.com/office/drawing/2014/main" id="{91B7D888-B70D-4541-9F87-2FC231F2A545}"/>
+                <ns2:creationId id="{91B7D888-B70D-4541-9F87-2FC231F2A545}"/>
               </a:ext>
             </a:extLst>
           </p:cNvPr>
@@ -7900,7 +7900,7 @@
           <p:cNvPr id="16" name="矩形 15">
             <a:extLst>
               <a:ext uri="{FF2B5EF4-FFF2-40B4-BE49-F238E27FC236}">
-                <a16:creationId xmlns:a16="http://schemas.microsoft.com/office/drawing/2014/main" id="{50902ADF-4A35-4598-8C57-7F1528E03D4D}"/>
+                <ns2:creationId id="{50902ADF-4A35-4598-8C57-7F1528E03D4D}"/>
               </a:ext>
             </a:extLst>
           </p:cNvPr>
@@ -7927,7 +7927,7 @@
           <p:cNvPr id="17" name="矩形 16">
             <a:extLst>
               <a:ext uri="{FF2B5EF4-FFF2-40B4-BE49-F238E27FC236}">
-                <a16:creationId xmlns:a16="http://schemas.microsoft.com/office/drawing/2014/main" id="{1C08C2FA-F63E-45C2-A07B-3511841F2083}"/>
+                <ns2:creationId id="{1C08C2FA-F63E-45C2-A07B-3511841F2083}"/>
               </a:ext>
             </a:extLst>
           </p:cNvPr>
@@ -7972,7 +7972,7 @@
           <p:cNvPr id="18" name="矩形 17">
             <a:extLst>
               <a:ext uri="{FF2B5EF4-FFF2-40B4-BE49-F238E27FC236}">
-                <a16:creationId xmlns:a16="http://schemas.microsoft.com/office/drawing/2014/main" id="{6137AA79-97FC-4FF4-BDAD-03FEF90F1969}"/>
+                <ns2:creationId id="{6137AA79-97FC-4FF4-BDAD-03FEF90F1969}"/>
               </a:ext>
             </a:extLst>
           </p:cNvPr>
@@ -7999,7 +7999,7 @@
           <p:cNvPr id="19" name="矩形 18">
             <a:extLst>
               <a:ext uri="{FF2B5EF4-FFF2-40B4-BE49-F238E27FC236}">
-                <a16:creationId xmlns:a16="http://schemas.microsoft.com/office/drawing/2014/main" id="{38C2A08D-B135-4395-B540-D8582464D6D5}"/>
+                <ns2:creationId id="{38C2A08D-B135-4395-B540-D8582464D6D5}"/>
               </a:ext>
             </a:extLst>
           </p:cNvPr>
@@ -8044,7 +8044,7 @@
           <p:cNvPr id="20" name="矩形 19">
             <a:extLst>
               <a:ext uri="{FF2B5EF4-FFF2-40B4-BE49-F238E27FC236}">
-                <a16:creationId xmlns:a16="http://schemas.microsoft.com/office/drawing/2014/main" id="{80EE6DC7-90F3-45D8-9DB2-E3D78A4C8835}"/>
+                <ns2:creationId id="{80EE6DC7-90F3-45D8-9DB2-E3D78A4C8835}"/>
               </a:ext>
             </a:extLst>
           </p:cNvPr>
@@ -8071,7 +8071,7 @@
           <p:cNvPr id="21" name="矩形 20">
             <a:extLst>
               <a:ext uri="{FF2B5EF4-FFF2-40B4-BE49-F238E27FC236}">
-                <a16:creationId xmlns:a16="http://schemas.microsoft.com/office/drawing/2014/main" id="{E5BD3BC8-051B-404C-BEFB-1850892798A0}"/>
+                <ns2:creationId id="{E5BD3BC8-051B-404C-BEFB-1850892798A0}"/>
               </a:ext>
             </a:extLst>
           </p:cNvPr>
@@ -8116,7 +8116,7 @@
           <p:cNvPr id="22" name="矩形 21">
             <a:extLst>
               <a:ext uri="{FF2B5EF4-FFF2-40B4-BE49-F238E27FC236}">
-                <a16:creationId xmlns:a16="http://schemas.microsoft.com/office/drawing/2014/main" id="{134D7ED7-8582-4CE2-8CD8-9B5FF1FBA238}"/>
+                <ns2:creationId id="{134D7ED7-8582-4CE2-8CD8-9B5FF1FBA238}"/>
               </a:ext>
             </a:extLst>
           </p:cNvPr>
@@ -8143,7 +8143,7 @@
           <p:cNvPr id="23" name="矩形 22">
             <a:extLst>
               <a:ext uri="{FF2B5EF4-FFF2-40B4-BE49-F238E27FC236}">
-                <a16:creationId xmlns:a16="http://schemas.microsoft.com/office/drawing/2014/main" id="{EE9DF3F3-2F55-4E00-9A36-34C57385DF59}"/>
+                <ns2:creationId id="{EE9DF3F3-2F55-4E00-9A36-34C57385DF59}"/>
               </a:ext>
             </a:extLst>
           </p:cNvPr>
@@ -8188,7 +8188,7 @@
           <p:cNvPr id="24" name="矩形 23">
             <a:extLst>
               <a:ext uri="{FF2B5EF4-FFF2-40B4-BE49-F238E27FC236}">
-                <a16:creationId xmlns:a16="http://schemas.microsoft.com/office/drawing/2014/main" id="{8DBE01C6-7AA0-466A-A3B7-1EC0AE3EF46B}"/>
+                <ns2:creationId id="{8DBE01C6-7AA0-466A-A3B7-1EC0AE3EF46B}"/>
               </a:ext>
             </a:extLst>
           </p:cNvPr>
@@ -8215,7 +8215,7 @@
           <p:cNvPr id="25" name="矩形 24">
             <a:extLst>
               <a:ext uri="{FF2B5EF4-FFF2-40B4-BE49-F238E27FC236}">
-                <a16:creationId xmlns:a16="http://schemas.microsoft.com/office/drawing/2014/main" id="{1259AFB6-9F9A-4BE7-A4B5-33A06795C5C7}"/>
+                <ns2:creationId id="{1259AFB6-9F9A-4BE7-A4B5-33A06795C5C7}"/>
               </a:ext>
             </a:extLst>
           </p:cNvPr>
@@ -8260,7 +8260,7 @@
           <p:cNvPr id="26" name="矩形 25">
             <a:extLst>
               <a:ext uri="{FF2B5EF4-FFF2-40B4-BE49-F238E27FC236}">
-                <a16:creationId xmlns:a16="http://schemas.microsoft.com/office/drawing/2014/main" id="{4767C3E1-9832-411D-937B-CD40564BCE65}"/>
+                <ns2:creationId id="{4767C3E1-9832-411D-937B-CD40564BCE65}"/>
               </a:ext>
             </a:extLst>
           </p:cNvPr>
@@ -8287,7 +8287,7 @@
           <p:cNvPr id="27" name="矩形 26">
             <a:extLst>
               <a:ext uri="{FF2B5EF4-FFF2-40B4-BE49-F238E27FC236}">
-                <a16:creationId xmlns:a16="http://schemas.microsoft.com/office/drawing/2014/main" id="{CF8F3AF6-EC25-4DEF-8ECF-0351E992B5AC}"/>
+                <ns2:creationId id="{CF8F3AF6-EC25-4DEF-8ECF-0351E992B5AC}"/>
               </a:ext>
             </a:extLst>
           </p:cNvPr>
@@ -8332,7 +8332,7 @@
           <p:cNvPr id="28" name="矩形 27">
             <a:extLst>
               <a:ext uri="{FF2B5EF4-FFF2-40B4-BE49-F238E27FC236}">
-                <a16:creationId xmlns:a16="http://schemas.microsoft.com/office/drawing/2014/main" id="{50CA60B8-5929-45F1-9C83-A317F2CA674E}"/>
+                <ns2:creationId id="{50CA60B8-5929-45F1-9C83-A317F2CA674E}"/>
               </a:ext>
             </a:extLst>
           </p:cNvPr>
@@ -8359,7 +8359,7 @@
           <p:cNvPr id="29" name="矩形 28">
             <a:extLst>
               <a:ext uri="{FF2B5EF4-FFF2-40B4-BE49-F238E27FC236}">
-                <a16:creationId xmlns:a16="http://schemas.microsoft.com/office/drawing/2014/main" id="{D5A1B709-85AF-4157-9BC1-4E2D53511F4E}"/>
+                <ns2:creationId id="{D5A1B709-85AF-4157-9BC1-4E2D53511F4E}"/>
               </a:ext>
             </a:extLst>
           </p:cNvPr>
@@ -8404,7 +8404,7 @@
           <p:cNvPr id="30" name="矩形 29">
             <a:extLst>
               <a:ext uri="{FF2B5EF4-FFF2-40B4-BE49-F238E27FC236}">
-                <a16:creationId xmlns:a16="http://schemas.microsoft.com/office/drawing/2014/main" id="{CB6C3A97-7420-4C25-A670-0DD07E02481B}"/>
+                <ns2:creationId id="{CB6C3A97-7420-4C25-A670-0DD07E02481B}"/>
               </a:ext>
             </a:extLst>
           </p:cNvPr>
@@ -8431,7 +8431,7 @@
           <p:cNvPr id="31" name="矩形 30">
             <a:extLst>
               <a:ext uri="{FF2B5EF4-FFF2-40B4-BE49-F238E27FC236}">
-                <a16:creationId xmlns:a16="http://schemas.microsoft.com/office/drawing/2014/main" id="{0280CEAC-5DDB-4F22-A9C3-10E24405C756}"/>
+                <ns2:creationId id="{0280CEAC-5DDB-4F22-A9C3-10E24405C756}"/>
               </a:ext>
             </a:extLst>
           </p:cNvPr>
@@ -8476,7 +8476,7 @@
           <p:cNvPr id="32" name="矩形 31">
             <a:extLst>
               <a:ext uri="{FF2B5EF4-FFF2-40B4-BE49-F238E27FC236}">
-                <a16:creationId xmlns:a16="http://schemas.microsoft.com/office/drawing/2014/main" id="{34C5CCD6-0C23-479B-8855-4DFBD78FC24E}"/>
+                <ns2:creationId id="{34C5CCD6-0C23-479B-8855-4DFBD78FC24E}"/>
               </a:ext>
             </a:extLst>
           </p:cNvPr>
@@ -8503,7 +8503,7 @@
           <p:cNvPr id="33" name="矩形 32">
             <a:extLst>
               <a:ext uri="{FF2B5EF4-FFF2-40B4-BE49-F238E27FC236}">
-                <a16:creationId xmlns:a16="http://schemas.microsoft.com/office/drawing/2014/main" id="{741D8BE7-04EF-4AD1-85F6-D9C099A03F57}"/>
+                <ns2:creationId id="{741D8BE7-04EF-4AD1-85F6-D9C099A03F57}"/>
               </a:ext>
             </a:extLst>
           </p:cNvPr>
@@ -8548,7 +8548,7 @@
           <p:cNvPr id="34" name="矩形 33">
             <a:extLst>
               <a:ext uri="{FF2B5EF4-FFF2-40B4-BE49-F238E27FC236}">
-                <a16:creationId xmlns:a16="http://schemas.microsoft.com/office/drawing/2014/main" id="{DFEDAA83-0B0E-4752-94FF-297FC78728F8}"/>
+                <ns2:creationId id="{DFEDAA83-0B0E-4752-94FF-297FC78728F8}"/>
               </a:ext>
             </a:extLst>
           </p:cNvPr>
@@ -8575,7 +8575,7 @@
           <p:cNvPr id="35" name="矩形 34">
             <a:extLst>
               <a:ext uri="{FF2B5EF4-FFF2-40B4-BE49-F238E27FC236}">
-                <a16:creationId xmlns:a16="http://schemas.microsoft.com/office/drawing/2014/main" id="{C4575B33-2944-40D2-BE78-BC3E36B60317}"/>
+                <ns2:creationId id="{C4575B33-2944-40D2-BE78-BC3E36B60317}"/>
               </a:ext>
             </a:extLst>
           </p:cNvPr>
@@ -8620,7 +8620,7 @@
           <p:cNvPr id="36" name="矩形 35">
             <a:extLst>
               <a:ext uri="{FF2B5EF4-FFF2-40B4-BE49-F238E27FC236}">
-                <a16:creationId xmlns:a16="http://schemas.microsoft.com/office/drawing/2014/main" id="{2C0A0371-E02F-48A3-9445-96D28C673730}"/>
+                <ns2:creationId id="{2C0A0371-E02F-48A3-9445-96D28C673730}"/>
               </a:ext>
             </a:extLst>
           </p:cNvPr>
@@ -8647,7 +8647,7 @@
           <p:cNvPr id="37" name="矩形 36">
             <a:extLst>
               <a:ext uri="{FF2B5EF4-FFF2-40B4-BE49-F238E27FC236}">
-                <a16:creationId xmlns:a16="http://schemas.microsoft.com/office/drawing/2014/main" id="{AF6B301B-09B1-4634-8163-469D221DBA03}"/>
+                <ns2:creationId id="{AF6B301B-09B1-4634-8163-469D221DBA03}"/>
               </a:ext>
             </a:extLst>
           </p:cNvPr>
@@ -8692,7 +8692,7 @@
           <p:cNvPr id="38" name="矩形 37">
             <a:extLst>
               <a:ext uri="{FF2B5EF4-FFF2-40B4-BE49-F238E27FC236}">
-                <a16:creationId xmlns:a16="http://schemas.microsoft.com/office/drawing/2014/main" id="{42A25D68-617F-4B9F-A59C-A2AEF93B3B5F}"/>
+                <ns2:creationId id="{42A25D68-617F-4B9F-A59C-A2AEF93B3B5F}"/>
               </a:ext>
             </a:extLst>
           </p:cNvPr>
@@ -8719,7 +8719,7 @@
           <p:cNvPr id="39" name="矩形 38">
             <a:extLst>
               <a:ext uri="{FF2B5EF4-FFF2-40B4-BE49-F238E27FC236}">
-                <a16:creationId xmlns:a16="http://schemas.microsoft.com/office/drawing/2014/main" id="{CE76E7B7-FF50-4B29-8860-360436F0346F}"/>
+                <ns2:creationId id="{CE76E7B7-FF50-4B29-8860-360436F0346F}"/>
               </a:ext>
             </a:extLst>
           </p:cNvPr>
@@ -8764,7 +8764,7 @@
           <p:cNvPr id="40" name="矩形 39">
             <a:extLst>
               <a:ext uri="{FF2B5EF4-FFF2-40B4-BE49-F238E27FC236}">
-                <a16:creationId xmlns:a16="http://schemas.microsoft.com/office/drawing/2014/main" id="{C2582681-DCAA-48A5-A4D5-524E8DA2A649}"/>
+                <ns2:creationId id="{C2582681-DCAA-48A5-A4D5-524E8DA2A649}"/>
               </a:ext>
             </a:extLst>
           </p:cNvPr>
@@ -8791,7 +8791,7 @@
           <p:cNvPr id="41" name="矩形 40">
             <a:extLst>
               <a:ext uri="{FF2B5EF4-FFF2-40B4-BE49-F238E27FC236}">
-                <a16:creationId xmlns:a16="http://schemas.microsoft.com/office/drawing/2014/main" id="{5B85AD20-D497-4404-8DFA-EFEC0687B00B}"/>
+                <ns2:creationId id="{5B85AD20-D497-4404-8DFA-EFEC0687B00B}"/>
               </a:ext>
             </a:extLst>
           </p:cNvPr>
@@ -8836,7 +8836,7 @@
           <p:cNvPr id="42" name="矩形 41">
             <a:extLst>
               <a:ext uri="{FF2B5EF4-FFF2-40B4-BE49-F238E27FC236}">
-                <a16:creationId xmlns:a16="http://schemas.microsoft.com/office/drawing/2014/main" id="{1ADB3188-D50D-4136-A5DA-548D89751F7E}"/>
+                <ns2:creationId id="{1ADB3188-D50D-4136-A5DA-548D89751F7E}"/>
               </a:ext>
             </a:extLst>
           </p:cNvPr>
@@ -8863,7 +8863,7 @@
           <p:cNvPr id="43" name="矩形 42">
             <a:extLst>
               <a:ext uri="{FF2B5EF4-FFF2-40B4-BE49-F238E27FC236}">
-                <a16:creationId xmlns:a16="http://schemas.microsoft.com/office/drawing/2014/main" id="{DC970314-2CF8-4FB4-82E6-BE623D1612B9}"/>
+                <ns2:creationId id="{DC970314-2CF8-4FB4-82E6-BE623D1612B9}"/>
               </a:ext>
             </a:extLst>
           </p:cNvPr>
@@ -8908,7 +8908,7 @@
           <p:cNvPr id="44" name="矩形 43">
             <a:extLst>
               <a:ext uri="{FF2B5EF4-FFF2-40B4-BE49-F238E27FC236}">
-                <a16:creationId xmlns:a16="http://schemas.microsoft.com/office/drawing/2014/main" id="{AB4AE55D-85DB-4A14-8912-3A32457ED96D}"/>
+                <ns2:creationId id="{AB4AE55D-85DB-4A14-8912-3A32457ED96D}"/>
               </a:ext>
             </a:extLst>
           </p:cNvPr>
@@ -8935,7 +8935,7 @@
           <p:cNvPr id="45" name="矩形 44">
             <a:extLst>
               <a:ext uri="{FF2B5EF4-FFF2-40B4-BE49-F238E27FC236}">
-                <a16:creationId xmlns:a16="http://schemas.microsoft.com/office/drawing/2014/main" id="{8FBE234E-74D0-411F-AD7E-88F14A8D895F}"/>
+                <ns2:creationId id="{8FBE234E-74D0-411F-AD7E-88F14A8D895F}"/>
               </a:ext>
             </a:extLst>
           </p:cNvPr>
@@ -8980,7 +8980,7 @@
           <p:cNvPr id="46" name="矩形: 圆角 45">
             <a:extLst>
               <a:ext uri="{FF2B5EF4-FFF2-40B4-BE49-F238E27FC236}">
-                <a16:creationId xmlns:a16="http://schemas.microsoft.com/office/drawing/2014/main" id="{DE5BFBD1-3D1D-4426-AA1D-A7D892783A85}"/>
+                <ns2:creationId id="{DE5BFBD1-3D1D-4426-AA1D-A7D892783A85}"/>
               </a:ext>
             </a:extLst>
           </p:cNvPr>
@@ -9009,7 +9009,7 @@
           <p:cNvPr id="47" name="矩形 46">
             <a:extLst>
               <a:ext uri="{FF2B5EF4-FFF2-40B4-BE49-F238E27FC236}">
-                <a16:creationId xmlns:a16="http://schemas.microsoft.com/office/drawing/2014/main" id="{2E76C526-CA02-434B-A978-3D52F91AC02D}"/>
+                <ns2:creationId id="{2E76C526-CA02-434B-A978-3D52F91AC02D}"/>
               </a:ext>
             </a:extLst>
           </p:cNvPr>
@@ -9044,7 +9044,7 @@
                   <a:srgbClr val="1667B7"/>
                 </a:solidFill>
               </a:rPr>
-              <a:t>结论：固定阈值对明显越界有效但召回不足；3-Sigma 召回较高但误报多；LSTM AE 能学习多维时序关系，综合表现更稳定。</a:t>
+              <a:t>结论：固定阈值对明显越界有效但召回不足；3-Sigma 召回较高但误报偏多；LSTM AE 能学习多维时序关系，综合表现更稳定。</a:t>
             </a:r>
           </a:p>
         </p:txBody>
@@ -9052,7 +9052,7 @@
     </p:spTree>
     <p:extLst>
       <p:ext uri="{BB962C8B-B14F-4D97-AF65-F5344CB8AC3E}">
-        <p14:creationId xmlns:p14="http://schemas.microsoft.com/office/powerpoint/2010/main" val="2043492568"/>
+        <ns5:creationId val="2043492568"/>
       </p:ext>
     </p:extLst>
   </p:cSld>
@@ -9063,7 +9063,7 @@
 </file>
 
 <file path=ppt/slides/slide14.xml><?xml version="1.0" encoding="utf-8"?>
-<p:sld xmlns:a="http://schemas.openxmlformats.org/drawingml/2006/main" xmlns:r="http://schemas.openxmlformats.org/officeDocument/2006/relationships" xmlns:p="http://schemas.openxmlformats.org/presentationml/2006/main">
+<p:sld xmlns:a="http://schemas.openxmlformats.org/drawingml/2006/main" xmlns:ns2="http://schemas.microsoft.com/office/drawing/2014/main" xmlns:ns3="http://schemas.openxmlformats.org/drawingml/2006/chart" xmlns:ns5="http://schemas.microsoft.com/office/powerpoint/2010/main" xmlns:p="http://schemas.openxmlformats.org/presentationml/2006/main" xmlns:r="http://schemas.openxmlformats.org/officeDocument/2006/relationships">
   <p:cSld>
     <p:spTree>
       <p:nvGrpSpPr>
@@ -9084,7 +9084,7 @@
           <p:cNvPr id="13" name="slide-bg">
             <a:extLst>
               <a:ext uri="{FF2B5EF4-FFF2-40B4-BE49-F238E27FC236}">
-                <a16:creationId xmlns:a16="http://schemas.microsoft.com/office/drawing/2014/main" id="{3FA8EEDE-D5C7-474B-8F89-1131D1B31750}"/>
+                <ns2:creationId id="{3FA8EEDE-D5C7-474B-8F89-1131D1B31750}"/>
               </a:ext>
             </a:extLst>
           </p:cNvPr>
@@ -9111,7 +9111,7 @@
           <p:cNvPr id="2" name="title">
             <a:extLst>
               <a:ext uri="{FF2B5EF4-FFF2-40B4-BE49-F238E27FC236}">
-                <a16:creationId xmlns:a16="http://schemas.microsoft.com/office/drawing/2014/main" id="{4A6AAA62-522D-4CD7-B867-F1BA87D074D9}"/>
+                <ns2:creationId id="{4A6AAA62-522D-4CD7-B867-F1BA87D074D9}"/>
               </a:ext>
             </a:extLst>
           </p:cNvPr>
@@ -9146,7 +9146,7 @@
                   <a:srgbClr val="102033"/>
                 </a:solidFill>
               </a:rPr>
-              <a:t>实验结果二：阈值 τ 对检测效果的影响</a:t>
+              <a:t>测试结果二：阈值对检测效果的影响</a:t>
             </a:r>
           </a:p>
         </p:txBody>
@@ -9156,7 +9156,7 @@
           <p:cNvPr id="3" name="subtitle">
             <a:extLst>
               <a:ext uri="{FF2B5EF4-FFF2-40B4-BE49-F238E27FC236}">
-                <a16:creationId xmlns:a16="http://schemas.microsoft.com/office/drawing/2014/main" id="{84C88BC9-AFA1-4DC0-B099-EF9D4C8C23BC}"/>
+                <ns2:creationId id="{84C88BC9-AFA1-4DC0-B099-EF9D4C8C23BC}"/>
               </a:ext>
             </a:extLst>
           </p:cNvPr>
@@ -9201,7 +9201,7 @@
           <p:cNvPr id="4" name="title-rule">
             <a:extLst>
               <a:ext uri="{FF2B5EF4-FFF2-40B4-BE49-F238E27FC236}">
-                <a16:creationId xmlns:a16="http://schemas.microsoft.com/office/drawing/2014/main" id="{2AE4A669-C978-4908-BEFA-4CB082BDD70C}"/>
+                <ns2:creationId id="{2AE4A669-C978-4908-BEFA-4CB082BDD70C}"/>
               </a:ext>
             </a:extLst>
           </p:cNvPr>
@@ -9241,7 +9241,7 @@
         </p:xfrm>
         <a:graphic>
           <a:graphicData uri="http://schemas.openxmlformats.org/drawingml/2006/chart">
-            <c:chart xmlns:c="http://schemas.openxmlformats.org/drawingml/2006/chart" xmlns:r="http://schemas.openxmlformats.org/officeDocument/2006/relationships" r:id="rId3"/>
+            <ns3:chart r:id="rId3"/>
           </a:graphicData>
         </a:graphic>
       </p:graphicFrame>
@@ -9250,7 +9250,7 @@
           <p:cNvPr id="6" name="矩形 5">
             <a:extLst>
               <a:ext uri="{FF2B5EF4-FFF2-40B4-BE49-F238E27FC236}">
-                <a16:creationId xmlns:a16="http://schemas.microsoft.com/office/drawing/2014/main" id="{70C1EF53-B137-4F3F-B2F5-77C564EB3C7A}"/>
+                <ns2:creationId id="{70C1EF53-B137-4F3F-B2F5-77C564EB3C7A}"/>
               </a:ext>
             </a:extLst>
           </p:cNvPr>
@@ -9295,7 +9295,7 @@
           <p:cNvPr id="7" name="矩形 6">
             <a:extLst>
               <a:ext uri="{FF2B5EF4-FFF2-40B4-BE49-F238E27FC236}">
-                <a16:creationId xmlns:a16="http://schemas.microsoft.com/office/drawing/2014/main" id="{38439950-162E-42B3-9406-1F614C4131B5}"/>
+                <ns2:creationId id="{38439950-162E-42B3-9406-1F614C4131B5}"/>
               </a:ext>
             </a:extLst>
           </p:cNvPr>
@@ -9340,7 +9340,7 @@
           <p:cNvPr id="8" name="矩形 7">
             <a:extLst>
               <a:ext uri="{FF2B5EF4-FFF2-40B4-BE49-F238E27FC236}">
-                <a16:creationId xmlns:a16="http://schemas.microsoft.com/office/drawing/2014/main" id="{ECF0EEF2-C652-4F46-B269-FAD9AE28C87A}"/>
+                <ns2:creationId id="{ECF0EEF2-C652-4F46-B269-FAD9AE28C87A}"/>
               </a:ext>
             </a:extLst>
           </p:cNvPr>
@@ -9385,7 +9385,7 @@
           <p:cNvPr id="9" name="矩形: 圆角 8">
             <a:extLst>
               <a:ext uri="{FF2B5EF4-FFF2-40B4-BE49-F238E27FC236}">
-                <a16:creationId xmlns:a16="http://schemas.microsoft.com/office/drawing/2014/main" id="{A0C89814-962A-4338-89A6-6DEFBCB5D0C1}"/>
+                <ns2:creationId id="{A0C89814-962A-4338-89A6-6DEFBCB5D0C1}"/>
               </a:ext>
             </a:extLst>
           </p:cNvPr>
@@ -9414,7 +9414,7 @@
           <p:cNvPr id="10" name="bullet-0">
             <a:extLst>
               <a:ext uri="{FF2B5EF4-FFF2-40B4-BE49-F238E27FC236}">
-                <a16:creationId xmlns:a16="http://schemas.microsoft.com/office/drawing/2014/main" id="{8C16D4A2-2234-4024-9317-33D07CDA325C}"/>
+                <ns2:creationId id="{8C16D4A2-2234-4024-9317-33D07CDA325C}"/>
               </a:ext>
             </a:extLst>
           </p:cNvPr>
@@ -9449,7 +9449,7 @@
                   <a:srgbClr val="102033"/>
                 </a:solidFill>
               </a:rPr>
-              <a:t>• 低阈值：召回高，但误报增加</a:t>
+              <a:t>• 低阈值：召回率高，但误报增加</a:t>
             </a:r>
           </a:p>
         </p:txBody>
@@ -9459,7 +9459,7 @@
           <p:cNvPr id="11" name="bullet-1">
             <a:extLst>
               <a:ext uri="{FF2B5EF4-FFF2-40B4-BE49-F238E27FC236}">
-                <a16:creationId xmlns:a16="http://schemas.microsoft.com/office/drawing/2014/main" id="{DED66B61-2CD8-4952-B821-047C6D8EE3A0}"/>
+                <ns2:creationId id="{DED66B61-2CD8-4952-B821-047C6D8EE3A0}"/>
               </a:ext>
             </a:extLst>
           </p:cNvPr>
@@ -9504,7 +9504,7 @@
           <p:cNvPr id="12" name="bullet-2">
             <a:extLst>
               <a:ext uri="{FF2B5EF4-FFF2-40B4-BE49-F238E27FC236}">
-                <a16:creationId xmlns:a16="http://schemas.microsoft.com/office/drawing/2014/main" id="{44B3971C-3E82-4770-866B-B89B31BB7043}"/>
+                <ns2:creationId id="{44B3971C-3E82-4770-866B-B89B31BB7043}"/>
               </a:ext>
             </a:extLst>
           </p:cNvPr>
@@ -9547,7 +9547,7 @@
     </p:spTree>
     <p:extLst>
       <p:ext uri="{BB962C8B-B14F-4D97-AF65-F5344CB8AC3E}">
-        <p14:creationId xmlns:p14="http://schemas.microsoft.com/office/powerpoint/2010/main" val="1191783237"/>
+        <ns5:creationId val="1191783237"/>
       </p:ext>
     </p:extLst>
   </p:cSld>
@@ -9558,7 +9558,7 @@
 </file>
 
 <file path=ppt/slides/slide15.xml><?xml version="1.0" encoding="utf-8"?>
-<p:sld xmlns:a="http://schemas.openxmlformats.org/drawingml/2006/main" xmlns:r="http://schemas.openxmlformats.org/officeDocument/2006/relationships" xmlns:p="http://schemas.openxmlformats.org/presentationml/2006/main">
+<p:sld xmlns:a="http://schemas.openxmlformats.org/drawingml/2006/main" xmlns:ns2="http://schemas.microsoft.com/office/drawing/2014/main" xmlns:ns3="http://schemas.microsoft.com/office/powerpoint/2010/main" xmlns:p="http://schemas.openxmlformats.org/presentationml/2006/main">
   <p:cSld>
     <p:spTree>
       <p:nvGrpSpPr>
@@ -9579,7 +9579,7 @@
           <p:cNvPr id="70" name="slide-bg">
             <a:extLst>
               <a:ext uri="{FF2B5EF4-FFF2-40B4-BE49-F238E27FC236}">
-                <a16:creationId xmlns:a16="http://schemas.microsoft.com/office/drawing/2014/main" id="{B714C2CB-1940-44A9-98F1-EA4B23CAA43C}"/>
+                <ns2:creationId id="{B714C2CB-1940-44A9-98F1-EA4B23CAA43C}"/>
               </a:ext>
             </a:extLst>
           </p:cNvPr>
@@ -9606,7 +9606,7 @@
           <p:cNvPr id="2" name="title">
             <a:extLst>
               <a:ext uri="{FF2B5EF4-FFF2-40B4-BE49-F238E27FC236}">
-                <a16:creationId xmlns:a16="http://schemas.microsoft.com/office/drawing/2014/main" id="{1C66E7E2-AD60-4D71-9CA6-E48477DF42A5}"/>
+                <ns2:creationId id="{1C66E7E2-AD60-4D71-9CA6-E48477DF42A5}"/>
               </a:ext>
             </a:extLst>
           </p:cNvPr>
@@ -9641,7 +9641,7 @@
                   <a:srgbClr val="102033"/>
                 </a:solidFill>
               </a:rPr>
-              <a:t>实验结果三：系统实时性测试</a:t>
+              <a:t>测试结果三：系统实时性</a:t>
             </a:r>
           </a:p>
         </p:txBody>
@@ -9651,7 +9651,7 @@
           <p:cNvPr id="3" name="subtitle">
             <a:extLst>
               <a:ext uri="{FF2B5EF4-FFF2-40B4-BE49-F238E27FC236}">
-                <a16:creationId xmlns:a16="http://schemas.microsoft.com/office/drawing/2014/main" id="{3BFC5770-AA8B-445A-863E-2D93C442F4A9}"/>
+                <ns2:creationId id="{3BFC5770-AA8B-445A-863E-2D93C442F4A9}"/>
               </a:ext>
             </a:extLst>
           </p:cNvPr>
@@ -9696,7 +9696,7 @@
           <p:cNvPr id="4" name="title-rule">
             <a:extLst>
               <a:ext uri="{FF2B5EF4-FFF2-40B4-BE49-F238E27FC236}">
-                <a16:creationId xmlns:a16="http://schemas.microsoft.com/office/drawing/2014/main" id="{8A7EEE5F-CFA9-41DF-8D6A-611F4A98E1F1}"/>
+                <ns2:creationId id="{8A7EEE5F-CFA9-41DF-8D6A-611F4A98E1F1}"/>
               </a:ext>
             </a:extLst>
           </p:cNvPr>
@@ -9729,7 +9729,7 @@
           <p:cNvPr id="5" name="矩形 4">
             <a:extLst>
               <a:ext uri="{FF2B5EF4-FFF2-40B4-BE49-F238E27FC236}">
-                <a16:creationId xmlns:a16="http://schemas.microsoft.com/office/drawing/2014/main" id="{263FF7C3-D574-438C-8387-A5645AD3765F}"/>
+                <ns2:creationId id="{263FF7C3-D574-438C-8387-A5645AD3765F}"/>
               </a:ext>
             </a:extLst>
           </p:cNvPr>
@@ -9756,7 +9756,7 @@
           <p:cNvPr id="6" name="矩形 5">
             <a:extLst>
               <a:ext uri="{FF2B5EF4-FFF2-40B4-BE49-F238E27FC236}">
-                <a16:creationId xmlns:a16="http://schemas.microsoft.com/office/drawing/2014/main" id="{97183714-45B2-4171-9DBB-BED2F7D420EA}"/>
+                <ns2:creationId id="{97183714-45B2-4171-9DBB-BED2F7D420EA}"/>
               </a:ext>
             </a:extLst>
           </p:cNvPr>
@@ -9801,7 +9801,7 @@
           <p:cNvPr id="7" name="矩形 6">
             <a:extLst>
               <a:ext uri="{FF2B5EF4-FFF2-40B4-BE49-F238E27FC236}">
-                <a16:creationId xmlns:a16="http://schemas.microsoft.com/office/drawing/2014/main" id="{99FC534D-5FB3-4586-89AB-278F956F8514}"/>
+                <ns2:creationId id="{99FC534D-5FB3-4586-89AB-278F956F8514}"/>
               </a:ext>
             </a:extLst>
           </p:cNvPr>
@@ -9828,7 +9828,7 @@
           <p:cNvPr id="8" name="矩形 7">
             <a:extLst>
               <a:ext uri="{FF2B5EF4-FFF2-40B4-BE49-F238E27FC236}">
-                <a16:creationId xmlns:a16="http://schemas.microsoft.com/office/drawing/2014/main" id="{9FF992C4-07B5-4261-A42E-BCE526085AE2}"/>
+                <ns2:creationId id="{9FF992C4-07B5-4261-A42E-BCE526085AE2}"/>
               </a:ext>
             </a:extLst>
           </p:cNvPr>
@@ -9873,7 +9873,7 @@
           <p:cNvPr id="9" name="矩形 8">
             <a:extLst>
               <a:ext uri="{FF2B5EF4-FFF2-40B4-BE49-F238E27FC236}">
-                <a16:creationId xmlns:a16="http://schemas.microsoft.com/office/drawing/2014/main" id="{068AD8C8-943C-494A-9E2C-57A8D4B4DF80}"/>
+                <ns2:creationId id="{068AD8C8-943C-494A-9E2C-57A8D4B4DF80}"/>
               </a:ext>
             </a:extLst>
           </p:cNvPr>
@@ -9900,7 +9900,7 @@
           <p:cNvPr id="10" name="矩形 9">
             <a:extLst>
               <a:ext uri="{FF2B5EF4-FFF2-40B4-BE49-F238E27FC236}">
-                <a16:creationId xmlns:a16="http://schemas.microsoft.com/office/drawing/2014/main" id="{34CFEBF0-3712-4CEE-A3E4-C0CD81DE6B33}"/>
+                <ns2:creationId id="{34CFEBF0-3712-4CEE-A3E4-C0CD81DE6B33}"/>
               </a:ext>
             </a:extLst>
           </p:cNvPr>
@@ -9945,7 +9945,7 @@
           <p:cNvPr id="11" name="矩形 10">
             <a:extLst>
               <a:ext uri="{FF2B5EF4-FFF2-40B4-BE49-F238E27FC236}">
-                <a16:creationId xmlns:a16="http://schemas.microsoft.com/office/drawing/2014/main" id="{CF08CAEF-B77E-499C-A38F-F9755CFCF761}"/>
+                <ns2:creationId id="{CF08CAEF-B77E-499C-A38F-F9755CFCF761}"/>
               </a:ext>
             </a:extLst>
           </p:cNvPr>
@@ -9972,7 +9972,7 @@
           <p:cNvPr id="12" name="矩形 11">
             <a:extLst>
               <a:ext uri="{FF2B5EF4-FFF2-40B4-BE49-F238E27FC236}">
-                <a16:creationId xmlns:a16="http://schemas.microsoft.com/office/drawing/2014/main" id="{AC82139F-1025-48D1-AC13-B41DD8EEF245}"/>
+                <ns2:creationId id="{AC82139F-1025-48D1-AC13-B41DD8EEF245}"/>
               </a:ext>
             </a:extLst>
           </p:cNvPr>
@@ -10017,7 +10017,7 @@
           <p:cNvPr id="13" name="矩形 12">
             <a:extLst>
               <a:ext uri="{FF2B5EF4-FFF2-40B4-BE49-F238E27FC236}">
-                <a16:creationId xmlns:a16="http://schemas.microsoft.com/office/drawing/2014/main" id="{615FB5A7-5E43-49E6-A908-221C19F0B369}"/>
+                <ns2:creationId id="{615FB5A7-5E43-49E6-A908-221C19F0B369}"/>
               </a:ext>
             </a:extLst>
           </p:cNvPr>
@@ -10044,7 +10044,7 @@
           <p:cNvPr id="14" name="矩形 13">
             <a:extLst>
               <a:ext uri="{FF2B5EF4-FFF2-40B4-BE49-F238E27FC236}">
-                <a16:creationId xmlns:a16="http://schemas.microsoft.com/office/drawing/2014/main" id="{05A886E8-CF50-416A-83B6-573EE855B321}"/>
+                <ns2:creationId id="{05A886E8-CF50-416A-83B6-573EE855B321}"/>
               </a:ext>
             </a:extLst>
           </p:cNvPr>
@@ -10089,7 +10089,7 @@
           <p:cNvPr id="15" name="矩形 14">
             <a:extLst>
               <a:ext uri="{FF2B5EF4-FFF2-40B4-BE49-F238E27FC236}">
-                <a16:creationId xmlns:a16="http://schemas.microsoft.com/office/drawing/2014/main" id="{EE056A7B-8927-4CEF-8763-A4BAEF6DA7F7}"/>
+                <ns2:creationId id="{EE056A7B-8927-4CEF-8763-A4BAEF6DA7F7}"/>
               </a:ext>
             </a:extLst>
           </p:cNvPr>
@@ -10116,7 +10116,7 @@
           <p:cNvPr id="16" name="矩形 15">
             <a:extLst>
               <a:ext uri="{FF2B5EF4-FFF2-40B4-BE49-F238E27FC236}">
-                <a16:creationId xmlns:a16="http://schemas.microsoft.com/office/drawing/2014/main" id="{F46805CD-65EC-4BF3-A778-D8138C8D3339}"/>
+                <ns2:creationId id="{F46805CD-65EC-4BF3-A778-D8138C8D3339}"/>
               </a:ext>
             </a:extLst>
           </p:cNvPr>
@@ -10161,7 +10161,7 @@
           <p:cNvPr id="17" name="矩形 16">
             <a:extLst>
               <a:ext uri="{FF2B5EF4-FFF2-40B4-BE49-F238E27FC236}">
-                <a16:creationId xmlns:a16="http://schemas.microsoft.com/office/drawing/2014/main" id="{D9F36144-A2F2-425E-AF28-35B1590B3ED1}"/>
+                <ns2:creationId id="{D9F36144-A2F2-425E-AF28-35B1590B3ED1}"/>
               </a:ext>
             </a:extLst>
           </p:cNvPr>
@@ -10188,7 +10188,7 @@
           <p:cNvPr id="18" name="矩形 17">
             <a:extLst>
               <a:ext uri="{FF2B5EF4-FFF2-40B4-BE49-F238E27FC236}">
-                <a16:creationId xmlns:a16="http://schemas.microsoft.com/office/drawing/2014/main" id="{0924C197-995A-468E-8021-CEF9FF6C2353}"/>
+                <ns2:creationId id="{0924C197-995A-468E-8021-CEF9FF6C2353}"/>
               </a:ext>
             </a:extLst>
           </p:cNvPr>
@@ -10233,7 +10233,7 @@
           <p:cNvPr id="19" name="矩形 18">
             <a:extLst>
               <a:ext uri="{FF2B5EF4-FFF2-40B4-BE49-F238E27FC236}">
-                <a16:creationId xmlns:a16="http://schemas.microsoft.com/office/drawing/2014/main" id="{04F8E8A0-E34A-4B59-B430-8DBBD233D898}"/>
+                <ns2:creationId id="{04F8E8A0-E34A-4B59-B430-8DBBD233D898}"/>
               </a:ext>
             </a:extLst>
           </p:cNvPr>
@@ -10260,7 +10260,7 @@
           <p:cNvPr id="20" name="矩形 19">
             <a:extLst>
               <a:ext uri="{FF2B5EF4-FFF2-40B4-BE49-F238E27FC236}">
-                <a16:creationId xmlns:a16="http://schemas.microsoft.com/office/drawing/2014/main" id="{F27C446C-05D3-49D6-B481-EFC1453D35BC}"/>
+                <ns2:creationId id="{F27C446C-05D3-49D6-B481-EFC1453D35BC}"/>
               </a:ext>
             </a:extLst>
           </p:cNvPr>
@@ -10305,7 +10305,7 @@
           <p:cNvPr id="21" name="矩形 20">
             <a:extLst>
               <a:ext uri="{FF2B5EF4-FFF2-40B4-BE49-F238E27FC236}">
-                <a16:creationId xmlns:a16="http://schemas.microsoft.com/office/drawing/2014/main" id="{FC1137F1-88E9-42F4-84A1-E9A103939090}"/>
+                <ns2:creationId id="{FC1137F1-88E9-42F4-84A1-E9A103939090}"/>
               </a:ext>
             </a:extLst>
           </p:cNvPr>
@@ -10332,7 +10332,7 @@
           <p:cNvPr id="22" name="矩形 21">
             <a:extLst>
               <a:ext uri="{FF2B5EF4-FFF2-40B4-BE49-F238E27FC236}">
-                <a16:creationId xmlns:a16="http://schemas.microsoft.com/office/drawing/2014/main" id="{D2BFBFCE-4CD8-49CC-B2FE-7B38875BD631}"/>
+                <ns2:creationId id="{D2BFBFCE-4CD8-49CC-B2FE-7B38875BD631}"/>
               </a:ext>
             </a:extLst>
           </p:cNvPr>
@@ -10377,7 +10377,7 @@
           <p:cNvPr id="23" name="矩形 22">
             <a:extLst>
               <a:ext uri="{FF2B5EF4-FFF2-40B4-BE49-F238E27FC236}">
-                <a16:creationId xmlns:a16="http://schemas.microsoft.com/office/drawing/2014/main" id="{7D1CC71D-74D7-4D67-A7B5-14D81F70D8FA}"/>
+                <ns2:creationId id="{7D1CC71D-74D7-4D67-A7B5-14D81F70D8FA}"/>
               </a:ext>
             </a:extLst>
           </p:cNvPr>
@@ -10404,7 +10404,7 @@
           <p:cNvPr id="24" name="矩形 23">
             <a:extLst>
               <a:ext uri="{FF2B5EF4-FFF2-40B4-BE49-F238E27FC236}">
-                <a16:creationId xmlns:a16="http://schemas.microsoft.com/office/drawing/2014/main" id="{B67F036F-1AC1-4BB2-BF1D-E20E47E44D7D}"/>
+                <ns2:creationId id="{B67F036F-1AC1-4BB2-BF1D-E20E47E44D7D}"/>
               </a:ext>
             </a:extLst>
           </p:cNvPr>
@@ -10449,7 +10449,7 @@
           <p:cNvPr id="25" name="矩形 24">
             <a:extLst>
               <a:ext uri="{FF2B5EF4-FFF2-40B4-BE49-F238E27FC236}">
-                <a16:creationId xmlns:a16="http://schemas.microsoft.com/office/drawing/2014/main" id="{885F3153-D022-407B-A320-F597F9027A79}"/>
+                <ns2:creationId id="{885F3153-D022-407B-A320-F597F9027A79}"/>
               </a:ext>
             </a:extLst>
           </p:cNvPr>
@@ -10476,7 +10476,7 @@
           <p:cNvPr id="26" name="矩形 25">
             <a:extLst>
               <a:ext uri="{FF2B5EF4-FFF2-40B4-BE49-F238E27FC236}">
-                <a16:creationId xmlns:a16="http://schemas.microsoft.com/office/drawing/2014/main" id="{827797F6-5759-47B8-BB43-4EA258A73341}"/>
+                <ns2:creationId id="{827797F6-5759-47B8-BB43-4EA258A73341}"/>
               </a:ext>
             </a:extLst>
           </p:cNvPr>
@@ -10521,7 +10521,7 @@
           <p:cNvPr id="27" name="矩形 26">
             <a:extLst>
               <a:ext uri="{FF2B5EF4-FFF2-40B4-BE49-F238E27FC236}">
-                <a16:creationId xmlns:a16="http://schemas.microsoft.com/office/drawing/2014/main" id="{52D0F3BB-5D35-41E5-A2D8-B78F1B280C8B}"/>
+                <ns2:creationId id="{52D0F3BB-5D35-41E5-A2D8-B78F1B280C8B}"/>
               </a:ext>
             </a:extLst>
           </p:cNvPr>
@@ -10548,7 +10548,7 @@
           <p:cNvPr id="28" name="矩形 27">
             <a:extLst>
               <a:ext uri="{FF2B5EF4-FFF2-40B4-BE49-F238E27FC236}">
-                <a16:creationId xmlns:a16="http://schemas.microsoft.com/office/drawing/2014/main" id="{49FE8940-CF32-4E3D-A74E-6D224F4E83B2}"/>
+                <ns2:creationId id="{49FE8940-CF32-4E3D-A74E-6D224F4E83B2}"/>
               </a:ext>
             </a:extLst>
           </p:cNvPr>
@@ -10593,7 +10593,7 @@
           <p:cNvPr id="29" name="矩形 28">
             <a:extLst>
               <a:ext uri="{FF2B5EF4-FFF2-40B4-BE49-F238E27FC236}">
-                <a16:creationId xmlns:a16="http://schemas.microsoft.com/office/drawing/2014/main" id="{00A3E95D-EC1D-4049-BD0E-9FFC5ECAE753}"/>
+                <ns2:creationId id="{00A3E95D-EC1D-4049-BD0E-9FFC5ECAE753}"/>
               </a:ext>
             </a:extLst>
           </p:cNvPr>
@@ -10620,7 +10620,7 @@
           <p:cNvPr id="30" name="矩形 29">
             <a:extLst>
               <a:ext uri="{FF2B5EF4-FFF2-40B4-BE49-F238E27FC236}">
-                <a16:creationId xmlns:a16="http://schemas.microsoft.com/office/drawing/2014/main" id="{B3589E02-1B28-4E90-A78D-C9ED732B0A7A}"/>
+                <ns2:creationId id="{B3589E02-1B28-4E90-A78D-C9ED732B0A7A}"/>
               </a:ext>
             </a:extLst>
           </p:cNvPr>
@@ -10665,7 +10665,7 @@
           <p:cNvPr id="31" name="矩形 30">
             <a:extLst>
               <a:ext uri="{FF2B5EF4-FFF2-40B4-BE49-F238E27FC236}">
-                <a16:creationId xmlns:a16="http://schemas.microsoft.com/office/drawing/2014/main" id="{666336F6-9422-4641-908F-E4F920DA912C}"/>
+                <ns2:creationId id="{666336F6-9422-4641-908F-E4F920DA912C}"/>
               </a:ext>
             </a:extLst>
           </p:cNvPr>
@@ -10692,7 +10692,7 @@
           <p:cNvPr id="32" name="矩形 31">
             <a:extLst>
               <a:ext uri="{FF2B5EF4-FFF2-40B4-BE49-F238E27FC236}">
-                <a16:creationId xmlns:a16="http://schemas.microsoft.com/office/drawing/2014/main" id="{35DFCF44-40AD-4326-A2D7-894D0F832273}"/>
+                <ns2:creationId id="{35DFCF44-40AD-4326-A2D7-894D0F832273}"/>
               </a:ext>
             </a:extLst>
           </p:cNvPr>
@@ -10737,7 +10737,7 @@
           <p:cNvPr id="33" name="矩形 32">
             <a:extLst>
               <a:ext uri="{FF2B5EF4-FFF2-40B4-BE49-F238E27FC236}">
-                <a16:creationId xmlns:a16="http://schemas.microsoft.com/office/drawing/2014/main" id="{3A659F10-E58E-4F00-AA66-646E6852AB9C}"/>
+                <ns2:creationId id="{3A659F10-E58E-4F00-AA66-646E6852AB9C}"/>
               </a:ext>
             </a:extLst>
           </p:cNvPr>
@@ -10764,7 +10764,7 @@
           <p:cNvPr id="34" name="矩形 33">
             <a:extLst>
               <a:ext uri="{FF2B5EF4-FFF2-40B4-BE49-F238E27FC236}">
-                <a16:creationId xmlns:a16="http://schemas.microsoft.com/office/drawing/2014/main" id="{745E7A13-E25D-4CF9-B776-581B7FB76261}"/>
+                <ns2:creationId id="{745E7A13-E25D-4CF9-B776-581B7FB76261}"/>
               </a:ext>
             </a:extLst>
           </p:cNvPr>
@@ -10809,7 +10809,7 @@
           <p:cNvPr id="35" name="矩形 34">
             <a:extLst>
               <a:ext uri="{FF2B5EF4-FFF2-40B4-BE49-F238E27FC236}">
-                <a16:creationId xmlns:a16="http://schemas.microsoft.com/office/drawing/2014/main" id="{10D5D63B-1974-42FB-B526-60E2D7E0C283}"/>
+                <ns2:creationId id="{10D5D63B-1974-42FB-B526-60E2D7E0C283}"/>
               </a:ext>
             </a:extLst>
           </p:cNvPr>
@@ -10836,7 +10836,7 @@
           <p:cNvPr id="36" name="矩形 35">
             <a:extLst>
               <a:ext uri="{FF2B5EF4-FFF2-40B4-BE49-F238E27FC236}">
-                <a16:creationId xmlns:a16="http://schemas.microsoft.com/office/drawing/2014/main" id="{2F05589B-B62C-4602-923B-D2CB1FF0F1D2}"/>
+                <ns2:creationId id="{2F05589B-B62C-4602-923B-D2CB1FF0F1D2}"/>
               </a:ext>
             </a:extLst>
           </p:cNvPr>
@@ -10881,7 +10881,7 @@
           <p:cNvPr id="37" name="矩形 36">
             <a:extLst>
               <a:ext uri="{FF2B5EF4-FFF2-40B4-BE49-F238E27FC236}">
-                <a16:creationId xmlns:a16="http://schemas.microsoft.com/office/drawing/2014/main" id="{D071C341-880E-4F6C-BD9E-89F55ED2E7B6}"/>
+                <ns2:creationId id="{D071C341-880E-4F6C-BD9E-89F55ED2E7B6}"/>
               </a:ext>
             </a:extLst>
           </p:cNvPr>
@@ -10908,7 +10908,7 @@
           <p:cNvPr id="38" name="矩形 37">
             <a:extLst>
               <a:ext uri="{FF2B5EF4-FFF2-40B4-BE49-F238E27FC236}">
-                <a16:creationId xmlns:a16="http://schemas.microsoft.com/office/drawing/2014/main" id="{0E6034A1-DD8A-4ADA-9784-6EA867B7AB30}"/>
+                <ns2:creationId id="{0E6034A1-DD8A-4ADA-9784-6EA867B7AB30}"/>
               </a:ext>
             </a:extLst>
           </p:cNvPr>
@@ -10953,7 +10953,7 @@
           <p:cNvPr id="39" name="矩形 38">
             <a:extLst>
               <a:ext uri="{FF2B5EF4-FFF2-40B4-BE49-F238E27FC236}">
-                <a16:creationId xmlns:a16="http://schemas.microsoft.com/office/drawing/2014/main" id="{DDDF6E7F-5AA7-4B4D-9AEF-0B0C47E99C83}"/>
+                <ns2:creationId id="{DDDF6E7F-5AA7-4B4D-9AEF-0B0C47E99C83}"/>
               </a:ext>
             </a:extLst>
           </p:cNvPr>
@@ -10980,7 +10980,7 @@
           <p:cNvPr id="40" name="矩形 39">
             <a:extLst>
               <a:ext uri="{FF2B5EF4-FFF2-40B4-BE49-F238E27FC236}">
-                <a16:creationId xmlns:a16="http://schemas.microsoft.com/office/drawing/2014/main" id="{14860F26-2D45-4B67-BC78-9A7138A87272}"/>
+                <ns2:creationId id="{14860F26-2D45-4B67-BC78-9A7138A87272}"/>
               </a:ext>
             </a:extLst>
           </p:cNvPr>
@@ -11025,7 +11025,7 @@
           <p:cNvPr id="41" name="矩形 40">
             <a:extLst>
               <a:ext uri="{FF2B5EF4-FFF2-40B4-BE49-F238E27FC236}">
-                <a16:creationId xmlns:a16="http://schemas.microsoft.com/office/drawing/2014/main" id="{C29B623B-5A89-4D7D-8D40-7B997BC30C45}"/>
+                <ns2:creationId id="{C29B623B-5A89-4D7D-8D40-7B997BC30C45}"/>
               </a:ext>
             </a:extLst>
           </p:cNvPr>
@@ -11052,7 +11052,7 @@
           <p:cNvPr id="42" name="矩形 41">
             <a:extLst>
               <a:ext uri="{FF2B5EF4-FFF2-40B4-BE49-F238E27FC236}">
-                <a16:creationId xmlns:a16="http://schemas.microsoft.com/office/drawing/2014/main" id="{B194AC7B-5132-444C-948B-AC7E239F134F}"/>
+                <ns2:creationId id="{B194AC7B-5132-444C-948B-AC7E239F134F}"/>
               </a:ext>
             </a:extLst>
           </p:cNvPr>
@@ -11097,7 +11097,7 @@
           <p:cNvPr id="43" name="矩形 42">
             <a:extLst>
               <a:ext uri="{FF2B5EF4-FFF2-40B4-BE49-F238E27FC236}">
-                <a16:creationId xmlns:a16="http://schemas.microsoft.com/office/drawing/2014/main" id="{C43F888A-25F1-4B2E-95D3-5FB049870FFC}"/>
+                <ns2:creationId id="{C43F888A-25F1-4B2E-95D3-5FB049870FFC}"/>
               </a:ext>
             </a:extLst>
           </p:cNvPr>
@@ -11124,7 +11124,7 @@
           <p:cNvPr id="44" name="矩形 43">
             <a:extLst>
               <a:ext uri="{FF2B5EF4-FFF2-40B4-BE49-F238E27FC236}">
-                <a16:creationId xmlns:a16="http://schemas.microsoft.com/office/drawing/2014/main" id="{F6DE70EC-061E-4E9F-A415-E39DAD0237BC}"/>
+                <ns2:creationId id="{F6DE70EC-061E-4E9F-A415-E39DAD0237BC}"/>
               </a:ext>
             </a:extLst>
           </p:cNvPr>
@@ -11169,7 +11169,7 @@
           <p:cNvPr id="45" name="矩形 44">
             <a:extLst>
               <a:ext uri="{FF2B5EF4-FFF2-40B4-BE49-F238E27FC236}">
-                <a16:creationId xmlns:a16="http://schemas.microsoft.com/office/drawing/2014/main" id="{DFA852DE-06E6-4CC3-A3B0-3BE6CC2816E4}"/>
+                <ns2:creationId id="{DFA852DE-06E6-4CC3-A3B0-3BE6CC2816E4}"/>
               </a:ext>
             </a:extLst>
           </p:cNvPr>
@@ -11196,7 +11196,7 @@
           <p:cNvPr id="46" name="矩形 45">
             <a:extLst>
               <a:ext uri="{FF2B5EF4-FFF2-40B4-BE49-F238E27FC236}">
-                <a16:creationId xmlns:a16="http://schemas.microsoft.com/office/drawing/2014/main" id="{7863EEF9-78F9-46F2-8732-A670067D01FC}"/>
+                <ns2:creationId id="{7863EEF9-78F9-46F2-8732-A670067D01FC}"/>
               </a:ext>
             </a:extLst>
           </p:cNvPr>
@@ -11241,7 +11241,7 @@
           <p:cNvPr id="47" name="矩形 46">
             <a:extLst>
               <a:ext uri="{FF2B5EF4-FFF2-40B4-BE49-F238E27FC236}">
-                <a16:creationId xmlns:a16="http://schemas.microsoft.com/office/drawing/2014/main" id="{89A8514B-D75D-4668-8D06-D33381DB6914}"/>
+                <ns2:creationId id="{89A8514B-D75D-4668-8D06-D33381DB6914}"/>
               </a:ext>
             </a:extLst>
           </p:cNvPr>
@@ -11268,7 +11268,7 @@
           <p:cNvPr id="48" name="矩形 47">
             <a:extLst>
               <a:ext uri="{FF2B5EF4-FFF2-40B4-BE49-F238E27FC236}">
-                <a16:creationId xmlns:a16="http://schemas.microsoft.com/office/drawing/2014/main" id="{96F87F93-1822-4982-9A90-76A6FFB8CDA6}"/>
+                <ns2:creationId id="{96F87F93-1822-4982-9A90-76A6FFB8CDA6}"/>
               </a:ext>
             </a:extLst>
           </p:cNvPr>
@@ -11313,7 +11313,7 @@
           <p:cNvPr id="49" name="矩形 48">
             <a:extLst>
               <a:ext uri="{FF2B5EF4-FFF2-40B4-BE49-F238E27FC236}">
-                <a16:creationId xmlns:a16="http://schemas.microsoft.com/office/drawing/2014/main" id="{7D29A40F-76A2-4B12-94C1-685DF8123B76}"/>
+                <ns2:creationId id="{7D29A40F-76A2-4B12-94C1-685DF8123B76}"/>
               </a:ext>
             </a:extLst>
           </p:cNvPr>
@@ -11340,7 +11340,7 @@
           <p:cNvPr id="50" name="矩形 49">
             <a:extLst>
               <a:ext uri="{FF2B5EF4-FFF2-40B4-BE49-F238E27FC236}">
-                <a16:creationId xmlns:a16="http://schemas.microsoft.com/office/drawing/2014/main" id="{DFA4A850-9BAF-4759-9A25-83ED51F6D9BB}"/>
+                <ns2:creationId id="{DFA4A850-9BAF-4759-9A25-83ED51F6D9BB}"/>
               </a:ext>
             </a:extLst>
           </p:cNvPr>
@@ -11385,7 +11385,7 @@
           <p:cNvPr id="51" name="矩形 50">
             <a:extLst>
               <a:ext uri="{FF2B5EF4-FFF2-40B4-BE49-F238E27FC236}">
-                <a16:creationId xmlns:a16="http://schemas.microsoft.com/office/drawing/2014/main" id="{5B025756-F138-4608-AB81-4E2FFBA31E49}"/>
+                <ns2:creationId id="{5B025756-F138-4608-AB81-4E2FFBA31E49}"/>
               </a:ext>
             </a:extLst>
           </p:cNvPr>
@@ -11412,7 +11412,7 @@
           <p:cNvPr id="52" name="矩形 51">
             <a:extLst>
               <a:ext uri="{FF2B5EF4-FFF2-40B4-BE49-F238E27FC236}">
-                <a16:creationId xmlns:a16="http://schemas.microsoft.com/office/drawing/2014/main" id="{D982F564-D209-4D7F-9042-5B418810D63E}"/>
+                <ns2:creationId id="{D982F564-D209-4D7F-9042-5B418810D63E}"/>
               </a:ext>
             </a:extLst>
           </p:cNvPr>
@@ -11457,7 +11457,7 @@
           <p:cNvPr id="53" name="矩形 52">
             <a:extLst>
               <a:ext uri="{FF2B5EF4-FFF2-40B4-BE49-F238E27FC236}">
-                <a16:creationId xmlns:a16="http://schemas.microsoft.com/office/drawing/2014/main" id="{47E43927-1808-4872-A40E-84309FCD7390}"/>
+                <ns2:creationId id="{47E43927-1808-4872-A40E-84309FCD7390}"/>
               </a:ext>
             </a:extLst>
           </p:cNvPr>
@@ -11484,7 +11484,7 @@
           <p:cNvPr id="54" name="矩形 53">
             <a:extLst>
               <a:ext uri="{FF2B5EF4-FFF2-40B4-BE49-F238E27FC236}">
-                <a16:creationId xmlns:a16="http://schemas.microsoft.com/office/drawing/2014/main" id="{EC44DAB2-3875-4667-BE5A-48E912ED2470}"/>
+                <ns2:creationId id="{EC44DAB2-3875-4667-BE5A-48E912ED2470}"/>
               </a:ext>
             </a:extLst>
           </p:cNvPr>
@@ -11529,7 +11529,7 @@
           <p:cNvPr id="55" name="矩形 54">
             <a:extLst>
               <a:ext uri="{FF2B5EF4-FFF2-40B4-BE49-F238E27FC236}">
-                <a16:creationId xmlns:a16="http://schemas.microsoft.com/office/drawing/2014/main" id="{575DA523-CA63-4173-9CFB-69828E90C896}"/>
+                <ns2:creationId id="{575DA523-CA63-4173-9CFB-69828E90C896}"/>
               </a:ext>
             </a:extLst>
           </p:cNvPr>
@@ -11556,7 +11556,7 @@
           <p:cNvPr id="56" name="矩形 55">
             <a:extLst>
               <a:ext uri="{FF2B5EF4-FFF2-40B4-BE49-F238E27FC236}">
-                <a16:creationId xmlns:a16="http://schemas.microsoft.com/office/drawing/2014/main" id="{543008D1-95AE-41B8-8CB0-D9618178157B}"/>
+                <ns2:creationId id="{543008D1-95AE-41B8-8CB0-D9618178157B}"/>
               </a:ext>
             </a:extLst>
           </p:cNvPr>
@@ -11601,7 +11601,7 @@
           <p:cNvPr id="57" name="矩形 56">
             <a:extLst>
               <a:ext uri="{FF2B5EF4-FFF2-40B4-BE49-F238E27FC236}">
-                <a16:creationId xmlns:a16="http://schemas.microsoft.com/office/drawing/2014/main" id="{5ECC0320-1627-41C8-B142-AB53331EDFE6}"/>
+                <ns2:creationId id="{5ECC0320-1627-41C8-B142-AB53331EDFE6}"/>
               </a:ext>
             </a:extLst>
           </p:cNvPr>
@@ -11628,7 +11628,7 @@
           <p:cNvPr id="58" name="矩形 57">
             <a:extLst>
               <a:ext uri="{FF2B5EF4-FFF2-40B4-BE49-F238E27FC236}">
-                <a16:creationId xmlns:a16="http://schemas.microsoft.com/office/drawing/2014/main" id="{BE59FEAA-28F8-48CC-9593-35FC28A2E648}"/>
+                <ns2:creationId id="{BE59FEAA-28F8-48CC-9593-35FC28A2E648}"/>
               </a:ext>
             </a:extLst>
           </p:cNvPr>
@@ -11673,7 +11673,7 @@
           <p:cNvPr id="59" name="矩形 58">
             <a:extLst>
               <a:ext uri="{FF2B5EF4-FFF2-40B4-BE49-F238E27FC236}">
-                <a16:creationId xmlns:a16="http://schemas.microsoft.com/office/drawing/2014/main" id="{02DF63F1-59A8-4B83-A627-B8760C235D7E}"/>
+                <ns2:creationId id="{02DF63F1-59A8-4B83-A627-B8760C235D7E}"/>
               </a:ext>
             </a:extLst>
           </p:cNvPr>
@@ -11700,7 +11700,7 @@
           <p:cNvPr id="60" name="矩形 59">
             <a:extLst>
               <a:ext uri="{FF2B5EF4-FFF2-40B4-BE49-F238E27FC236}">
-                <a16:creationId xmlns:a16="http://schemas.microsoft.com/office/drawing/2014/main" id="{8AEF561E-EEA3-4B45-ACFB-0BD699BCCEC1}"/>
+                <ns2:creationId id="{8AEF561E-EEA3-4B45-ACFB-0BD699BCCEC1}"/>
               </a:ext>
             </a:extLst>
           </p:cNvPr>
@@ -11745,7 +11745,7 @@
           <p:cNvPr id="61" name="矩形 60">
             <a:extLst>
               <a:ext uri="{FF2B5EF4-FFF2-40B4-BE49-F238E27FC236}">
-                <a16:creationId xmlns:a16="http://schemas.microsoft.com/office/drawing/2014/main" id="{C17DA217-AAE0-457B-9B96-337D5F9B5483}"/>
+                <ns2:creationId id="{C17DA217-AAE0-457B-9B96-337D5F9B5483}"/>
               </a:ext>
             </a:extLst>
           </p:cNvPr>
@@ -11790,7 +11790,7 @@
           <p:cNvPr id="62" name="矩形 61">
             <a:extLst>
               <a:ext uri="{FF2B5EF4-FFF2-40B4-BE49-F238E27FC236}">
-                <a16:creationId xmlns:a16="http://schemas.microsoft.com/office/drawing/2014/main" id="{4F8AD5B1-B316-4A87-AE62-E3D5531E6DC9}"/>
+                <ns2:creationId id="{4F8AD5B1-B316-4A87-AE62-E3D5531E6DC9}"/>
               </a:ext>
             </a:extLst>
           </p:cNvPr>
@@ -11835,7 +11835,7 @@
           <p:cNvPr id="63" name="矩形 62">
             <a:extLst>
               <a:ext uri="{FF2B5EF4-FFF2-40B4-BE49-F238E27FC236}">
-                <a16:creationId xmlns:a16="http://schemas.microsoft.com/office/drawing/2014/main" id="{08E6B9FA-EFB0-4B94-8C41-844E62443B1F}"/>
+                <ns2:creationId id="{08E6B9FA-EFB0-4B94-8C41-844E62443B1F}"/>
               </a:ext>
             </a:extLst>
           </p:cNvPr>
@@ -11880,7 +11880,7 @@
           <p:cNvPr id="64" name="矩形 63">
             <a:extLst>
               <a:ext uri="{FF2B5EF4-FFF2-40B4-BE49-F238E27FC236}">
-                <a16:creationId xmlns:a16="http://schemas.microsoft.com/office/drawing/2014/main" id="{1A6100D9-A817-4360-B9CB-D6245B442105}"/>
+                <ns2:creationId id="{1A6100D9-A817-4360-B9CB-D6245B442105}"/>
               </a:ext>
             </a:extLst>
           </p:cNvPr>
@@ -11925,7 +11925,7 @@
           <p:cNvPr id="65" name="矩形 64">
             <a:extLst>
               <a:ext uri="{FF2B5EF4-FFF2-40B4-BE49-F238E27FC236}">
-                <a16:creationId xmlns:a16="http://schemas.microsoft.com/office/drawing/2014/main" id="{F43FB6BF-D8C8-4FD4-91CD-00B6089F04FA}"/>
+                <ns2:creationId id="{F43FB6BF-D8C8-4FD4-91CD-00B6089F04FA}"/>
               </a:ext>
             </a:extLst>
           </p:cNvPr>
@@ -11970,7 +11970,7 @@
           <p:cNvPr id="66" name="矩形 65">
             <a:extLst>
               <a:ext uri="{FF2B5EF4-FFF2-40B4-BE49-F238E27FC236}">
-                <a16:creationId xmlns:a16="http://schemas.microsoft.com/office/drawing/2014/main" id="{8A346EDA-AD20-477F-9CEF-A01E01CFB1E9}"/>
+                <ns2:creationId id="{8A346EDA-AD20-477F-9CEF-A01E01CFB1E9}"/>
               </a:ext>
             </a:extLst>
           </p:cNvPr>
@@ -12015,7 +12015,7 @@
           <p:cNvPr id="67" name="矩形 66">
             <a:extLst>
               <a:ext uri="{FF2B5EF4-FFF2-40B4-BE49-F238E27FC236}">
-                <a16:creationId xmlns:a16="http://schemas.microsoft.com/office/drawing/2014/main" id="{B186BF15-DE55-4D55-B359-E3847ADA23C0}"/>
+                <ns2:creationId id="{B186BF15-DE55-4D55-B359-E3847ADA23C0}"/>
               </a:ext>
             </a:extLst>
           </p:cNvPr>
@@ -12060,7 +12060,7 @@
           <p:cNvPr id="68" name="矩形 67">
             <a:extLst>
               <a:ext uri="{FF2B5EF4-FFF2-40B4-BE49-F238E27FC236}">
-                <a16:creationId xmlns:a16="http://schemas.microsoft.com/office/drawing/2014/main" id="{4EBC4BC1-64DB-4377-9D70-7DD4D99D87CB}"/>
+                <ns2:creationId id="{4EBC4BC1-64DB-4377-9D70-7DD4D99D87CB}"/>
               </a:ext>
             </a:extLst>
           </p:cNvPr>
@@ -12105,7 +12105,7 @@
           <p:cNvPr id="69" name="矩形 68">
             <a:extLst>
               <a:ext uri="{FF2B5EF4-FFF2-40B4-BE49-F238E27FC236}">
-                <a16:creationId xmlns:a16="http://schemas.microsoft.com/office/drawing/2014/main" id="{DA630AE6-8158-4AD7-8615-8F5B9CBB5CA3}"/>
+                <ns2:creationId id="{DA630AE6-8158-4AD7-8615-8F5B9CBB5CA3}"/>
               </a:ext>
             </a:extLst>
           </p:cNvPr>
@@ -12148,7 +12148,7 @@
     </p:spTree>
     <p:extLst>
       <p:ext uri="{BB962C8B-B14F-4D97-AF65-F5344CB8AC3E}">
-        <p14:creationId xmlns:p14="http://schemas.microsoft.com/office/powerpoint/2010/main" val="1466616530"/>
+        <ns3:creationId val="1466616530"/>
       </p:ext>
     </p:extLst>
   </p:cSld>
@@ -12159,7 +12159,7 @@
 </file>
 
 <file path=ppt/slides/slide16.xml><?xml version="1.0" encoding="utf-8"?>
-<p:sld xmlns:a="http://schemas.openxmlformats.org/drawingml/2006/main" xmlns:r="http://schemas.openxmlformats.org/officeDocument/2006/relationships" xmlns:p="http://schemas.openxmlformats.org/presentationml/2006/main">
+<p:sld xmlns:a="http://schemas.openxmlformats.org/drawingml/2006/main" xmlns:ns2="http://schemas.microsoft.com/office/drawing/2014/main" xmlns:ns3="http://schemas.openxmlformats.org/drawingml/2006/chart" xmlns:ns5="http://schemas.microsoft.com/office/powerpoint/2010/main" xmlns:p="http://schemas.openxmlformats.org/presentationml/2006/main" xmlns:r="http://schemas.openxmlformats.org/officeDocument/2006/relationships">
   <p:cSld>
     <p:spTree>
       <p:nvGrpSpPr>
@@ -12180,7 +12180,7 @@
           <p:cNvPr id="32" name="slide-bg">
             <a:extLst>
               <a:ext uri="{FF2B5EF4-FFF2-40B4-BE49-F238E27FC236}">
-                <a16:creationId xmlns:a16="http://schemas.microsoft.com/office/drawing/2014/main" id="{8D1150A2-8C53-43DE-8E1B-E006D609DC38}"/>
+                <ns2:creationId id="{8D1150A2-8C53-43DE-8E1B-E006D609DC38}"/>
               </a:ext>
             </a:extLst>
           </p:cNvPr>
@@ -12207,7 +12207,7 @@
           <p:cNvPr id="2" name="title">
             <a:extLst>
               <a:ext uri="{FF2B5EF4-FFF2-40B4-BE49-F238E27FC236}">
-                <a16:creationId xmlns:a16="http://schemas.microsoft.com/office/drawing/2014/main" id="{8369023A-50C8-48CB-91ED-92EBDA9FD788}"/>
+                <ns2:creationId id="{8369023A-50C8-48CB-91ED-92EBDA9FD788}"/>
               </a:ext>
             </a:extLst>
           </p:cNvPr>
@@ -12242,7 +12242,7 @@
                   <a:srgbClr val="102033"/>
                 </a:solidFill>
               </a:rPr>
-              <a:t>实验结果四：持续训练验证</a:t>
+              <a:t>测试结果四：持续训练验证</a:t>
             </a:r>
           </a:p>
         </p:txBody>
@@ -12252,7 +12252,7 @@
           <p:cNvPr id="3" name="subtitle">
             <a:extLst>
               <a:ext uri="{FF2B5EF4-FFF2-40B4-BE49-F238E27FC236}">
-                <a16:creationId xmlns:a16="http://schemas.microsoft.com/office/drawing/2014/main" id="{9AE0347C-9926-4B91-AF87-990AAD8E5659}"/>
+                <ns2:creationId id="{9AE0347C-9926-4B91-AF87-990AAD8E5659}"/>
               </a:ext>
             </a:extLst>
           </p:cNvPr>
@@ -12297,7 +12297,7 @@
           <p:cNvPr id="4" name="title-rule">
             <a:extLst>
               <a:ext uri="{FF2B5EF4-FFF2-40B4-BE49-F238E27FC236}">
-                <a16:creationId xmlns:a16="http://schemas.microsoft.com/office/drawing/2014/main" id="{09064ACE-7E4C-4B22-9013-54E4D645B6FB}"/>
+                <ns2:creationId id="{09064ACE-7E4C-4B22-9013-54E4D645B6FB}"/>
               </a:ext>
             </a:extLst>
           </p:cNvPr>
@@ -12337,7 +12337,7 @@
         </p:xfrm>
         <a:graphic>
           <a:graphicData uri="http://schemas.openxmlformats.org/drawingml/2006/chart">
-            <c:chart xmlns:c="http://schemas.openxmlformats.org/drawingml/2006/chart" xmlns:r="http://schemas.openxmlformats.org/officeDocument/2006/relationships" r:id="rId3"/>
+            <ns3:chart r:id="rId3"/>
           </a:graphicData>
         </a:graphic>
       </p:graphicFrame>
@@ -12346,7 +12346,7 @@
           <p:cNvPr id="6" name="矩形 5">
             <a:extLst>
               <a:ext uri="{FF2B5EF4-FFF2-40B4-BE49-F238E27FC236}">
-                <a16:creationId xmlns:a16="http://schemas.microsoft.com/office/drawing/2014/main" id="{E6C4AF81-9E88-47F0-9E79-10866610323E}"/>
+                <ns2:creationId id="{E6C4AF81-9E88-47F0-9E79-10866610323E}"/>
               </a:ext>
             </a:extLst>
           </p:cNvPr>
@@ -12373,7 +12373,7 @@
           <p:cNvPr id="7" name="矩形 6">
             <a:extLst>
               <a:ext uri="{FF2B5EF4-FFF2-40B4-BE49-F238E27FC236}">
-                <a16:creationId xmlns:a16="http://schemas.microsoft.com/office/drawing/2014/main" id="{C4A603D1-4A35-4ACF-B40C-DAC86B86C9F1}"/>
+                <ns2:creationId id="{C4A603D1-4A35-4ACF-B40C-DAC86B86C9F1}"/>
               </a:ext>
             </a:extLst>
           </p:cNvPr>
@@ -12418,7 +12418,7 @@
           <p:cNvPr id="8" name="矩形 7">
             <a:extLst>
               <a:ext uri="{FF2B5EF4-FFF2-40B4-BE49-F238E27FC236}">
-                <a16:creationId xmlns:a16="http://schemas.microsoft.com/office/drawing/2014/main" id="{A5E4614A-F768-43FF-BE4E-551B98C92337}"/>
+                <ns2:creationId id="{A5E4614A-F768-43FF-BE4E-551B98C92337}"/>
               </a:ext>
             </a:extLst>
           </p:cNvPr>
@@ -12445,7 +12445,7 @@
           <p:cNvPr id="9" name="矩形 8">
             <a:extLst>
               <a:ext uri="{FF2B5EF4-FFF2-40B4-BE49-F238E27FC236}">
-                <a16:creationId xmlns:a16="http://schemas.microsoft.com/office/drawing/2014/main" id="{653E4797-B12F-4024-857C-5813B8E748CD}"/>
+                <ns2:creationId id="{653E4797-B12F-4024-857C-5813B8E748CD}"/>
               </a:ext>
             </a:extLst>
           </p:cNvPr>
@@ -12490,7 +12490,7 @@
           <p:cNvPr id="10" name="矩形 9">
             <a:extLst>
               <a:ext uri="{FF2B5EF4-FFF2-40B4-BE49-F238E27FC236}">
-                <a16:creationId xmlns:a16="http://schemas.microsoft.com/office/drawing/2014/main" id="{6DCBC656-3DD6-4BDA-B65F-388CEBFEE15C}"/>
+                <ns2:creationId id="{6DCBC656-3DD6-4BDA-B65F-388CEBFEE15C}"/>
               </a:ext>
             </a:extLst>
           </p:cNvPr>
@@ -12517,7 +12517,7 @@
           <p:cNvPr id="11" name="矩形 10">
             <a:extLst>
               <a:ext uri="{FF2B5EF4-FFF2-40B4-BE49-F238E27FC236}">
-                <a16:creationId xmlns:a16="http://schemas.microsoft.com/office/drawing/2014/main" id="{DB197221-52BE-4F70-96EE-9EE2E222A19B}"/>
+                <ns2:creationId id="{DB197221-52BE-4F70-96EE-9EE2E222A19B}"/>
               </a:ext>
             </a:extLst>
           </p:cNvPr>
@@ -12562,7 +12562,7 @@
           <p:cNvPr id="12" name="矩形 11">
             <a:extLst>
               <a:ext uri="{FF2B5EF4-FFF2-40B4-BE49-F238E27FC236}">
-                <a16:creationId xmlns:a16="http://schemas.microsoft.com/office/drawing/2014/main" id="{8C3A4F19-6D36-48F8-B13F-EA31BB85C2A8}"/>
+                <ns2:creationId id="{8C3A4F19-6D36-48F8-B13F-EA31BB85C2A8}"/>
               </a:ext>
             </a:extLst>
           </p:cNvPr>
@@ -12589,7 +12589,7 @@
           <p:cNvPr id="13" name="矩形 12">
             <a:extLst>
               <a:ext uri="{FF2B5EF4-FFF2-40B4-BE49-F238E27FC236}">
-                <a16:creationId xmlns:a16="http://schemas.microsoft.com/office/drawing/2014/main" id="{599CF18C-2812-4443-9ED5-A4C13F9F962C}"/>
+                <ns2:creationId id="{599CF18C-2812-4443-9ED5-A4C13F9F962C}"/>
               </a:ext>
             </a:extLst>
           </p:cNvPr>
@@ -12634,7 +12634,7 @@
           <p:cNvPr id="14" name="矩形 13">
             <a:extLst>
               <a:ext uri="{FF2B5EF4-FFF2-40B4-BE49-F238E27FC236}">
-                <a16:creationId xmlns:a16="http://schemas.microsoft.com/office/drawing/2014/main" id="{BAE50B98-BDD8-4757-A73A-E1A3794858EE}"/>
+                <ns2:creationId id="{BAE50B98-BDD8-4757-A73A-E1A3794858EE}"/>
               </a:ext>
             </a:extLst>
           </p:cNvPr>
@@ -12661,7 +12661,7 @@
           <p:cNvPr id="15" name="矩形 14">
             <a:extLst>
               <a:ext uri="{FF2B5EF4-FFF2-40B4-BE49-F238E27FC236}">
-                <a16:creationId xmlns:a16="http://schemas.microsoft.com/office/drawing/2014/main" id="{B9DD4E6C-F9D0-4169-A5FD-DCFA8A93DA89}"/>
+                <ns2:creationId id="{B9DD4E6C-F9D0-4169-A5FD-DCFA8A93DA89}"/>
               </a:ext>
             </a:extLst>
           </p:cNvPr>
@@ -12706,7 +12706,7 @@
           <p:cNvPr id="16" name="矩形 15">
             <a:extLst>
               <a:ext uri="{FF2B5EF4-FFF2-40B4-BE49-F238E27FC236}">
-                <a16:creationId xmlns:a16="http://schemas.microsoft.com/office/drawing/2014/main" id="{DFA8A69C-80B4-4945-877B-CD9ABA510C2F}"/>
+                <ns2:creationId id="{DFA8A69C-80B4-4945-877B-CD9ABA510C2F}"/>
               </a:ext>
             </a:extLst>
           </p:cNvPr>
@@ -12733,7 +12733,7 @@
           <p:cNvPr id="17" name="矩形 16">
             <a:extLst>
               <a:ext uri="{FF2B5EF4-FFF2-40B4-BE49-F238E27FC236}">
-                <a16:creationId xmlns:a16="http://schemas.microsoft.com/office/drawing/2014/main" id="{F74B6576-0278-4917-A5D0-2961FDAE5A13}"/>
+                <ns2:creationId id="{F74B6576-0278-4917-A5D0-2961FDAE5A13}"/>
               </a:ext>
             </a:extLst>
           </p:cNvPr>
@@ -12778,7 +12778,7 @@
           <p:cNvPr id="18" name="矩形 17">
             <a:extLst>
               <a:ext uri="{FF2B5EF4-FFF2-40B4-BE49-F238E27FC236}">
-                <a16:creationId xmlns:a16="http://schemas.microsoft.com/office/drawing/2014/main" id="{0293FDDD-5035-4940-844D-A60F382C16C9}"/>
+                <ns2:creationId id="{0293FDDD-5035-4940-844D-A60F382C16C9}"/>
               </a:ext>
             </a:extLst>
           </p:cNvPr>
@@ -12805,7 +12805,7 @@
           <p:cNvPr id="19" name="矩形 18">
             <a:extLst>
               <a:ext uri="{FF2B5EF4-FFF2-40B4-BE49-F238E27FC236}">
-                <a16:creationId xmlns:a16="http://schemas.microsoft.com/office/drawing/2014/main" id="{0DA5265D-1FB1-4B63-8A53-D975C1B211EE}"/>
+                <ns2:creationId id="{0DA5265D-1FB1-4B63-8A53-D975C1B211EE}"/>
               </a:ext>
             </a:extLst>
           </p:cNvPr>
@@ -12850,7 +12850,7 @@
           <p:cNvPr id="20" name="矩形 19">
             <a:extLst>
               <a:ext uri="{FF2B5EF4-FFF2-40B4-BE49-F238E27FC236}">
-                <a16:creationId xmlns:a16="http://schemas.microsoft.com/office/drawing/2014/main" id="{34F21499-AAAD-4EBD-B387-6D65D2077161}"/>
+                <ns2:creationId id="{34F21499-AAAD-4EBD-B387-6D65D2077161}"/>
               </a:ext>
             </a:extLst>
           </p:cNvPr>
@@ -12877,7 +12877,7 @@
           <p:cNvPr id="21" name="矩形 20">
             <a:extLst>
               <a:ext uri="{FF2B5EF4-FFF2-40B4-BE49-F238E27FC236}">
-                <a16:creationId xmlns:a16="http://schemas.microsoft.com/office/drawing/2014/main" id="{256FA964-9024-4A57-B665-361B4EFEFEC2}"/>
+                <ns2:creationId id="{256FA964-9024-4A57-B665-361B4EFEFEC2}"/>
               </a:ext>
             </a:extLst>
           </p:cNvPr>
@@ -12922,7 +12922,7 @@
           <p:cNvPr id="22" name="矩形 21">
             <a:extLst>
               <a:ext uri="{FF2B5EF4-FFF2-40B4-BE49-F238E27FC236}">
-                <a16:creationId xmlns:a16="http://schemas.microsoft.com/office/drawing/2014/main" id="{6355D4A1-8357-495B-BC22-9CAA3B2A20D6}"/>
+                <ns2:creationId id="{6355D4A1-8357-495B-BC22-9CAA3B2A20D6}"/>
               </a:ext>
             </a:extLst>
           </p:cNvPr>
@@ -12949,7 +12949,7 @@
           <p:cNvPr id="23" name="矩形 22">
             <a:extLst>
               <a:ext uri="{FF2B5EF4-FFF2-40B4-BE49-F238E27FC236}">
-                <a16:creationId xmlns:a16="http://schemas.microsoft.com/office/drawing/2014/main" id="{C4D37E11-7CB3-4E2A-B1E8-31D8698E3182}"/>
+                <ns2:creationId id="{C4D37E11-7CB3-4E2A-B1E8-31D8698E3182}"/>
               </a:ext>
             </a:extLst>
           </p:cNvPr>
@@ -12994,7 +12994,7 @@
           <p:cNvPr id="24" name="矩形 23">
             <a:extLst>
               <a:ext uri="{FF2B5EF4-FFF2-40B4-BE49-F238E27FC236}">
-                <a16:creationId xmlns:a16="http://schemas.microsoft.com/office/drawing/2014/main" id="{906A7AA5-ED0E-449C-9391-7EC4B1B84A8D}"/>
+                <ns2:creationId id="{906A7AA5-ED0E-449C-9391-7EC4B1B84A8D}"/>
               </a:ext>
             </a:extLst>
           </p:cNvPr>
@@ -13021,7 +13021,7 @@
           <p:cNvPr id="25" name="矩形 24">
             <a:extLst>
               <a:ext uri="{FF2B5EF4-FFF2-40B4-BE49-F238E27FC236}">
-                <a16:creationId xmlns:a16="http://schemas.microsoft.com/office/drawing/2014/main" id="{6ADF4604-8DA3-4025-9189-7171E9B0E947}"/>
+                <ns2:creationId id="{6ADF4604-8DA3-4025-9189-7171E9B0E947}"/>
               </a:ext>
             </a:extLst>
           </p:cNvPr>
@@ -13066,7 +13066,7 @@
           <p:cNvPr id="26" name="矩形 25">
             <a:extLst>
               <a:ext uri="{FF2B5EF4-FFF2-40B4-BE49-F238E27FC236}">
-                <a16:creationId xmlns:a16="http://schemas.microsoft.com/office/drawing/2014/main" id="{42D44352-8F5E-408B-AFB8-47921458C925}"/>
+                <ns2:creationId id="{42D44352-8F5E-408B-AFB8-47921458C925}"/>
               </a:ext>
             </a:extLst>
           </p:cNvPr>
@@ -13093,7 +13093,7 @@
           <p:cNvPr id="27" name="矩形 26">
             <a:extLst>
               <a:ext uri="{FF2B5EF4-FFF2-40B4-BE49-F238E27FC236}">
-                <a16:creationId xmlns:a16="http://schemas.microsoft.com/office/drawing/2014/main" id="{4341E790-473D-4F22-A085-EE022A6964C5}"/>
+                <ns2:creationId id="{4341E790-473D-4F22-A085-EE022A6964C5}"/>
               </a:ext>
             </a:extLst>
           </p:cNvPr>
@@ -13138,7 +13138,7 @@
           <p:cNvPr id="28" name="矩形 27">
             <a:extLst>
               <a:ext uri="{FF2B5EF4-FFF2-40B4-BE49-F238E27FC236}">
-                <a16:creationId xmlns:a16="http://schemas.microsoft.com/office/drawing/2014/main" id="{D4CF80A6-87A9-4BF4-AF3D-66A55EA7F5A5}"/>
+                <ns2:creationId id="{D4CF80A6-87A9-4BF4-AF3D-66A55EA7F5A5}"/>
               </a:ext>
             </a:extLst>
           </p:cNvPr>
@@ -13165,7 +13165,7 @@
           <p:cNvPr id="29" name="矩形 28">
             <a:extLst>
               <a:ext uri="{FF2B5EF4-FFF2-40B4-BE49-F238E27FC236}">
-                <a16:creationId xmlns:a16="http://schemas.microsoft.com/office/drawing/2014/main" id="{B58ED694-EE37-4897-B345-063F00814464}"/>
+                <ns2:creationId id="{B58ED694-EE37-4897-B345-063F00814464}"/>
               </a:ext>
             </a:extLst>
           </p:cNvPr>
@@ -13210,7 +13210,7 @@
           <p:cNvPr id="30" name="矩形: 圆角 29">
             <a:extLst>
               <a:ext uri="{FF2B5EF4-FFF2-40B4-BE49-F238E27FC236}">
-                <a16:creationId xmlns:a16="http://schemas.microsoft.com/office/drawing/2014/main" id="{4E8EA636-D5B9-42E4-9795-2355665F6AAC}"/>
+                <ns2:creationId id="{4E8EA636-D5B9-42E4-9795-2355665F6AAC}"/>
               </a:ext>
             </a:extLst>
           </p:cNvPr>
@@ -13239,7 +13239,7 @@
           <p:cNvPr id="31" name="矩形 30">
             <a:extLst>
               <a:ext uri="{FF2B5EF4-FFF2-40B4-BE49-F238E27FC236}">
-                <a16:creationId xmlns:a16="http://schemas.microsoft.com/office/drawing/2014/main" id="{63F10912-5547-425F-A8BC-AC90216FF01E}"/>
+                <ns2:creationId id="{63F10912-5547-425F-A8BC-AC90216FF01E}"/>
               </a:ext>
             </a:extLst>
           </p:cNvPr>
@@ -13282,7 +13282,7 @@
     </p:spTree>
     <p:extLst>
       <p:ext uri="{BB962C8B-B14F-4D97-AF65-F5344CB8AC3E}">
-        <p14:creationId xmlns:p14="http://schemas.microsoft.com/office/powerpoint/2010/main" val="1176698470"/>
+        <ns5:creationId val="1176698470"/>
       </p:ext>
     </p:extLst>
   </p:cSld>
@@ -13293,7 +13293,7 @@
 </file>
 
 <file path=ppt/slides/slide17.xml><?xml version="1.0" encoding="utf-8"?>
-<p:sld xmlns:a="http://schemas.openxmlformats.org/drawingml/2006/main" xmlns:r="http://schemas.openxmlformats.org/officeDocument/2006/relationships" xmlns:p="http://schemas.openxmlformats.org/presentationml/2006/main">
+<p:sld xmlns:a="http://schemas.openxmlformats.org/drawingml/2006/main" xmlns:ns2="http://schemas.microsoft.com/office/drawing/2014/main" xmlns:ns3="http://schemas.openxmlformats.org/drawingml/2006/chart" xmlns:ns5="http://schemas.microsoft.com/office/powerpoint/2010/main" xmlns:p="http://schemas.openxmlformats.org/presentationml/2006/main" xmlns:r="http://schemas.openxmlformats.org/officeDocument/2006/relationships">
   <p:cSld>
     <p:spTree>
       <p:nvGrpSpPr>
@@ -13314,7 +13314,7 @@
           <p:cNvPr id="13" name="slide-bg">
             <a:extLst>
               <a:ext uri="{FF2B5EF4-FFF2-40B4-BE49-F238E27FC236}">
-                <a16:creationId xmlns:a16="http://schemas.microsoft.com/office/drawing/2014/main" id="{FCA6B349-CEB9-4916-8020-5D0C46E364F4}"/>
+                <ns2:creationId id="{FCA6B349-CEB9-4916-8020-5D0C46E364F4}"/>
               </a:ext>
             </a:extLst>
           </p:cNvPr>
@@ -13341,7 +13341,7 @@
           <p:cNvPr id="2" name="title">
             <a:extLst>
               <a:ext uri="{FF2B5EF4-FFF2-40B4-BE49-F238E27FC236}">
-                <a16:creationId xmlns:a16="http://schemas.microsoft.com/office/drawing/2014/main" id="{5172599C-6999-4F21-BBB5-EB21CAA9412E}"/>
+                <ns2:creationId id="{5172599C-6999-4F21-BBB5-EB21CAA9412E}"/>
               </a:ext>
             </a:extLst>
           </p:cNvPr>
@@ -13376,7 +13376,7 @@
                   <a:srgbClr val="102033"/>
                 </a:solidFill>
               </a:rPr>
-              <a:t>典型异常案例：流量突变识别</a:t>
+              <a:t>典型案例：流量突变识别</a:t>
             </a:r>
           </a:p>
         </p:txBody>
@@ -13386,7 +13386,7 @@
           <p:cNvPr id="3" name="subtitle">
             <a:extLst>
               <a:ext uri="{FF2B5EF4-FFF2-40B4-BE49-F238E27FC236}">
-                <a16:creationId xmlns:a16="http://schemas.microsoft.com/office/drawing/2014/main" id="{BF3432CE-3A8C-46F4-AD6C-01A5CB9206BD}"/>
+                <ns2:creationId id="{BF3432CE-3A8C-46F4-AD6C-01A5CB9206BD}"/>
               </a:ext>
             </a:extLst>
           </p:cNvPr>
@@ -13431,7 +13431,7 @@
           <p:cNvPr id="4" name="title-rule">
             <a:extLst>
               <a:ext uri="{FF2B5EF4-FFF2-40B4-BE49-F238E27FC236}">
-                <a16:creationId xmlns:a16="http://schemas.microsoft.com/office/drawing/2014/main" id="{7FFBE930-6D58-4AC1-AA9C-B193DF2B9FF8}"/>
+                <ns2:creationId id="{7FFBE930-6D58-4AC1-AA9C-B193DF2B9FF8}"/>
               </a:ext>
             </a:extLst>
           </p:cNvPr>
@@ -13471,7 +13471,7 @@
         </p:xfrm>
         <a:graphic>
           <a:graphicData uri="http://schemas.openxmlformats.org/drawingml/2006/chart">
-            <c:chart xmlns:c="http://schemas.openxmlformats.org/drawingml/2006/chart" xmlns:r="http://schemas.openxmlformats.org/officeDocument/2006/relationships" r:id="rId3"/>
+            <ns3:chart r:id="rId3"/>
           </a:graphicData>
         </a:graphic>
       </p:graphicFrame>
@@ -13480,7 +13480,7 @@
           <p:cNvPr id="6" name="矩形: 圆角 5">
             <a:extLst>
               <a:ext uri="{FF2B5EF4-FFF2-40B4-BE49-F238E27FC236}">
-                <a16:creationId xmlns:a16="http://schemas.microsoft.com/office/drawing/2014/main" id="{A41796D9-3336-4262-82AB-84123E71E463}"/>
+                <ns2:creationId id="{A41796D9-3336-4262-82AB-84123E71E463}"/>
               </a:ext>
             </a:extLst>
           </p:cNvPr>
@@ -13509,7 +13509,7 @@
           <p:cNvPr id="7" name="bullet-0">
             <a:extLst>
               <a:ext uri="{FF2B5EF4-FFF2-40B4-BE49-F238E27FC236}">
-                <a16:creationId xmlns:a16="http://schemas.microsoft.com/office/drawing/2014/main" id="{4C0E9514-14C7-47B3-93BF-1DA6D3922503}"/>
+                <ns2:creationId id="{4C0E9514-14C7-47B3-93BF-1DA6D3922503}"/>
               </a:ext>
             </a:extLst>
           </p:cNvPr>
@@ -13554,7 +13554,7 @@
           <p:cNvPr id="8" name="bullet-1">
             <a:extLst>
               <a:ext uri="{FF2B5EF4-FFF2-40B4-BE49-F238E27FC236}">
-                <a16:creationId xmlns:a16="http://schemas.microsoft.com/office/drawing/2014/main" id="{DFF2C7F1-F854-46AE-8667-9F19960B87EA}"/>
+                <ns2:creationId id="{DFF2C7F1-F854-46AE-8667-9F19960B87EA}"/>
               </a:ext>
             </a:extLst>
           </p:cNvPr>
@@ -13599,7 +13599,7 @@
           <p:cNvPr id="9" name="bullet-2">
             <a:extLst>
               <a:ext uri="{FF2B5EF4-FFF2-40B4-BE49-F238E27FC236}">
-                <a16:creationId xmlns:a16="http://schemas.microsoft.com/office/drawing/2014/main" id="{A35E5FBB-FDF6-47CE-A824-79E3E86E5D8F}"/>
+                <ns2:creationId id="{A35E5FBB-FDF6-47CE-A824-79E3E86E5D8F}"/>
               </a:ext>
             </a:extLst>
           </p:cNvPr>
@@ -13644,7 +13644,7 @@
           <p:cNvPr id="10" name="bullet-3">
             <a:extLst>
               <a:ext uri="{FF2B5EF4-FFF2-40B4-BE49-F238E27FC236}">
-                <a16:creationId xmlns:a16="http://schemas.microsoft.com/office/drawing/2014/main" id="{D8E9B3E3-BF1A-4939-9ABC-0603E7C4CF69}"/>
+                <ns2:creationId id="{D8E9B3E3-BF1A-4939-9ABC-0603E7C4CF69}"/>
               </a:ext>
             </a:extLst>
           </p:cNvPr>
@@ -13689,7 +13689,7 @@
           <p:cNvPr id="11" name="矩形: 圆角 10">
             <a:extLst>
               <a:ext uri="{FF2B5EF4-FFF2-40B4-BE49-F238E27FC236}">
-                <a16:creationId xmlns:a16="http://schemas.microsoft.com/office/drawing/2014/main" id="{1F7BC086-3042-456E-A47E-7E19658B69D2}"/>
+                <ns2:creationId id="{1F7BC086-3042-456E-A47E-7E19658B69D2}"/>
               </a:ext>
             </a:extLst>
           </p:cNvPr>
@@ -13718,7 +13718,7 @@
           <p:cNvPr id="12" name="矩形 11">
             <a:extLst>
               <a:ext uri="{FF2B5EF4-FFF2-40B4-BE49-F238E27FC236}">
-                <a16:creationId xmlns:a16="http://schemas.microsoft.com/office/drawing/2014/main" id="{AFC4F3FE-4B52-4C68-B09D-AF275F88E2E8}"/>
+                <ns2:creationId id="{AFC4F3FE-4B52-4C68-B09D-AF275F88E2E8}"/>
               </a:ext>
             </a:extLst>
           </p:cNvPr>
@@ -13753,7 +13753,7 @@
                   <a:srgbClr val="98610D"/>
                 </a:solidFill>
               </a:rPr>
-              <a:t>这体现了 LSTM AutoEncoder 的优势：学习正常时序模式，对复杂波动和多维关联异常更敏感。</a:t>
+              <a:t>该案例体现了 LSTM AutoEncoder 的优势：通过学习正常时序模式，对复杂波动和多维关联异常更敏感。</a:t>
             </a:r>
           </a:p>
         </p:txBody>
@@ -13761,7 +13761,7 @@
     </p:spTree>
     <p:extLst>
       <p:ext uri="{BB962C8B-B14F-4D97-AF65-F5344CB8AC3E}">
-        <p14:creationId xmlns:p14="http://schemas.microsoft.com/office/powerpoint/2010/main" val="2026991745"/>
+        <ns5:creationId val="2026991745"/>
       </p:ext>
     </p:extLst>
   </p:cSld>
@@ -13772,7 +13772,7 @@
 </file>
 
 <file path=ppt/slides/slide18.xml><?xml version="1.0" encoding="utf-8"?>
-<p:sld xmlns:a="http://schemas.openxmlformats.org/drawingml/2006/main" xmlns:r="http://schemas.openxmlformats.org/officeDocument/2006/relationships" xmlns:p="http://schemas.openxmlformats.org/presentationml/2006/main">
+<p:sld xmlns:a="http://schemas.openxmlformats.org/drawingml/2006/main" xmlns:ns2="http://schemas.microsoft.com/office/drawing/2014/main" xmlns:ns3="http://schemas.microsoft.com/office/powerpoint/2010/main" xmlns:p="http://schemas.openxmlformats.org/presentationml/2006/main">
   <p:cSld>
     <p:spTree>
       <p:nvGrpSpPr>
@@ -13793,7 +13793,7 @@
           <p:cNvPr id="19" name="slide-bg">
             <a:extLst>
               <a:ext uri="{FF2B5EF4-FFF2-40B4-BE49-F238E27FC236}">
-                <a16:creationId xmlns:a16="http://schemas.microsoft.com/office/drawing/2014/main" id="{7D9BF859-1E9D-476C-BB0A-45E94E5B3934}"/>
+                <ns2:creationId id="{7D9BF859-1E9D-476C-BB0A-45E94E5B3934}"/>
               </a:ext>
             </a:extLst>
           </p:cNvPr>
@@ -13820,7 +13820,7 @@
           <p:cNvPr id="2" name="title">
             <a:extLst>
               <a:ext uri="{FF2B5EF4-FFF2-40B4-BE49-F238E27FC236}">
-                <a16:creationId xmlns:a16="http://schemas.microsoft.com/office/drawing/2014/main" id="{E7F0F34A-EA80-4F59-8E4E-C3DC81D6C4AA}"/>
+                <ns2:creationId id="{E7F0F34A-EA80-4F59-8E4E-C3DC81D6C4AA}"/>
               </a:ext>
             </a:extLst>
           </p:cNvPr>
@@ -13865,7 +13865,7 @@
           <p:cNvPr id="3" name="subtitle">
             <a:extLst>
               <a:ext uri="{FF2B5EF4-FFF2-40B4-BE49-F238E27FC236}">
-                <a16:creationId xmlns:a16="http://schemas.microsoft.com/office/drawing/2014/main" id="{12F7BF9B-9EC9-4703-9430-06627F2DE85C}"/>
+                <ns2:creationId id="{12F7BF9B-9EC9-4703-9430-06627F2DE85C}"/>
               </a:ext>
             </a:extLst>
           </p:cNvPr>
@@ -13900,7 +13900,7 @@
                   <a:srgbClr val="526274"/>
                 </a:solidFill>
               </a:rPr>
-              <a:t>本文实现了深度学习模型与燃气表运维业务流程的结合</a:t>
+              <a:t>本文完成了深度学习模型与燃气表运维业务流程的结合</a:t>
             </a:r>
           </a:p>
         </p:txBody>
@@ -13910,7 +13910,7 @@
           <p:cNvPr id="4" name="title-rule">
             <a:extLst>
               <a:ext uri="{FF2B5EF4-FFF2-40B4-BE49-F238E27FC236}">
-                <a16:creationId xmlns:a16="http://schemas.microsoft.com/office/drawing/2014/main" id="{AD033BCB-053F-4960-B699-43CDC999D0A5}"/>
+                <ns2:creationId id="{AD033BCB-053F-4960-B699-43CDC999D0A5}"/>
               </a:ext>
             </a:extLst>
           </p:cNvPr>
@@ -13943,7 +13943,7 @@
           <p:cNvPr id="5" name="矩形: 圆角 4">
             <a:extLst>
               <a:ext uri="{FF2B5EF4-FFF2-40B4-BE49-F238E27FC236}">
-                <a16:creationId xmlns:a16="http://schemas.microsoft.com/office/drawing/2014/main" id="{C98828DB-A650-4E74-B182-1BD0BB767606}"/>
+                <ns2:creationId id="{C98828DB-A650-4E74-B182-1BD0BB767606}"/>
               </a:ext>
             </a:extLst>
           </p:cNvPr>
@@ -13972,7 +13972,7 @@
           <p:cNvPr id="6" name="矩形 5">
             <a:extLst>
               <a:ext uri="{FF2B5EF4-FFF2-40B4-BE49-F238E27FC236}">
-                <a16:creationId xmlns:a16="http://schemas.microsoft.com/office/drawing/2014/main" id="{53559ECE-0EF1-4F96-B4F1-044ECCE50034}"/>
+                <ns2:creationId id="{53559ECE-0EF1-4F96-B4F1-044ECCE50034}"/>
               </a:ext>
             </a:extLst>
           </p:cNvPr>
@@ -14017,7 +14017,7 @@
           <p:cNvPr id="7" name="bullet-0">
             <a:extLst>
               <a:ext uri="{FF2B5EF4-FFF2-40B4-BE49-F238E27FC236}">
-                <a16:creationId xmlns:a16="http://schemas.microsoft.com/office/drawing/2014/main" id="{B83A59DE-7ACE-47CD-902E-B648627CE820}"/>
+                <ns2:creationId id="{B83A59DE-7ACE-47CD-902E-B648627CE820}"/>
               </a:ext>
             </a:extLst>
           </p:cNvPr>
@@ -14052,7 +14052,7 @@
                   <a:srgbClr val="102033"/>
                 </a:solidFill>
               </a:rPr>
-              <a:t>• 构建了物联网智能燃气表异常检测系统</a:t>
+              <a:t>• 完成物联网智能燃气表异常检测系统设计与实现</a:t>
             </a:r>
           </a:p>
         </p:txBody>
@@ -14062,7 +14062,7 @@
           <p:cNvPr id="8" name="bullet-1">
             <a:extLst>
               <a:ext uri="{FF2B5EF4-FFF2-40B4-BE49-F238E27FC236}">
-                <a16:creationId xmlns:a16="http://schemas.microsoft.com/office/drawing/2014/main" id="{451915B7-6D46-4F43-A958-A129BD5F5E41}"/>
+                <ns2:creationId id="{451915B7-6D46-4F43-A958-A129BD5F5E41}"/>
               </a:ext>
             </a:extLst>
           </p:cNvPr>
@@ -14107,7 +14107,7 @@
           <p:cNvPr id="9" name="bullet-2">
             <a:extLst>
               <a:ext uri="{FF2B5EF4-FFF2-40B4-BE49-F238E27FC236}">
-                <a16:creationId xmlns:a16="http://schemas.microsoft.com/office/drawing/2014/main" id="{7E9EE679-47A8-4D30-BD33-FBA9B4DE9BA9}"/>
+                <ns2:creationId id="{7E9EE679-47A8-4D30-BD33-FBA9B4DE9BA9}"/>
               </a:ext>
             </a:extLst>
           </p:cNvPr>
@@ -14142,7 +14142,7 @@
                   <a:srgbClr val="102033"/>
                 </a:solidFill>
               </a:rPr>
-              <a:t>• 实现数据接入、实时推理、告警、工单和看板</a:t>
+              <a:t>• 实现设备接入、实时推理、告警、工单和看板</a:t>
             </a:r>
           </a:p>
         </p:txBody>
@@ -14152,7 +14152,7 @@
           <p:cNvPr id="10" name="bullet-3">
             <a:extLst>
               <a:ext uri="{FF2B5EF4-FFF2-40B4-BE49-F238E27FC236}">
-                <a16:creationId xmlns:a16="http://schemas.microsoft.com/office/drawing/2014/main" id="{60C26000-0B9D-4B17-AD1D-98FA85DF0B2C}"/>
+                <ns2:creationId id="{60C26000-0B9D-4B17-AD1D-98FA85DF0B2C}"/>
               </a:ext>
             </a:extLst>
           </p:cNvPr>
@@ -14187,7 +14187,7 @@
                   <a:srgbClr val="102033"/>
                 </a:solidFill>
               </a:rPr>
-              <a:t>• 实验表明 LSTM AE 的 F1-score 达到 0.852</a:t>
+              <a:t>• 实验中 LSTM AE 的 F1-score 达到 0.852</a:t>
             </a:r>
           </a:p>
         </p:txBody>
@@ -14197,7 +14197,7 @@
           <p:cNvPr id="11" name="bullet-4">
             <a:extLst>
               <a:ext uri="{FF2B5EF4-FFF2-40B4-BE49-F238E27FC236}">
-                <a16:creationId xmlns:a16="http://schemas.microsoft.com/office/drawing/2014/main" id="{B0530F37-B4E5-4ED6-BE2D-AE304E74476E}"/>
+                <ns2:creationId id="{B0530F37-B4E5-4ED6-BE2D-AE304E74476E}"/>
               </a:ext>
             </a:extLst>
           </p:cNvPr>
@@ -14242,7 +14242,7 @@
           <p:cNvPr id="12" name="矩形: 圆角 11">
             <a:extLst>
               <a:ext uri="{FF2B5EF4-FFF2-40B4-BE49-F238E27FC236}">
-                <a16:creationId xmlns:a16="http://schemas.microsoft.com/office/drawing/2014/main" id="{266AD3A4-828A-48FC-A46A-DED5B133EC74}"/>
+                <ns2:creationId id="{266AD3A4-828A-48FC-A46A-DED5B133EC74}"/>
               </a:ext>
             </a:extLst>
           </p:cNvPr>
@@ -14271,7 +14271,7 @@
           <p:cNvPr id="13" name="矩形 12">
             <a:extLst>
               <a:ext uri="{FF2B5EF4-FFF2-40B4-BE49-F238E27FC236}">
-                <a16:creationId xmlns:a16="http://schemas.microsoft.com/office/drawing/2014/main" id="{54897AA4-A817-4B29-BF23-D37BFE72A81C}"/>
+                <ns2:creationId id="{54897AA4-A817-4B29-BF23-D37BFE72A81C}"/>
               </a:ext>
             </a:extLst>
           </p:cNvPr>
@@ -14316,7 +14316,7 @@
           <p:cNvPr id="14" name="bullet-0">
             <a:extLst>
               <a:ext uri="{FF2B5EF4-FFF2-40B4-BE49-F238E27FC236}">
-                <a16:creationId xmlns:a16="http://schemas.microsoft.com/office/drawing/2014/main" id="{049AE497-0629-4A91-9100-6E780EAD4C47}"/>
+                <ns2:creationId id="{049AE497-0629-4A91-9100-6E780EAD4C47}"/>
               </a:ext>
             </a:extLst>
           </p:cNvPr>
@@ -14351,7 +14351,7 @@
                   <a:srgbClr val="102033"/>
                 </a:solidFill>
               </a:rPr>
-              <a:t>• 当前主要基于模拟数据验证</a:t>
+              <a:t>• 当前主要基于模拟数据和实验数据验证</a:t>
             </a:r>
           </a:p>
         </p:txBody>
@@ -14361,7 +14361,7 @@
           <p:cNvPr id="15" name="bullet-1">
             <a:extLst>
               <a:ext uri="{FF2B5EF4-FFF2-40B4-BE49-F238E27FC236}">
-                <a16:creationId xmlns:a16="http://schemas.microsoft.com/office/drawing/2014/main" id="{C2E5923C-DF45-438C-94D0-8EEFB3D3A898}"/>
+                <ns2:creationId id="{C2E5923C-DF45-438C-94D0-8EEFB3D3A898}"/>
               </a:ext>
             </a:extLst>
           </p:cNvPr>
@@ -14406,7 +14406,7 @@
           <p:cNvPr id="16" name="bullet-2">
             <a:extLst>
               <a:ext uri="{FF2B5EF4-FFF2-40B4-BE49-F238E27FC236}">
-                <a16:creationId xmlns:a16="http://schemas.microsoft.com/office/drawing/2014/main" id="{809FE04F-E420-41D4-AEB1-9DC544125A6A}"/>
+                <ns2:creationId id="{809FE04F-E420-41D4-AEB1-9DC544125A6A}"/>
               </a:ext>
             </a:extLst>
           </p:cNvPr>
@@ -14451,7 +14451,7 @@
           <p:cNvPr id="17" name="bullet-3">
             <a:extLst>
               <a:ext uri="{FF2B5EF4-FFF2-40B4-BE49-F238E27FC236}">
-                <a16:creationId xmlns:a16="http://schemas.microsoft.com/office/drawing/2014/main" id="{655BCE05-2E13-4D6E-85F5-18CE92708DF7}"/>
+                <ns2:creationId id="{655BCE05-2E13-4D6E-85F5-18CE92708DF7}"/>
               </a:ext>
             </a:extLst>
           </p:cNvPr>
@@ -14496,7 +14496,7 @@
           <p:cNvPr id="18" name="bullet-4">
             <a:extLst>
               <a:ext uri="{FF2B5EF4-FFF2-40B4-BE49-F238E27FC236}">
-                <a16:creationId xmlns:a16="http://schemas.microsoft.com/office/drawing/2014/main" id="{8286FF20-C296-463B-B53A-275018C0F183}"/>
+                <ns2:creationId id="{8286FF20-C296-463B-B53A-275018C0F183}"/>
               </a:ext>
             </a:extLst>
           </p:cNvPr>
@@ -14539,7 +14539,7 @@
     </p:spTree>
     <p:extLst>
       <p:ext uri="{BB962C8B-B14F-4D97-AF65-F5344CB8AC3E}">
-        <p14:creationId xmlns:p14="http://schemas.microsoft.com/office/powerpoint/2010/main" val="1026472199"/>
+        <ns3:creationId val="1026472199"/>
       </p:ext>
     </p:extLst>
   </p:cSld>
@@ -14550,7 +14550,7 @@
 </file>
 
 <file path=ppt/slides/slide2.xml><?xml version="1.0" encoding="utf-8"?>
-<p:sld xmlns:a="http://schemas.openxmlformats.org/drawingml/2006/main" xmlns:r="http://schemas.openxmlformats.org/officeDocument/2006/relationships" xmlns:p="http://schemas.openxmlformats.org/presentationml/2006/main">
+<p:sld xmlns:a="http://schemas.openxmlformats.org/drawingml/2006/main" xmlns:ns2="http://schemas.microsoft.com/office/drawing/2014/main" xmlns:ns3="http://schemas.microsoft.com/office/powerpoint/2010/main" xmlns:p="http://schemas.openxmlformats.org/presentationml/2006/main">
   <p:cSld>
     <p:spTree>
       <p:nvGrpSpPr>
@@ -14571,7 +14571,7 @@
           <p:cNvPr id="35" name="slide-bg">
             <a:extLst>
               <a:ext uri="{FF2B5EF4-FFF2-40B4-BE49-F238E27FC236}">
-                <a16:creationId xmlns:a16="http://schemas.microsoft.com/office/drawing/2014/main" id="{FC31A2D0-07C4-4CEB-9296-EBA4ED007BE4}"/>
+                <ns2:creationId id="{FC31A2D0-07C4-4CEB-9296-EBA4ED007BE4}"/>
               </a:ext>
             </a:extLst>
           </p:cNvPr>
@@ -14598,7 +14598,7 @@
           <p:cNvPr id="2" name="title">
             <a:extLst>
               <a:ext uri="{FF2B5EF4-FFF2-40B4-BE49-F238E27FC236}">
-                <a16:creationId xmlns:a16="http://schemas.microsoft.com/office/drawing/2014/main" id="{20CFF28E-5A27-4485-860E-86816899A18F}"/>
+                <ns2:creationId id="{20CFF28E-5A27-4485-860E-86816899A18F}"/>
               </a:ext>
             </a:extLst>
           </p:cNvPr>
@@ -14643,7 +14643,7 @@
           <p:cNvPr id="3" name="subtitle">
             <a:extLst>
               <a:ext uri="{FF2B5EF4-FFF2-40B4-BE49-F238E27FC236}">
-                <a16:creationId xmlns:a16="http://schemas.microsoft.com/office/drawing/2014/main" id="{28C651FB-FAD9-4D17-B7BE-4D26513B50DC}"/>
+                <ns2:creationId id="{28C651FB-FAD9-4D17-B7BE-4D26513B50DC}"/>
               </a:ext>
             </a:extLst>
           </p:cNvPr>
@@ -14678,7 +14678,7 @@
                   <a:srgbClr val="526274"/>
                 </a:solidFill>
               </a:rPr>
-              <a:t>围绕问题、模型、系统和实验结果展开</a:t>
+              <a:t>按照毕业设计汇报逻辑，说明问题、设计、实现和验证结果</a:t>
             </a:r>
           </a:p>
         </p:txBody>
@@ -14688,7 +14688,7 @@
           <p:cNvPr id="4" name="title-rule">
             <a:extLst>
               <a:ext uri="{FF2B5EF4-FFF2-40B4-BE49-F238E27FC236}">
-                <a16:creationId xmlns:a16="http://schemas.microsoft.com/office/drawing/2014/main" id="{2A37A44B-91E7-4695-9727-67445F4191C9}"/>
+                <ns2:creationId id="{2A37A44B-91E7-4695-9727-67445F4191C9}"/>
               </a:ext>
             </a:extLst>
           </p:cNvPr>
@@ -14721,7 +14721,7 @@
           <p:cNvPr id="5" name="矩形: 圆角 4">
             <a:extLst>
               <a:ext uri="{FF2B5EF4-FFF2-40B4-BE49-F238E27FC236}">
-                <a16:creationId xmlns:a16="http://schemas.microsoft.com/office/drawing/2014/main" id="{12344C47-39D3-4E6E-A769-1B6EFAF6597D}"/>
+                <ns2:creationId id="{12344C47-39D3-4E6E-A769-1B6EFAF6597D}"/>
               </a:ext>
             </a:extLst>
           </p:cNvPr>
@@ -14750,7 +14750,7 @@
           <p:cNvPr id="6" name="矩形: 圆角 5">
             <a:extLst>
               <a:ext uri="{FF2B5EF4-FFF2-40B4-BE49-F238E27FC236}">
-                <a16:creationId xmlns:a16="http://schemas.microsoft.com/office/drawing/2014/main" id="{EA129F17-1D1B-4D63-8A24-18AD766B9D16}"/>
+                <ns2:creationId id="{EA129F17-1D1B-4D63-8A24-18AD766B9D16}"/>
               </a:ext>
             </a:extLst>
           </p:cNvPr>
@@ -14779,7 +14779,7 @@
           <p:cNvPr id="7" name="矩形 6">
             <a:extLst>
               <a:ext uri="{FF2B5EF4-FFF2-40B4-BE49-F238E27FC236}">
-                <a16:creationId xmlns:a16="http://schemas.microsoft.com/office/drawing/2014/main" id="{88D4B785-3D75-4E24-96E8-28574B87D6B7}"/>
+                <ns2:creationId id="{88D4B785-3D75-4E24-96E8-28574B87D6B7}"/>
               </a:ext>
             </a:extLst>
           </p:cNvPr>
@@ -14824,7 +14824,7 @@
           <p:cNvPr id="8" name="矩形 7">
             <a:extLst>
               <a:ext uri="{FF2B5EF4-FFF2-40B4-BE49-F238E27FC236}">
-                <a16:creationId xmlns:a16="http://schemas.microsoft.com/office/drawing/2014/main" id="{A6ED28B0-6A2E-45CB-A1F4-3551B85FBBE1}"/>
+                <ns2:creationId id="{A6ED28B0-6A2E-45CB-A1F4-3551B85FBBE1}"/>
               </a:ext>
             </a:extLst>
           </p:cNvPr>
@@ -14859,7 +14859,7 @@
                   <a:srgbClr val="102033"/>
                 </a:solidFill>
               </a:rPr>
-              <a:t>研究背景与目标</a:t>
+              <a:t>选题背景与研究意义</a:t>
             </a:r>
           </a:p>
         </p:txBody>
@@ -14869,7 +14869,7 @@
           <p:cNvPr id="9" name="矩形 8">
             <a:extLst>
               <a:ext uri="{FF2B5EF4-FFF2-40B4-BE49-F238E27FC236}">
-                <a16:creationId xmlns:a16="http://schemas.microsoft.com/office/drawing/2014/main" id="{BCE7617A-FB8A-4375-B9DE-C336E26086D5}"/>
+                <ns2:creationId id="{BCE7617A-FB8A-4375-B9DE-C336E26086D5}"/>
               </a:ext>
             </a:extLst>
           </p:cNvPr>
@@ -14904,7 +14904,7 @@
                   <a:srgbClr val="526274"/>
                 </a:solidFill>
               </a:rPr>
-              <a:t>智能燃气表多维时序数据异常检测问题</a:t>
+              <a:t>智能燃气表时序数据异常检测问题</a:t>
             </a:r>
           </a:p>
         </p:txBody>
@@ -14914,7 +14914,7 @@
           <p:cNvPr id="10" name="矩形: 圆角 9">
             <a:extLst>
               <a:ext uri="{FF2B5EF4-FFF2-40B4-BE49-F238E27FC236}">
-                <a16:creationId xmlns:a16="http://schemas.microsoft.com/office/drawing/2014/main" id="{B565D62E-86C9-4D22-9E21-BDF598FC4625}"/>
+                <ns2:creationId id="{B565D62E-86C9-4D22-9E21-BDF598FC4625}"/>
               </a:ext>
             </a:extLst>
           </p:cNvPr>
@@ -14943,7 +14943,7 @@
           <p:cNvPr id="11" name="矩形: 圆角 10">
             <a:extLst>
               <a:ext uri="{FF2B5EF4-FFF2-40B4-BE49-F238E27FC236}">
-                <a16:creationId xmlns:a16="http://schemas.microsoft.com/office/drawing/2014/main" id="{BAF2B468-7B5C-4632-B6B2-BB3DAC7B44A3}"/>
+                <ns2:creationId id="{BAF2B468-7B5C-4632-B6B2-BB3DAC7B44A3}"/>
               </a:ext>
             </a:extLst>
           </p:cNvPr>
@@ -14972,7 +14972,7 @@
           <p:cNvPr id="12" name="矩形 11">
             <a:extLst>
               <a:ext uri="{FF2B5EF4-FFF2-40B4-BE49-F238E27FC236}">
-                <a16:creationId xmlns:a16="http://schemas.microsoft.com/office/drawing/2014/main" id="{F8455A07-1877-4869-8213-16EDFC748563}"/>
+                <ns2:creationId id="{F8455A07-1877-4869-8213-16EDFC748563}"/>
               </a:ext>
             </a:extLst>
           </p:cNvPr>
@@ -15017,7 +15017,7 @@
           <p:cNvPr id="13" name="矩形 12">
             <a:extLst>
               <a:ext uri="{FF2B5EF4-FFF2-40B4-BE49-F238E27FC236}">
-                <a16:creationId xmlns:a16="http://schemas.microsoft.com/office/drawing/2014/main" id="{5E910F34-CA4F-4397-AF11-AA3D58115EC2}"/>
+                <ns2:creationId id="{5E910F34-CA4F-4397-AF11-AA3D58115EC2}"/>
               </a:ext>
             </a:extLst>
           </p:cNvPr>
@@ -15052,7 +15052,7 @@
                   <a:srgbClr val="102033"/>
                 </a:solidFill>
               </a:rPr>
-              <a:t>系统总体设计</a:t>
+              <a:t>需求分析与总体设计</a:t>
             </a:r>
           </a:p>
         </p:txBody>
@@ -15062,7 +15062,7 @@
           <p:cNvPr id="14" name="矩形 13">
             <a:extLst>
               <a:ext uri="{FF2B5EF4-FFF2-40B4-BE49-F238E27FC236}">
-                <a16:creationId xmlns:a16="http://schemas.microsoft.com/office/drawing/2014/main" id="{5FABAEC9-3B51-4CD1-ACB4-EA7E049D7DAE}"/>
+                <ns2:creationId id="{5FABAEC9-3B51-4CD1-ACB4-EA7E049D7DAE}"/>
               </a:ext>
             </a:extLst>
           </p:cNvPr>
@@ -15107,7 +15107,7 @@
           <p:cNvPr id="15" name="矩形: 圆角 14">
             <a:extLst>
               <a:ext uri="{FF2B5EF4-FFF2-40B4-BE49-F238E27FC236}">
-                <a16:creationId xmlns:a16="http://schemas.microsoft.com/office/drawing/2014/main" id="{FF28BC86-80F7-4687-858D-E285A0C985E3}"/>
+                <ns2:creationId id="{FF28BC86-80F7-4687-858D-E285A0C985E3}"/>
               </a:ext>
             </a:extLst>
           </p:cNvPr>
@@ -15136,7 +15136,7 @@
           <p:cNvPr id="16" name="矩形: 圆角 15">
             <a:extLst>
               <a:ext uri="{FF2B5EF4-FFF2-40B4-BE49-F238E27FC236}">
-                <a16:creationId xmlns:a16="http://schemas.microsoft.com/office/drawing/2014/main" id="{450EDAFF-7FA0-4639-B46A-0FA85A9236F5}"/>
+                <ns2:creationId id="{450EDAFF-7FA0-4639-B46A-0FA85A9236F5}"/>
               </a:ext>
             </a:extLst>
           </p:cNvPr>
@@ -15165,7 +15165,7 @@
           <p:cNvPr id="17" name="矩形 16">
             <a:extLst>
               <a:ext uri="{FF2B5EF4-FFF2-40B4-BE49-F238E27FC236}">
-                <a16:creationId xmlns:a16="http://schemas.microsoft.com/office/drawing/2014/main" id="{B3AEA90D-0E34-4C3A-9DBE-11767E15C954}"/>
+                <ns2:creationId id="{B3AEA90D-0E34-4C3A-9DBE-11767E15C954}"/>
               </a:ext>
             </a:extLst>
           </p:cNvPr>
@@ -15210,7 +15210,7 @@
           <p:cNvPr id="18" name="矩形 17">
             <a:extLst>
               <a:ext uri="{FF2B5EF4-FFF2-40B4-BE49-F238E27FC236}">
-                <a16:creationId xmlns:a16="http://schemas.microsoft.com/office/drawing/2014/main" id="{AF2682F3-7D78-4B45-8C89-ED2EAC20E26E}"/>
+                <ns2:creationId id="{AF2682F3-7D78-4B45-8C89-ED2EAC20E26E}"/>
               </a:ext>
             </a:extLst>
           </p:cNvPr>
@@ -15245,7 +15245,7 @@
                   <a:srgbClr val="102033"/>
                 </a:solidFill>
               </a:rPr>
-              <a:t>LSTM AutoEncoder 模型</a:t>
+              <a:t>核心算法设计</a:t>
             </a:r>
           </a:p>
         </p:txBody>
@@ -15255,7 +15255,7 @@
           <p:cNvPr id="19" name="矩形 18">
             <a:extLst>
               <a:ext uri="{FF2B5EF4-FFF2-40B4-BE49-F238E27FC236}">
-                <a16:creationId xmlns:a16="http://schemas.microsoft.com/office/drawing/2014/main" id="{7AF41A16-531A-4AEE-8BF2-6EA5A1397507}"/>
+                <ns2:creationId id="{7AF41A16-531A-4AEE-8BF2-6EA5A1397507}"/>
               </a:ext>
             </a:extLst>
           </p:cNvPr>
@@ -15290,7 +15290,7 @@
                   <a:srgbClr val="526274"/>
                 </a:solidFill>
               </a:rPr>
-              <a:t>滑动窗口、重构误差、阈值判定</a:t>
+              <a:t>LSTM AutoEncoder、滑动窗口与阈值判定</a:t>
             </a:r>
           </a:p>
         </p:txBody>
@@ -15300,7 +15300,7 @@
           <p:cNvPr id="20" name="矩形: 圆角 19">
             <a:extLst>
               <a:ext uri="{FF2B5EF4-FFF2-40B4-BE49-F238E27FC236}">
-                <a16:creationId xmlns:a16="http://schemas.microsoft.com/office/drawing/2014/main" id="{FE2A5B51-A5AD-43C0-97B4-634D5560CD46}"/>
+                <ns2:creationId id="{FE2A5B51-A5AD-43C0-97B4-634D5560CD46}"/>
               </a:ext>
             </a:extLst>
           </p:cNvPr>
@@ -15329,7 +15329,7 @@
           <p:cNvPr id="21" name="矩形: 圆角 20">
             <a:extLst>
               <a:ext uri="{FF2B5EF4-FFF2-40B4-BE49-F238E27FC236}">
-                <a16:creationId xmlns:a16="http://schemas.microsoft.com/office/drawing/2014/main" id="{82F38BFC-4556-482C-B9C6-8974F9B1B3B8}"/>
+                <ns2:creationId id="{82F38BFC-4556-482C-B9C6-8974F9B1B3B8}"/>
               </a:ext>
             </a:extLst>
           </p:cNvPr>
@@ -15358,7 +15358,7 @@
           <p:cNvPr id="22" name="矩形 21">
             <a:extLst>
               <a:ext uri="{FF2B5EF4-FFF2-40B4-BE49-F238E27FC236}">
-                <a16:creationId xmlns:a16="http://schemas.microsoft.com/office/drawing/2014/main" id="{7C53990A-0F34-411A-B628-4ECE8CEFCDEE}"/>
+                <ns2:creationId id="{7C53990A-0F34-411A-B628-4ECE8CEFCDEE}"/>
               </a:ext>
             </a:extLst>
           </p:cNvPr>
@@ -15403,7 +15403,7 @@
           <p:cNvPr id="23" name="矩形 22">
             <a:extLst>
               <a:ext uri="{FF2B5EF4-FFF2-40B4-BE49-F238E27FC236}">
-                <a16:creationId xmlns:a16="http://schemas.microsoft.com/office/drawing/2014/main" id="{C393C2B1-9E37-465A-855E-3244EEE2BB18}"/>
+                <ns2:creationId id="{C393C2B1-9E37-465A-855E-3244EEE2BB18}"/>
               </a:ext>
             </a:extLst>
           </p:cNvPr>
@@ -15448,7 +15448,7 @@
           <p:cNvPr id="24" name="矩形 23">
             <a:extLst>
               <a:ext uri="{FF2B5EF4-FFF2-40B4-BE49-F238E27FC236}">
-                <a16:creationId xmlns:a16="http://schemas.microsoft.com/office/drawing/2014/main" id="{1674CBF0-EF01-4036-8CD5-95CE9DDECF21}"/>
+                <ns2:creationId id="{1674CBF0-EF01-4036-8CD5-95CE9DDECF21}"/>
               </a:ext>
             </a:extLst>
           </p:cNvPr>
@@ -15493,7 +15493,7 @@
           <p:cNvPr id="25" name="矩形: 圆角 24">
             <a:extLst>
               <a:ext uri="{FF2B5EF4-FFF2-40B4-BE49-F238E27FC236}">
-                <a16:creationId xmlns:a16="http://schemas.microsoft.com/office/drawing/2014/main" id="{A510BBD7-1896-4351-BA46-CA07E0E29CD3}"/>
+                <ns2:creationId id="{A510BBD7-1896-4351-BA46-CA07E0E29CD3}"/>
               </a:ext>
             </a:extLst>
           </p:cNvPr>
@@ -15522,7 +15522,7 @@
           <p:cNvPr id="26" name="矩形: 圆角 25">
             <a:extLst>
               <a:ext uri="{FF2B5EF4-FFF2-40B4-BE49-F238E27FC236}">
-                <a16:creationId xmlns:a16="http://schemas.microsoft.com/office/drawing/2014/main" id="{5EE250DE-F908-458B-8271-880592780CE1}"/>
+                <ns2:creationId id="{5EE250DE-F908-458B-8271-880592780CE1}"/>
               </a:ext>
             </a:extLst>
           </p:cNvPr>
@@ -15551,7 +15551,7 @@
           <p:cNvPr id="27" name="矩形 26">
             <a:extLst>
               <a:ext uri="{FF2B5EF4-FFF2-40B4-BE49-F238E27FC236}">
-                <a16:creationId xmlns:a16="http://schemas.microsoft.com/office/drawing/2014/main" id="{7D970B27-A702-48E8-9FD3-4D702E48DF1F}"/>
+                <ns2:creationId id="{7D970B27-A702-48E8-9FD3-4D702E48DF1F}"/>
               </a:ext>
             </a:extLst>
           </p:cNvPr>
@@ -15596,7 +15596,7 @@
           <p:cNvPr id="28" name="矩形 27">
             <a:extLst>
               <a:ext uri="{FF2B5EF4-FFF2-40B4-BE49-F238E27FC236}">
-                <a16:creationId xmlns:a16="http://schemas.microsoft.com/office/drawing/2014/main" id="{7B56D602-3E6A-4EE0-96CE-225C300651F3}"/>
+                <ns2:creationId id="{7B56D602-3E6A-4EE0-96CE-225C300651F3}"/>
               </a:ext>
             </a:extLst>
           </p:cNvPr>
@@ -15631,7 +15631,7 @@
                   <a:srgbClr val="102033"/>
                 </a:solidFill>
               </a:rPr>
-              <a:t>实验测试与结果</a:t>
+              <a:t>测试与结果分析</a:t>
             </a:r>
           </a:p>
         </p:txBody>
@@ -15641,7 +15641,7 @@
           <p:cNvPr id="29" name="矩形 28">
             <a:extLst>
               <a:ext uri="{FF2B5EF4-FFF2-40B4-BE49-F238E27FC236}">
-                <a16:creationId xmlns:a16="http://schemas.microsoft.com/office/drawing/2014/main" id="{21C4D456-20BE-451F-ACB9-2974A03E55CD}"/>
+                <ns2:creationId id="{21C4D456-20BE-451F-ACB9-2974A03E55CD}"/>
               </a:ext>
             </a:extLst>
           </p:cNvPr>
@@ -15676,7 +15676,7 @@
                   <a:srgbClr val="526274"/>
                 </a:solidFill>
               </a:rPr>
-              <a:t>模型对比、阈值实验、实时性测试</a:t>
+              <a:t>检测指标、实时性和持续训练验证</a:t>
             </a:r>
           </a:p>
         </p:txBody>
@@ -15686,7 +15686,7 @@
           <p:cNvPr id="30" name="矩形: 圆角 29">
             <a:extLst>
               <a:ext uri="{FF2B5EF4-FFF2-40B4-BE49-F238E27FC236}">
-                <a16:creationId xmlns:a16="http://schemas.microsoft.com/office/drawing/2014/main" id="{8C616059-85B8-4E00-82D0-ACDDF3393373}"/>
+                <ns2:creationId id="{8C616059-85B8-4E00-82D0-ACDDF3393373}"/>
               </a:ext>
             </a:extLst>
           </p:cNvPr>
@@ -15715,7 +15715,7 @@
           <p:cNvPr id="31" name="矩形: 圆角 30">
             <a:extLst>
               <a:ext uri="{FF2B5EF4-FFF2-40B4-BE49-F238E27FC236}">
-                <a16:creationId xmlns:a16="http://schemas.microsoft.com/office/drawing/2014/main" id="{F34C0BE6-FB03-4E6A-BF4E-1598E6629A95}"/>
+                <ns2:creationId id="{F34C0BE6-FB03-4E6A-BF4E-1598E6629A95}"/>
               </a:ext>
             </a:extLst>
           </p:cNvPr>
@@ -15744,7 +15744,7 @@
           <p:cNvPr id="32" name="矩形 31">
             <a:extLst>
               <a:ext uri="{FF2B5EF4-FFF2-40B4-BE49-F238E27FC236}">
-                <a16:creationId xmlns:a16="http://schemas.microsoft.com/office/drawing/2014/main" id="{FDD4D2D9-C03A-4692-81BD-C3B7F67B9211}"/>
+                <ns2:creationId id="{FDD4D2D9-C03A-4692-81BD-C3B7F67B9211}"/>
               </a:ext>
             </a:extLst>
           </p:cNvPr>
@@ -15789,7 +15789,7 @@
           <p:cNvPr id="33" name="矩形 32">
             <a:extLst>
               <a:ext uri="{FF2B5EF4-FFF2-40B4-BE49-F238E27FC236}">
-                <a16:creationId xmlns:a16="http://schemas.microsoft.com/office/drawing/2014/main" id="{A1FA57AA-94BA-4111-808A-A642D239F257}"/>
+                <ns2:creationId id="{A1FA57AA-94BA-4111-808A-A642D239F257}"/>
               </a:ext>
             </a:extLst>
           </p:cNvPr>
@@ -15834,7 +15834,7 @@
           <p:cNvPr id="34" name="矩形 33">
             <a:extLst>
               <a:ext uri="{FF2B5EF4-FFF2-40B4-BE49-F238E27FC236}">
-                <a16:creationId xmlns:a16="http://schemas.microsoft.com/office/drawing/2014/main" id="{DF1733DC-0D5E-4C15-A8CD-F40F0E0D9D84}"/>
+                <ns2:creationId id="{DF1733DC-0D5E-4C15-A8CD-F40F0E0D9D84}"/>
               </a:ext>
             </a:extLst>
           </p:cNvPr>
@@ -15869,7 +15869,7 @@
                   <a:srgbClr val="526274"/>
                 </a:solidFill>
               </a:rPr>
-              <a:t>研究成果、不足和后续优化方向</a:t>
+              <a:t>完成工作、不足与后续优化方向</a:t>
             </a:r>
           </a:p>
         </p:txBody>
@@ -15877,7 +15877,7 @@
     </p:spTree>
     <p:extLst>
       <p:ext uri="{BB962C8B-B14F-4D97-AF65-F5344CB8AC3E}">
-        <p14:creationId xmlns:p14="http://schemas.microsoft.com/office/powerpoint/2010/main" val="1773086061"/>
+        <ns3:creationId val="1773086061"/>
       </p:ext>
     </p:extLst>
   </p:cSld>
@@ -15888,7 +15888,7 @@
 </file>
 
 <file path=ppt/slides/slide3.xml><?xml version="1.0" encoding="utf-8"?>
-<p:sld xmlns:a="http://schemas.openxmlformats.org/drawingml/2006/main" xmlns:r="http://schemas.openxmlformats.org/officeDocument/2006/relationships" xmlns:p="http://schemas.openxmlformats.org/presentationml/2006/main">
+<p:sld xmlns:a="http://schemas.openxmlformats.org/drawingml/2006/main" xmlns:ns2="http://schemas.microsoft.com/office/drawing/2014/main" xmlns:ns3="http://schemas.microsoft.com/office/powerpoint/2010/main" xmlns:p="http://schemas.openxmlformats.org/presentationml/2006/main">
   <p:cSld>
     <p:spTree>
       <p:nvGrpSpPr>
@@ -15909,7 +15909,7 @@
           <p:cNvPr id="22" name="slide-bg">
             <a:extLst>
               <a:ext uri="{FF2B5EF4-FFF2-40B4-BE49-F238E27FC236}">
-                <a16:creationId xmlns:a16="http://schemas.microsoft.com/office/drawing/2014/main" id="{CE15EA1F-63E7-4AEF-80CD-752FF7526919}"/>
+                <ns2:creationId id="{CE15EA1F-63E7-4AEF-80CD-752FF7526919}"/>
               </a:ext>
             </a:extLst>
           </p:cNvPr>
@@ -15936,7 +15936,7 @@
           <p:cNvPr id="2" name="title">
             <a:extLst>
               <a:ext uri="{FF2B5EF4-FFF2-40B4-BE49-F238E27FC236}">
-                <a16:creationId xmlns:a16="http://schemas.microsoft.com/office/drawing/2014/main" id="{5D9C5696-F7C2-4FD2-9E5E-2DA7AA78B6B6}"/>
+                <ns2:creationId id="{5D9C5696-F7C2-4FD2-9E5E-2DA7AA78B6B6}"/>
               </a:ext>
             </a:extLst>
           </p:cNvPr>
@@ -15971,7 +15971,7 @@
                   <a:srgbClr val="102033"/>
                 </a:solidFill>
               </a:rPr>
-              <a:t>研究背景：燃气表数据从读数走向状态感知</a:t>
+              <a:t>选题背景：燃气表从远程抄表走向状态感知</a:t>
             </a:r>
           </a:p>
         </p:txBody>
@@ -15981,7 +15981,7 @@
           <p:cNvPr id="3" name="subtitle">
             <a:extLst>
               <a:ext uri="{FF2B5EF4-FFF2-40B4-BE49-F238E27FC236}">
-                <a16:creationId xmlns:a16="http://schemas.microsoft.com/office/drawing/2014/main" id="{1BDE1B34-263F-4692-A9D4-F9A809D0CC74}"/>
+                <ns2:creationId id="{1BDE1B34-263F-4692-A9D4-F9A809D0CC74}"/>
               </a:ext>
             </a:extLst>
           </p:cNvPr>
@@ -16026,7 +16026,7 @@
           <p:cNvPr id="4" name="title-rule">
             <a:extLst>
               <a:ext uri="{FF2B5EF4-FFF2-40B4-BE49-F238E27FC236}">
-                <a16:creationId xmlns:a16="http://schemas.microsoft.com/office/drawing/2014/main" id="{F96385A3-72F7-4464-A30C-43F1C2C4C7F9}"/>
+                <ns2:creationId id="{F96385A3-72F7-4464-A30C-43F1C2C4C7F9}"/>
               </a:ext>
             </a:extLst>
           </p:cNvPr>
@@ -16059,7 +16059,7 @@
           <p:cNvPr id="5" name="矩形 4">
             <a:extLst>
               <a:ext uri="{FF2B5EF4-FFF2-40B4-BE49-F238E27FC236}">
-                <a16:creationId xmlns:a16="http://schemas.microsoft.com/office/drawing/2014/main" id="{53DE3BF8-C0DC-4B4D-B392-59713ED0CC4B}"/>
+                <ns2:creationId id="{53DE3BF8-C0DC-4B4D-B392-59713ED0CC4B}"/>
               </a:ext>
             </a:extLst>
           </p:cNvPr>
@@ -16094,7 +16094,7 @@
                   <a:srgbClr val="1667B7"/>
                 </a:solidFill>
               </a:rPr>
-              <a:t>核心矛盾</a:t>
+              <a:t>问题来源</a:t>
             </a:r>
           </a:p>
         </p:txBody>
@@ -16104,7 +16104,7 @@
           <p:cNvPr id="6" name="矩形 5">
             <a:extLst>
               <a:ext uri="{FF2B5EF4-FFF2-40B4-BE49-F238E27FC236}">
-                <a16:creationId xmlns:a16="http://schemas.microsoft.com/office/drawing/2014/main" id="{AA3601B9-C07B-4880-964F-43CA9B7E801F}"/>
+                <ns2:creationId id="{AA3601B9-C07B-4880-964F-43CA9B7E801F}"/>
               </a:ext>
             </a:extLst>
           </p:cNvPr>
@@ -16139,7 +16139,7 @@
                   <a:srgbClr val="102033"/>
                 </a:solidFill>
               </a:rPr>
-              <a:t>智能燃气表持续产生海量运行数据，但传统人工巡检和固定阈值只能处理单点越界，难以识别复杂时序关联异常。</a:t>
+              <a:t>智能燃气表持续产生瞬时流量、累计用量、电压、信号、压力等数据；单点阈值只能发现明显越界，难以识别一段时间内的复杂关联异常。</a:t>
             </a:r>
           </a:p>
         </p:txBody>
@@ -16149,7 +16149,7 @@
           <p:cNvPr id="7" name="bullet-0">
             <a:extLst>
               <a:ext uri="{FF2B5EF4-FFF2-40B4-BE49-F238E27FC236}">
-                <a16:creationId xmlns:a16="http://schemas.microsoft.com/office/drawing/2014/main" id="{C407FE78-AC43-43CC-81A8-78E17C51DF28}"/>
+                <ns2:creationId id="{C407FE78-AC43-43CC-81A8-78E17C51DF28}"/>
               </a:ext>
             </a:extLst>
           </p:cNvPr>
@@ -16184,7 +16184,7 @@
                   <a:srgbClr val="102033"/>
                 </a:solidFill>
               </a:rPr>
-              <a:t>• 固定阈值无法适应季节、区域和用户习惯变化</a:t>
+              <a:t>• 数据具有时间连续性，不同特征之间存在联动关系</a:t>
             </a:r>
           </a:p>
         </p:txBody>
@@ -16194,7 +16194,7 @@
           <p:cNvPr id="8" name="bullet-1">
             <a:extLst>
               <a:ext uri="{FF2B5EF4-FFF2-40B4-BE49-F238E27FC236}">
-                <a16:creationId xmlns:a16="http://schemas.microsoft.com/office/drawing/2014/main" id="{151E1EAA-6531-41A6-9ED4-6F920BDB47AB}"/>
+                <ns2:creationId id="{151E1EAA-6531-41A6-9ED4-6F920BDB47AB}"/>
               </a:ext>
             </a:extLst>
           </p:cNvPr>
@@ -16229,7 +16229,7 @@
                   <a:srgbClr val="102033"/>
                 </a:solidFill>
               </a:rPr>
-              <a:t>• 单点规则难以捕捉流量、电压、信号、压力之间的关联</a:t>
+              <a:t>• 固定阈值难以适应季节、区域和用户习惯变化</a:t>
             </a:r>
           </a:p>
         </p:txBody>
@@ -16239,7 +16239,7 @@
           <p:cNvPr id="9" name="bullet-2">
             <a:extLst>
               <a:ext uri="{FF2B5EF4-FFF2-40B4-BE49-F238E27FC236}">
-                <a16:creationId xmlns:a16="http://schemas.microsoft.com/office/drawing/2014/main" id="{A82E5396-A723-443B-BC01-BA129C0B2C95}"/>
+                <ns2:creationId id="{A82E5396-A723-443B-BC01-BA129C0B2C95}"/>
               </a:ext>
             </a:extLst>
           </p:cNvPr>
@@ -16274,7 +16274,7 @@
                   <a:srgbClr val="102033"/>
                 </a:solidFill>
               </a:rPr>
-              <a:t>• 误报会增加运维压力，漏报会带来安全风险</a:t>
+              <a:t>• 异常检测结果还需要进入告警、派单和反馈流程</a:t>
             </a:r>
           </a:p>
         </p:txBody>
@@ -16284,7 +16284,7 @@
           <p:cNvPr id="10" name="矩形: 圆角 9">
             <a:extLst>
               <a:ext uri="{FF2B5EF4-FFF2-40B4-BE49-F238E27FC236}">
-                <a16:creationId xmlns:a16="http://schemas.microsoft.com/office/drawing/2014/main" id="{0BC36C53-8E18-46FE-9323-7ECA886A4955}"/>
+                <ns2:creationId id="{0BC36C53-8E18-46FE-9323-7ECA886A4955}"/>
               </a:ext>
             </a:extLst>
           </p:cNvPr>
@@ -16313,7 +16313,7 @@
           <p:cNvPr id="11" name="矩形 10">
             <a:extLst>
               <a:ext uri="{FF2B5EF4-FFF2-40B4-BE49-F238E27FC236}">
-                <a16:creationId xmlns:a16="http://schemas.microsoft.com/office/drawing/2014/main" id="{046A6FA1-C2F4-4F42-B9CD-38E7053ACFD0}"/>
+                <ns2:creationId id="{046A6FA1-C2F4-4F42-B9CD-38E7053ACFD0}"/>
               </a:ext>
             </a:extLst>
           </p:cNvPr>
@@ -16358,7 +16358,7 @@
           <p:cNvPr id="12" name="矩形 11">
             <a:extLst>
               <a:ext uri="{FF2B5EF4-FFF2-40B4-BE49-F238E27FC236}">
-                <a16:creationId xmlns:a16="http://schemas.microsoft.com/office/drawing/2014/main" id="{C9351BEF-34C7-4B08-95F0-69404682D834}"/>
+                <ns2:creationId id="{C9351BEF-34C7-4B08-95F0-69404682D834}"/>
               </a:ext>
             </a:extLst>
           </p:cNvPr>
@@ -16393,7 +16393,7 @@
                   <a:srgbClr val="102033"/>
                 </a:solidFill>
               </a:rPr>
-              <a:t>传统模式</a:t>
+              <a:t>传统方式</a:t>
             </a:r>
           </a:p>
         </p:txBody>
@@ -16403,7 +16403,7 @@
           <p:cNvPr id="13" name="矩形 12">
             <a:extLst>
               <a:ext uri="{FF2B5EF4-FFF2-40B4-BE49-F238E27FC236}">
-                <a16:creationId xmlns:a16="http://schemas.microsoft.com/office/drawing/2014/main" id="{AC17008E-7CD3-4327-A7D0-D6DD4C3AD31E}"/>
+                <ns2:creationId id="{AC17008E-7CD3-4327-A7D0-D6DD4C3AD31E}"/>
               </a:ext>
             </a:extLst>
           </p:cNvPr>
@@ -16438,7 +16438,7 @@
                   <a:srgbClr val="526274"/>
                 </a:solidFill>
               </a:rPr>
-              <a:t>经验规则主导，被动触发</a:t>
+              <a:t>依赖经验规则，发现复杂异常能力有限</a:t>
             </a:r>
           </a:p>
         </p:txBody>
@@ -16448,7 +16448,7 @@
           <p:cNvPr id="14" name="矩形 13">
             <a:extLst>
               <a:ext uri="{FF2B5EF4-FFF2-40B4-BE49-F238E27FC236}">
-                <a16:creationId xmlns:a16="http://schemas.microsoft.com/office/drawing/2014/main" id="{B1FC3B0E-E8BB-460B-8DCF-27119C08E42D}"/>
+                <ns2:creationId id="{B1FC3B0E-E8BB-460B-8DCF-27119C08E42D}"/>
               </a:ext>
             </a:extLst>
           </p:cNvPr>
@@ -16481,7 +16481,7 @@
           <p:cNvPr id="15" name="矩形 14">
             <a:extLst>
               <a:ext uri="{FF2B5EF4-FFF2-40B4-BE49-F238E27FC236}">
-                <a16:creationId xmlns:a16="http://schemas.microsoft.com/office/drawing/2014/main" id="{F8700F49-BD21-4BB3-B35F-FCC0D374C4B0}"/>
+                <ns2:creationId id="{F8700F49-BD21-4BB3-B35F-FCC0D374C4B0}"/>
               </a:ext>
             </a:extLst>
           </p:cNvPr>
@@ -16526,7 +16526,7 @@
           <p:cNvPr id="16" name="矩形 15">
             <a:extLst>
               <a:ext uri="{FF2B5EF4-FFF2-40B4-BE49-F238E27FC236}">
-                <a16:creationId xmlns:a16="http://schemas.microsoft.com/office/drawing/2014/main" id="{08E75A85-28C2-4923-AC79-B291AE91DC45}"/>
+                <ns2:creationId id="{08E75A85-28C2-4923-AC79-B291AE91DC45}"/>
               </a:ext>
             </a:extLst>
           </p:cNvPr>
@@ -16571,7 +16571,7 @@
           <p:cNvPr id="17" name="矩形 16">
             <a:extLst>
               <a:ext uri="{FF2B5EF4-FFF2-40B4-BE49-F238E27FC236}">
-                <a16:creationId xmlns:a16="http://schemas.microsoft.com/office/drawing/2014/main" id="{DE48FA85-19AB-4D3E-A5DC-7C4D347BC355}"/>
+                <ns2:creationId id="{DE48FA85-19AB-4D3E-A5DC-7C4D347BC355}"/>
               </a:ext>
             </a:extLst>
           </p:cNvPr>
@@ -16606,7 +16606,7 @@
                   <a:srgbClr val="526274"/>
                 </a:solidFill>
               </a:rPr>
-              <a:t>主动学习正常时序模式</a:t>
+              <a:t>学习正常运行模式，识别时序偏离</a:t>
             </a:r>
           </a:p>
         </p:txBody>
@@ -16616,7 +16616,7 @@
           <p:cNvPr id="18" name="矩形 17">
             <a:extLst>
               <a:ext uri="{FF2B5EF4-FFF2-40B4-BE49-F238E27FC236}">
-                <a16:creationId xmlns:a16="http://schemas.microsoft.com/office/drawing/2014/main" id="{157A35D6-0B60-42CF-8AE7-72EDC020FB79}"/>
+                <ns2:creationId id="{157A35D6-0B60-42CF-8AE7-72EDC020FB79}"/>
               </a:ext>
             </a:extLst>
           </p:cNvPr>
@@ -16649,7 +16649,7 @@
           <p:cNvPr id="19" name="矩形 18">
             <a:extLst>
               <a:ext uri="{FF2B5EF4-FFF2-40B4-BE49-F238E27FC236}">
-                <a16:creationId xmlns:a16="http://schemas.microsoft.com/office/drawing/2014/main" id="{F9C625CD-1960-4575-94F1-26A0D3DCADCE}"/>
+                <ns2:creationId id="{F9C625CD-1960-4575-94F1-26A0D3DCADCE}"/>
               </a:ext>
             </a:extLst>
           </p:cNvPr>
@@ -16694,7 +16694,7 @@
           <p:cNvPr id="20" name="矩形 19">
             <a:extLst>
               <a:ext uri="{FF2B5EF4-FFF2-40B4-BE49-F238E27FC236}">
-                <a16:creationId xmlns:a16="http://schemas.microsoft.com/office/drawing/2014/main" id="{6AA7F404-D431-4832-82D2-651C37DA077C}"/>
+                <ns2:creationId id="{6AA7F404-D431-4832-82D2-651C37DA077C}"/>
               </a:ext>
             </a:extLst>
           </p:cNvPr>
@@ -16739,7 +16739,7 @@
           <p:cNvPr id="21" name="矩形 20">
             <a:extLst>
               <a:ext uri="{FF2B5EF4-FFF2-40B4-BE49-F238E27FC236}">
-                <a16:creationId xmlns:a16="http://schemas.microsoft.com/office/drawing/2014/main" id="{B44C3C81-0154-4F0A-A1CC-4C8572563C47}"/>
+                <ns2:creationId id="{B44C3C81-0154-4F0A-A1CC-4C8572563C47}"/>
               </a:ext>
             </a:extLst>
           </p:cNvPr>
@@ -16774,7 +16774,7 @@
                   <a:srgbClr val="526274"/>
                 </a:solidFill>
               </a:rPr>
-              <a:t>从识别结果转为可处理任务</a:t>
+              <a:t>把识别结果转化为可处理任务</a:t>
             </a:r>
           </a:p>
         </p:txBody>
@@ -16782,7 +16782,7 @@
     </p:spTree>
     <p:extLst>
       <p:ext uri="{BB962C8B-B14F-4D97-AF65-F5344CB8AC3E}">
-        <p14:creationId xmlns:p14="http://schemas.microsoft.com/office/powerpoint/2010/main" val="1671811243"/>
+        <ns3:creationId val="1671811243"/>
       </p:ext>
     </p:extLst>
   </p:cSld>
@@ -16793,7 +16793,7 @@
 </file>
 
 <file path=ppt/slides/slide4.xml><?xml version="1.0" encoding="utf-8"?>
-<p:sld xmlns:a="http://schemas.openxmlformats.org/drawingml/2006/main" xmlns:r="http://schemas.openxmlformats.org/officeDocument/2006/relationships" xmlns:p="http://schemas.openxmlformats.org/presentationml/2006/main">
+<p:sld xmlns:a="http://schemas.openxmlformats.org/drawingml/2006/main" xmlns:ns2="http://schemas.microsoft.com/office/drawing/2014/main" xmlns:ns3="http://schemas.microsoft.com/office/powerpoint/2010/main" xmlns:p="http://schemas.openxmlformats.org/presentationml/2006/main">
   <p:cSld>
     <p:spTree>
       <p:nvGrpSpPr>
@@ -16814,7 +16814,7 @@
           <p:cNvPr id="32" name="slide-bg">
             <a:extLst>
               <a:ext uri="{FF2B5EF4-FFF2-40B4-BE49-F238E27FC236}">
-                <a16:creationId xmlns:a16="http://schemas.microsoft.com/office/drawing/2014/main" id="{2E91AB8F-1B1B-4097-9F30-EE659660D42C}"/>
+                <ns2:creationId id="{2E91AB8F-1B1B-4097-9F30-EE659660D42C}"/>
               </a:ext>
             </a:extLst>
           </p:cNvPr>
@@ -16841,7 +16841,7 @@
           <p:cNvPr id="2" name="title">
             <a:extLst>
               <a:ext uri="{FF2B5EF4-FFF2-40B4-BE49-F238E27FC236}">
-                <a16:creationId xmlns:a16="http://schemas.microsoft.com/office/drawing/2014/main" id="{1BE35A86-EB8E-4DB2-AB96-5BCD3B51B968}"/>
+                <ns2:creationId id="{1BE35A86-EB8E-4DB2-AB96-5BCD3B51B968}"/>
               </a:ext>
             </a:extLst>
           </p:cNvPr>
@@ -16886,7 +16886,7 @@
           <p:cNvPr id="3" name="subtitle">
             <a:extLst>
               <a:ext uri="{FF2B5EF4-FFF2-40B4-BE49-F238E27FC236}">
-                <a16:creationId xmlns:a16="http://schemas.microsoft.com/office/drawing/2014/main" id="{0705553A-9797-4D13-BD6F-E749B6A0F4ED}"/>
+                <ns2:creationId id="{0705553A-9797-4D13-BD6F-E749B6A0F4ED}"/>
               </a:ext>
             </a:extLst>
           </p:cNvPr>
@@ -16921,7 +16921,7 @@
                   <a:srgbClr val="526274"/>
                 </a:solidFill>
               </a:rPr>
-              <a:t>把燃气表原始上报数据转化为可解释、可处理、可持续优化的异常检测结果</a:t>
+              <a:t>把原始上报数据转化为可解释、可处理、可持续优化的异常检测结果</a:t>
             </a:r>
           </a:p>
         </p:txBody>
@@ -16931,7 +16931,7 @@
           <p:cNvPr id="4" name="title-rule">
             <a:extLst>
               <a:ext uri="{FF2B5EF4-FFF2-40B4-BE49-F238E27FC236}">
-                <a16:creationId xmlns:a16="http://schemas.microsoft.com/office/drawing/2014/main" id="{3927B9B6-D196-4015-B4C9-3A949CF9C7D1}"/>
+                <ns2:creationId id="{3927B9B6-D196-4015-B4C9-3A949CF9C7D1}"/>
               </a:ext>
             </a:extLst>
           </p:cNvPr>
@@ -16964,7 +16964,7 @@
           <p:cNvPr id="5" name="矩形: 圆角 4">
             <a:extLst>
               <a:ext uri="{FF2B5EF4-FFF2-40B4-BE49-F238E27FC236}">
-                <a16:creationId xmlns:a16="http://schemas.microsoft.com/office/drawing/2014/main" id="{37DE1912-6531-4C4E-A432-D845EC0EADFC}"/>
+                <ns2:creationId id="{37DE1912-6531-4C4E-A432-D845EC0EADFC}"/>
               </a:ext>
             </a:extLst>
           </p:cNvPr>
@@ -16993,7 +16993,7 @@
           <p:cNvPr id="6" name="矩形 5">
             <a:extLst>
               <a:ext uri="{FF2B5EF4-FFF2-40B4-BE49-F238E27FC236}">
-                <a16:creationId xmlns:a16="http://schemas.microsoft.com/office/drawing/2014/main" id="{495B06F9-3087-4834-89F5-5589FE8C5B81}"/>
+                <ns2:creationId id="{495B06F9-3087-4834-89F5-5589FE8C5B81}"/>
               </a:ext>
             </a:extLst>
           </p:cNvPr>
@@ -17038,7 +17038,7 @@
           <p:cNvPr id="7" name="矩形 6">
             <a:extLst>
               <a:ext uri="{FF2B5EF4-FFF2-40B4-BE49-F238E27FC236}">
-                <a16:creationId xmlns:a16="http://schemas.microsoft.com/office/drawing/2014/main" id="{23D6D962-CE1A-4501-B6A9-2DB0E501051A}"/>
+                <ns2:creationId id="{23D6D962-CE1A-4501-B6A9-2DB0E501051A}"/>
               </a:ext>
             </a:extLst>
           </p:cNvPr>
@@ -17083,7 +17083,7 @@
           <p:cNvPr id="8" name="矩形: 圆角 7">
             <a:extLst>
               <a:ext uri="{FF2B5EF4-FFF2-40B4-BE49-F238E27FC236}">
-                <a16:creationId xmlns:a16="http://schemas.microsoft.com/office/drawing/2014/main" id="{EBECB1AE-71FC-4FD1-AA09-88566E912163}"/>
+                <ns2:creationId id="{EBECB1AE-71FC-4FD1-AA09-88566E912163}"/>
               </a:ext>
             </a:extLst>
           </p:cNvPr>
@@ -17112,7 +17112,7 @@
           <p:cNvPr id="9" name="矩形 8">
             <a:extLst>
               <a:ext uri="{FF2B5EF4-FFF2-40B4-BE49-F238E27FC236}">
-                <a16:creationId xmlns:a16="http://schemas.microsoft.com/office/drawing/2014/main" id="{D8A57F8E-C5AA-44D8-B352-DD88C173480A}"/>
+                <ns2:creationId id="{D8A57F8E-C5AA-44D8-B352-DD88C173480A}"/>
               </a:ext>
             </a:extLst>
           </p:cNvPr>
@@ -17157,7 +17157,7 @@
           <p:cNvPr id="10" name="矩形 9">
             <a:extLst>
               <a:ext uri="{FF2B5EF4-FFF2-40B4-BE49-F238E27FC236}">
-                <a16:creationId xmlns:a16="http://schemas.microsoft.com/office/drawing/2014/main" id="{3E38BE32-92D8-44DE-B296-211686F214F4}"/>
+                <ns2:creationId id="{3E38BE32-92D8-44DE-B296-211686F214F4}"/>
               </a:ext>
             </a:extLst>
           </p:cNvPr>
@@ -17202,7 +17202,7 @@
           <p:cNvPr id="11" name="矩形: 圆角 10">
             <a:extLst>
               <a:ext uri="{FF2B5EF4-FFF2-40B4-BE49-F238E27FC236}">
-                <a16:creationId xmlns:a16="http://schemas.microsoft.com/office/drawing/2014/main" id="{4FE48FB3-7D67-4499-9BBF-514D629D24CF}"/>
+                <ns2:creationId id="{4FE48FB3-7D67-4499-9BBF-514D629D24CF}"/>
               </a:ext>
             </a:extLst>
           </p:cNvPr>
@@ -17231,7 +17231,7 @@
           <p:cNvPr id="12" name="矩形 11">
             <a:extLst>
               <a:ext uri="{FF2B5EF4-FFF2-40B4-BE49-F238E27FC236}">
-                <a16:creationId xmlns:a16="http://schemas.microsoft.com/office/drawing/2014/main" id="{2C7B819F-7F73-4245-A6DA-68C21536EAD2}"/>
+                <ns2:creationId id="{2C7B819F-7F73-4245-A6DA-68C21536EAD2}"/>
               </a:ext>
             </a:extLst>
           </p:cNvPr>
@@ -17276,7 +17276,7 @@
           <p:cNvPr id="13" name="矩形 12">
             <a:extLst>
               <a:ext uri="{FF2B5EF4-FFF2-40B4-BE49-F238E27FC236}">
-                <a16:creationId xmlns:a16="http://schemas.microsoft.com/office/drawing/2014/main" id="{62B513CE-956B-40DB-B286-025DFE5C1731}"/>
+                <ns2:creationId id="{62B513CE-956B-40DB-B286-025DFE5C1731}"/>
               </a:ext>
             </a:extLst>
           </p:cNvPr>
@@ -17321,7 +17321,7 @@
           <p:cNvPr id="14" name="矩形: 圆角 13">
             <a:extLst>
               <a:ext uri="{FF2B5EF4-FFF2-40B4-BE49-F238E27FC236}">
-                <a16:creationId xmlns:a16="http://schemas.microsoft.com/office/drawing/2014/main" id="{12C8048A-BA6B-47BD-8CDE-95C3F9B5BE7E}"/>
+                <ns2:creationId id="{12C8048A-BA6B-47BD-8CDE-95C3F9B5BE7E}"/>
               </a:ext>
             </a:extLst>
           </p:cNvPr>
@@ -17350,7 +17350,7 @@
           <p:cNvPr id="15" name="矩形 14">
             <a:extLst>
               <a:ext uri="{FF2B5EF4-FFF2-40B4-BE49-F238E27FC236}">
-                <a16:creationId xmlns:a16="http://schemas.microsoft.com/office/drawing/2014/main" id="{6AD2E13E-78D2-4D47-8F3E-0D51268EE9EC}"/>
+                <ns2:creationId id="{6AD2E13E-78D2-4D47-8F3E-0D51268EE9EC}"/>
               </a:ext>
             </a:extLst>
           </p:cNvPr>
@@ -17395,7 +17395,7 @@
           <p:cNvPr id="16" name="矩形 15">
             <a:extLst>
               <a:ext uri="{FF2B5EF4-FFF2-40B4-BE49-F238E27FC236}">
-                <a16:creationId xmlns:a16="http://schemas.microsoft.com/office/drawing/2014/main" id="{AB95660A-F895-4163-BD95-22F206A6AC52}"/>
+                <ns2:creationId id="{AB95660A-F895-4163-BD95-22F206A6AC52}"/>
               </a:ext>
             </a:extLst>
           </p:cNvPr>
@@ -17440,7 +17440,7 @@
           <p:cNvPr id="17" name="矩形: 圆角 16">
             <a:extLst>
               <a:ext uri="{FF2B5EF4-FFF2-40B4-BE49-F238E27FC236}">
-                <a16:creationId xmlns:a16="http://schemas.microsoft.com/office/drawing/2014/main" id="{78C4078D-FEC8-47D2-A182-3F9847F65247}"/>
+                <ns2:creationId id="{78C4078D-FEC8-47D2-A182-3F9847F65247}"/>
               </a:ext>
             </a:extLst>
           </p:cNvPr>
@@ -17469,7 +17469,7 @@
           <p:cNvPr id="18" name="矩形 17">
             <a:extLst>
               <a:ext uri="{FF2B5EF4-FFF2-40B4-BE49-F238E27FC236}">
-                <a16:creationId xmlns:a16="http://schemas.microsoft.com/office/drawing/2014/main" id="{97785137-C464-4370-8FC3-AB77F6D31124}"/>
+                <ns2:creationId id="{97785137-C464-4370-8FC3-AB77F6D31124}"/>
               </a:ext>
             </a:extLst>
           </p:cNvPr>
@@ -17514,7 +17514,7 @@
           <p:cNvPr id="19" name="矩形 18">
             <a:extLst>
               <a:ext uri="{FF2B5EF4-FFF2-40B4-BE49-F238E27FC236}">
-                <a16:creationId xmlns:a16="http://schemas.microsoft.com/office/drawing/2014/main" id="{8CB180F2-F051-4970-91E4-888F88FDE3E5}"/>
+                <ns2:creationId id="{8CB180F2-F051-4970-91E4-888F88FDE3E5}"/>
               </a:ext>
             </a:extLst>
           </p:cNvPr>
@@ -17559,7 +17559,7 @@
           <p:cNvPr id="20" name="矩形: 圆角 19">
             <a:extLst>
               <a:ext uri="{FF2B5EF4-FFF2-40B4-BE49-F238E27FC236}">
-                <a16:creationId xmlns:a16="http://schemas.microsoft.com/office/drawing/2014/main" id="{1F143830-23A8-440E-AEA1-24A0B13BCFE1}"/>
+                <ns2:creationId id="{1F143830-23A8-440E-AEA1-24A0B13BCFE1}"/>
               </a:ext>
             </a:extLst>
           </p:cNvPr>
@@ -17588,7 +17588,7 @@
           <p:cNvPr id="21" name="矩形 20">
             <a:extLst>
               <a:ext uri="{FF2B5EF4-FFF2-40B4-BE49-F238E27FC236}">
-                <a16:creationId xmlns:a16="http://schemas.microsoft.com/office/drawing/2014/main" id="{CFC99A6F-24F0-4BFD-A067-57E96360F865}"/>
+                <ns2:creationId id="{CFC99A6F-24F0-4BFD-A067-57E96360F865}"/>
               </a:ext>
             </a:extLst>
           </p:cNvPr>
@@ -17633,7 +17633,7 @@
           <p:cNvPr id="22" name="矩形 21">
             <a:extLst>
               <a:ext uri="{FF2B5EF4-FFF2-40B4-BE49-F238E27FC236}">
-                <a16:creationId xmlns:a16="http://schemas.microsoft.com/office/drawing/2014/main" id="{F87FD1FA-EE06-43EE-B752-C70A9CD2AF64}"/>
+                <ns2:creationId id="{F87FD1FA-EE06-43EE-B752-C70A9CD2AF64}"/>
               </a:ext>
             </a:extLst>
           </p:cNvPr>
@@ -17678,7 +17678,7 @@
           <p:cNvPr id="23" name="矩形: 圆角 22">
             <a:extLst>
               <a:ext uri="{FF2B5EF4-FFF2-40B4-BE49-F238E27FC236}">
-                <a16:creationId xmlns:a16="http://schemas.microsoft.com/office/drawing/2014/main" id="{73D9F9ED-CAF6-4301-AC15-DAC32733A0FE}"/>
+                <ns2:creationId id="{73D9F9ED-CAF6-4301-AC15-DAC32733A0FE}"/>
               </a:ext>
             </a:extLst>
           </p:cNvPr>
@@ -17707,7 +17707,7 @@
           <p:cNvPr id="24" name="矩形 23">
             <a:extLst>
               <a:ext uri="{FF2B5EF4-FFF2-40B4-BE49-F238E27FC236}">
-                <a16:creationId xmlns:a16="http://schemas.microsoft.com/office/drawing/2014/main" id="{264A8D28-1503-46D6-B6CB-86CDB59DF15F}"/>
+                <ns2:creationId id="{264A8D28-1503-46D6-B6CB-86CDB59DF15F}"/>
               </a:ext>
             </a:extLst>
           </p:cNvPr>
@@ -17742,7 +17742,7 @@
                   <a:srgbClr val="1667B7"/>
                 </a:solidFill>
               </a:rPr>
-              <a:t>模型目标</a:t>
+              <a:t>算法目标</a:t>
             </a:r>
           </a:p>
         </p:txBody>
@@ -17752,7 +17752,7 @@
           <p:cNvPr id="25" name="矩形 24">
             <a:extLst>
               <a:ext uri="{FF2B5EF4-FFF2-40B4-BE49-F238E27FC236}">
-                <a16:creationId xmlns:a16="http://schemas.microsoft.com/office/drawing/2014/main" id="{8D85B8AB-17DE-49E5-B2DF-37A08A3BB806}"/>
+                <ns2:creationId id="{8D85B8AB-17DE-49E5-B2DF-37A08A3BB806}"/>
               </a:ext>
             </a:extLst>
           </p:cNvPr>
@@ -17787,7 +17787,7 @@
                   <a:srgbClr val="102033"/>
                 </a:solidFill>
               </a:rPr>
-              <a:t>学习正常燃气表运行规律，利用重构误差发现偏离正常模式的数据窗口。</a:t>
+              <a:t>学习正常燃气表多维时序规律，利用重构误差发现异常窗口。</a:t>
             </a:r>
           </a:p>
         </p:txBody>
@@ -17797,7 +17797,7 @@
           <p:cNvPr id="26" name="矩形: 圆角 25">
             <a:extLst>
               <a:ext uri="{FF2B5EF4-FFF2-40B4-BE49-F238E27FC236}">
-                <a16:creationId xmlns:a16="http://schemas.microsoft.com/office/drawing/2014/main" id="{01CFB23B-2241-4284-97F8-D1B35E91AF49}"/>
+                <ns2:creationId id="{01CFB23B-2241-4284-97F8-D1B35E91AF49}"/>
               </a:ext>
             </a:extLst>
           </p:cNvPr>
@@ -17826,7 +17826,7 @@
           <p:cNvPr id="27" name="矩形 26">
             <a:extLst>
               <a:ext uri="{FF2B5EF4-FFF2-40B4-BE49-F238E27FC236}">
-                <a16:creationId xmlns:a16="http://schemas.microsoft.com/office/drawing/2014/main" id="{7BA6C652-17C6-44AD-A4B3-F32868F28987}"/>
+                <ns2:creationId id="{7BA6C652-17C6-44AD-A4B3-F32868F28987}"/>
               </a:ext>
             </a:extLst>
           </p:cNvPr>
@@ -17871,7 +17871,7 @@
           <p:cNvPr id="28" name="矩形 27">
             <a:extLst>
               <a:ext uri="{FF2B5EF4-FFF2-40B4-BE49-F238E27FC236}">
-                <a16:creationId xmlns:a16="http://schemas.microsoft.com/office/drawing/2014/main" id="{3761A06A-8EB4-4C02-8A42-BA8C964EE9C4}"/>
+                <ns2:creationId id="{3761A06A-8EB4-4C02-8A42-BA8C964EE9C4}"/>
               </a:ext>
             </a:extLst>
           </p:cNvPr>
@@ -17906,7 +17906,7 @@
                   <a:srgbClr val="102033"/>
                 </a:solidFill>
               </a:rPr>
-              <a:t>实现设备接入、实时推理、告警展示、工单处理和模型版本管理。</a:t>
+              <a:t>实现设备接入、实时推理、可视化看板、告警处理和工单流转。</a:t>
             </a:r>
           </a:p>
         </p:txBody>
@@ -17916,7 +17916,7 @@
           <p:cNvPr id="29" name="矩形: 圆角 28">
             <a:extLst>
               <a:ext uri="{FF2B5EF4-FFF2-40B4-BE49-F238E27FC236}">
-                <a16:creationId xmlns:a16="http://schemas.microsoft.com/office/drawing/2014/main" id="{CA39D0DF-9997-41E4-97DE-15241BEC670C}"/>
+                <ns2:creationId id="{CA39D0DF-9997-41E4-97DE-15241BEC670C}"/>
               </a:ext>
             </a:extLst>
           </p:cNvPr>
@@ -17945,7 +17945,7 @@
           <p:cNvPr id="30" name="矩形 29">
             <a:extLst>
               <a:ext uri="{FF2B5EF4-FFF2-40B4-BE49-F238E27FC236}">
-                <a16:creationId xmlns:a16="http://schemas.microsoft.com/office/drawing/2014/main" id="{332356E1-11C6-4D93-8CCB-D31A59C8E098}"/>
+                <ns2:creationId id="{332356E1-11C6-4D93-8CCB-D31A59C8E098}"/>
               </a:ext>
             </a:extLst>
           </p:cNvPr>
@@ -17990,7 +17990,7 @@
           <p:cNvPr id="31" name="矩形 30">
             <a:extLst>
               <a:ext uri="{FF2B5EF4-FFF2-40B4-BE49-F238E27FC236}">
-                <a16:creationId xmlns:a16="http://schemas.microsoft.com/office/drawing/2014/main" id="{E0AEEF6F-5BD6-4925-B32E-0CFCD78CFD19}"/>
+                <ns2:creationId id="{E0AEEF6F-5BD6-4925-B32E-0CFCD78CFD19}"/>
               </a:ext>
             </a:extLst>
           </p:cNvPr>
@@ -18025,7 +18025,7 @@
                   <a:srgbClr val="102033"/>
                 </a:solidFill>
               </a:rPr>
-              <a:t>通过持续训练机制适应数据分布变化，支撑长期稳定运行。</a:t>
+              <a:t>通过模型版本管理和持续训练机制，支撑系统长期运行和后续扩展。</a:t>
             </a:r>
           </a:p>
         </p:txBody>
@@ -18033,7 +18033,7 @@
     </p:spTree>
     <p:extLst>
       <p:ext uri="{BB962C8B-B14F-4D97-AF65-F5344CB8AC3E}">
-        <p14:creationId xmlns:p14="http://schemas.microsoft.com/office/powerpoint/2010/main" val="1403371186"/>
+        <ns3:creationId val="1403371186"/>
       </p:ext>
     </p:extLst>
   </p:cSld>
@@ -18044,7 +18044,7 @@
 </file>
 
 <file path=ppt/slides/slide5.xml><?xml version="1.0" encoding="utf-8"?>
-<p:sld xmlns:a="http://schemas.openxmlformats.org/drawingml/2006/main" xmlns:r="http://schemas.openxmlformats.org/officeDocument/2006/relationships" xmlns:p="http://schemas.openxmlformats.org/presentationml/2006/main">
+<p:sld xmlns:a="http://schemas.openxmlformats.org/drawingml/2006/main" xmlns:ns2="http://schemas.microsoft.com/office/drawing/2014/main" xmlns:ns3="http://schemas.microsoft.com/office/powerpoint/2010/main" xmlns:p="http://schemas.openxmlformats.org/presentationml/2006/main">
   <p:cSld>
     <p:spTree>
       <p:nvGrpSpPr>
@@ -18065,7 +18065,7 @@
           <p:cNvPr id="43" name="slide-bg">
             <a:extLst>
               <a:ext uri="{FF2B5EF4-FFF2-40B4-BE49-F238E27FC236}">
-                <a16:creationId xmlns:a16="http://schemas.microsoft.com/office/drawing/2014/main" id="{A324EFD7-F80E-409C-924F-D4B25F369A59}"/>
+                <ns2:creationId id="{A324EFD7-F80E-409C-924F-D4B25F369A59}"/>
               </a:ext>
             </a:extLst>
           </p:cNvPr>
@@ -18092,7 +18092,7 @@
           <p:cNvPr id="2" name="title">
             <a:extLst>
               <a:ext uri="{FF2B5EF4-FFF2-40B4-BE49-F238E27FC236}">
-                <a16:creationId xmlns:a16="http://schemas.microsoft.com/office/drawing/2014/main" id="{0997E2A6-ABEC-4E0F-BAD0-8A23A0BCC3BF}"/>
+                <ns2:creationId id="{0997E2A6-ABEC-4E0F-BAD0-8A23A0BCC3BF}"/>
               </a:ext>
             </a:extLst>
           </p:cNvPr>
@@ -18127,7 +18127,7 @@
                   <a:srgbClr val="102033"/>
                 </a:solidFill>
               </a:rPr>
-              <a:t>系统总体架构</a:t>
+              <a:t>系统总体设计</a:t>
             </a:r>
           </a:p>
         </p:txBody>
@@ -18137,7 +18137,7 @@
           <p:cNvPr id="3" name="subtitle">
             <a:extLst>
               <a:ext uri="{FF2B5EF4-FFF2-40B4-BE49-F238E27FC236}">
-                <a16:creationId xmlns:a16="http://schemas.microsoft.com/office/drawing/2014/main" id="{09D59EF4-454E-4E3F-B87B-03645D85860B}"/>
+                <ns2:creationId id="{09D59EF4-454E-4E3F-B87B-03645D85860B}"/>
               </a:ext>
             </a:extLst>
           </p:cNvPr>
@@ -18172,7 +18172,7 @@
                   <a:srgbClr val="526274"/>
                 </a:solidFill>
               </a:rPr>
-              <a:t>分层架构支撑设备接入、深度学习分析和运维业务闭环</a:t>
+              <a:t>采用分层架构组织设备接入、算法分析和业务处理</a:t>
             </a:r>
           </a:p>
         </p:txBody>
@@ -18182,7 +18182,7 @@
           <p:cNvPr id="4" name="title-rule">
             <a:extLst>
               <a:ext uri="{FF2B5EF4-FFF2-40B4-BE49-F238E27FC236}">
-                <a16:creationId xmlns:a16="http://schemas.microsoft.com/office/drawing/2014/main" id="{499F9051-924E-40F1-802D-DF5CF861CE45}"/>
+                <ns2:creationId id="{499F9051-924E-40F1-802D-DF5CF861CE45}"/>
               </a:ext>
             </a:extLst>
           </p:cNvPr>
@@ -18215,7 +18215,7 @@
           <p:cNvPr id="5" name="矩形 4">
             <a:extLst>
               <a:ext uri="{FF2B5EF4-FFF2-40B4-BE49-F238E27FC236}">
-                <a16:creationId xmlns:a16="http://schemas.microsoft.com/office/drawing/2014/main" id="{BE2BB9C5-A404-4700-9AE7-7568B6DB093C}"/>
+                <ns2:creationId id="{BE2BB9C5-A404-4700-9AE7-7568B6DB093C}"/>
               </a:ext>
             </a:extLst>
           </p:cNvPr>
@@ -18242,7 +18242,7 @@
           <p:cNvPr id="6" name="矩形 5">
             <a:extLst>
               <a:ext uri="{FF2B5EF4-FFF2-40B4-BE49-F238E27FC236}">
-                <a16:creationId xmlns:a16="http://schemas.microsoft.com/office/drawing/2014/main" id="{D9C38980-686C-47FE-ABFF-E9752B9F8032}"/>
+                <ns2:creationId id="{D9C38980-686C-47FE-ABFF-E9752B9F8032}"/>
               </a:ext>
             </a:extLst>
           </p:cNvPr>
@@ -18287,7 +18287,7 @@
           <p:cNvPr id="7" name="矩形 6">
             <a:extLst>
               <a:ext uri="{FF2B5EF4-FFF2-40B4-BE49-F238E27FC236}">
-                <a16:creationId xmlns:a16="http://schemas.microsoft.com/office/drawing/2014/main" id="{877DED40-4904-4241-844E-3C03295A5C86}"/>
+                <ns2:creationId id="{877DED40-4904-4241-844E-3C03295A5C86}"/>
               </a:ext>
             </a:extLst>
           </p:cNvPr>
@@ -18314,7 +18314,7 @@
           <p:cNvPr id="8" name="矩形 7">
             <a:extLst>
               <a:ext uri="{FF2B5EF4-FFF2-40B4-BE49-F238E27FC236}">
-                <a16:creationId xmlns:a16="http://schemas.microsoft.com/office/drawing/2014/main" id="{44170F93-3DC8-48E4-9D6C-C7B2F5B4EE9A}"/>
+                <ns2:creationId id="{44170F93-3DC8-48E4-9D6C-C7B2F5B4EE9A}"/>
               </a:ext>
             </a:extLst>
           </p:cNvPr>
@@ -18349,7 +18349,7 @@
                   <a:srgbClr val="FFFFFF"/>
                 </a:solidFill>
               </a:rPr>
-              <a:t>核心功能</a:t>
+              <a:t>核心职责</a:t>
             </a:r>
           </a:p>
         </p:txBody>
@@ -18359,7 +18359,7 @@
           <p:cNvPr id="9" name="矩形 8">
             <a:extLst>
               <a:ext uri="{FF2B5EF4-FFF2-40B4-BE49-F238E27FC236}">
-                <a16:creationId xmlns:a16="http://schemas.microsoft.com/office/drawing/2014/main" id="{FC7C5759-34A0-4554-8119-397AC8213EBE}"/>
+                <ns2:creationId id="{FC7C5759-34A0-4554-8119-397AC8213EBE}"/>
               </a:ext>
             </a:extLst>
           </p:cNvPr>
@@ -18386,7 +18386,7 @@
           <p:cNvPr id="10" name="矩形 9">
             <a:extLst>
               <a:ext uri="{FF2B5EF4-FFF2-40B4-BE49-F238E27FC236}">
-                <a16:creationId xmlns:a16="http://schemas.microsoft.com/office/drawing/2014/main" id="{DDF9446E-50EF-4154-852E-0318F09A8D8B}"/>
+                <ns2:creationId id="{DDF9446E-50EF-4154-852E-0318F09A8D8B}"/>
               </a:ext>
             </a:extLst>
           </p:cNvPr>
@@ -18431,7 +18431,7 @@
           <p:cNvPr id="11" name="矩形 10">
             <a:extLst>
               <a:ext uri="{FF2B5EF4-FFF2-40B4-BE49-F238E27FC236}">
-                <a16:creationId xmlns:a16="http://schemas.microsoft.com/office/drawing/2014/main" id="{66C8D589-98CD-4088-B84A-0A49BCFFF2F9}"/>
+                <ns2:creationId id="{66C8D589-98CD-4088-B84A-0A49BCFFF2F9}"/>
               </a:ext>
             </a:extLst>
           </p:cNvPr>
@@ -18458,7 +18458,7 @@
           <p:cNvPr id="12" name="矩形 11">
             <a:extLst>
               <a:ext uri="{FF2B5EF4-FFF2-40B4-BE49-F238E27FC236}">
-                <a16:creationId xmlns:a16="http://schemas.microsoft.com/office/drawing/2014/main" id="{AEE7517C-FBBF-47B5-A716-77AABDA19DD0}"/>
+                <ns2:creationId id="{AEE7517C-FBBF-47B5-A716-77AABDA19DD0}"/>
               </a:ext>
             </a:extLst>
           </p:cNvPr>
@@ -18503,7 +18503,7 @@
           <p:cNvPr id="13" name="矩形 12">
             <a:extLst>
               <a:ext uri="{FF2B5EF4-FFF2-40B4-BE49-F238E27FC236}">
-                <a16:creationId xmlns:a16="http://schemas.microsoft.com/office/drawing/2014/main" id="{3F3D4210-D099-4687-9D8B-3276311035B7}"/>
+                <ns2:creationId id="{3F3D4210-D099-4687-9D8B-3276311035B7}"/>
               </a:ext>
             </a:extLst>
           </p:cNvPr>
@@ -18530,7 +18530,7 @@
           <p:cNvPr id="14" name="矩形 13">
             <a:extLst>
               <a:ext uri="{FF2B5EF4-FFF2-40B4-BE49-F238E27FC236}">
-                <a16:creationId xmlns:a16="http://schemas.microsoft.com/office/drawing/2014/main" id="{4F654DAC-3D55-4097-98C6-42019EBE71C8}"/>
+                <ns2:creationId id="{4F654DAC-3D55-4097-98C6-42019EBE71C8}"/>
               </a:ext>
             </a:extLst>
           </p:cNvPr>
@@ -18575,7 +18575,7 @@
           <p:cNvPr id="15" name="矩形 14">
             <a:extLst>
               <a:ext uri="{FF2B5EF4-FFF2-40B4-BE49-F238E27FC236}">
-                <a16:creationId xmlns:a16="http://schemas.microsoft.com/office/drawing/2014/main" id="{BF70D543-9591-4284-ADB0-C08C06A11761}"/>
+                <ns2:creationId id="{BF70D543-9591-4284-ADB0-C08C06A11761}"/>
               </a:ext>
             </a:extLst>
           </p:cNvPr>
@@ -18602,7 +18602,7 @@
           <p:cNvPr id="16" name="矩形 15">
             <a:extLst>
               <a:ext uri="{FF2B5EF4-FFF2-40B4-BE49-F238E27FC236}">
-                <a16:creationId xmlns:a16="http://schemas.microsoft.com/office/drawing/2014/main" id="{AEA922D9-FB07-4412-BC07-6DA60B807AEC}"/>
+                <ns2:creationId id="{AEA922D9-FB07-4412-BC07-6DA60B807AEC}"/>
               </a:ext>
             </a:extLst>
           </p:cNvPr>
@@ -18647,7 +18647,7 @@
           <p:cNvPr id="17" name="矩形 16">
             <a:extLst>
               <a:ext uri="{FF2B5EF4-FFF2-40B4-BE49-F238E27FC236}">
-                <a16:creationId xmlns:a16="http://schemas.microsoft.com/office/drawing/2014/main" id="{3F5BCC8E-A6C6-4EA5-AC82-8A0503E6EFB6}"/>
+                <ns2:creationId id="{3F5BCC8E-A6C6-4EA5-AC82-8A0503E6EFB6}"/>
               </a:ext>
             </a:extLst>
           </p:cNvPr>
@@ -18674,7 +18674,7 @@
           <p:cNvPr id="18" name="矩形 17">
             <a:extLst>
               <a:ext uri="{FF2B5EF4-FFF2-40B4-BE49-F238E27FC236}">
-                <a16:creationId xmlns:a16="http://schemas.microsoft.com/office/drawing/2014/main" id="{9DAF4105-9C8A-40FE-8FE9-F3BAB1132A48}"/>
+                <ns2:creationId id="{9DAF4105-9C8A-40FE-8FE9-F3BAB1132A48}"/>
               </a:ext>
             </a:extLst>
           </p:cNvPr>
@@ -18719,7 +18719,7 @@
           <p:cNvPr id="19" name="矩形 18">
             <a:extLst>
               <a:ext uri="{FF2B5EF4-FFF2-40B4-BE49-F238E27FC236}">
-                <a16:creationId xmlns:a16="http://schemas.microsoft.com/office/drawing/2014/main" id="{87BB0F27-C861-4CF9-97BF-1AE27E78B6CD}"/>
+                <ns2:creationId id="{87BB0F27-C861-4CF9-97BF-1AE27E78B6CD}"/>
               </a:ext>
             </a:extLst>
           </p:cNvPr>
@@ -18746,7 +18746,7 @@
           <p:cNvPr id="20" name="矩形 19">
             <a:extLst>
               <a:ext uri="{FF2B5EF4-FFF2-40B4-BE49-F238E27FC236}">
-                <a16:creationId xmlns:a16="http://schemas.microsoft.com/office/drawing/2014/main" id="{66CE1F25-F988-4BC0-9A87-EFF66D0BDB86}"/>
+                <ns2:creationId id="{66CE1F25-F988-4BC0-9A87-EFF66D0BDB86}"/>
               </a:ext>
             </a:extLst>
           </p:cNvPr>
@@ -18781,7 +18781,7 @@
                   <a:srgbClr val="526274"/>
                 </a:solidFill>
               </a:rPr>
-              <a:t>设备数据上传</a:t>
+              <a:t>完成设备数据上传</a:t>
             </a:r>
           </a:p>
         </p:txBody>
@@ -18791,7 +18791,7 @@
           <p:cNvPr id="21" name="矩形 20">
             <a:extLst>
               <a:ext uri="{FF2B5EF4-FFF2-40B4-BE49-F238E27FC236}">
-                <a16:creationId xmlns:a16="http://schemas.microsoft.com/office/drawing/2014/main" id="{2FA2C237-5A98-434E-A21C-A304ECD07411}"/>
+                <ns2:creationId id="{2FA2C237-5A98-434E-A21C-A304ECD07411}"/>
               </a:ext>
             </a:extLst>
           </p:cNvPr>
@@ -18818,7 +18818,7 @@
           <p:cNvPr id="22" name="矩形 21">
             <a:extLst>
               <a:ext uri="{FF2B5EF4-FFF2-40B4-BE49-F238E27FC236}">
-                <a16:creationId xmlns:a16="http://schemas.microsoft.com/office/drawing/2014/main" id="{E2E4EC9D-BB3F-49ED-8AEE-4DE5B3FEEA16}"/>
+                <ns2:creationId id="{E2E4EC9D-BB3F-49ED-8AEE-4DE5B3FEEA16}"/>
               </a:ext>
             </a:extLst>
           </p:cNvPr>
@@ -18863,7 +18863,7 @@
           <p:cNvPr id="23" name="矩形 22">
             <a:extLst>
               <a:ext uri="{FF2B5EF4-FFF2-40B4-BE49-F238E27FC236}">
-                <a16:creationId xmlns:a16="http://schemas.microsoft.com/office/drawing/2014/main" id="{19DCB113-EC46-41A0-A1C3-2A946BF22C34}"/>
+                <ns2:creationId id="{19DCB113-EC46-41A0-A1C3-2A946BF22C34}"/>
               </a:ext>
             </a:extLst>
           </p:cNvPr>
@@ -18890,7 +18890,7 @@
           <p:cNvPr id="24" name="矩形 23">
             <a:extLst>
               <a:ext uri="{FF2B5EF4-FFF2-40B4-BE49-F238E27FC236}">
-                <a16:creationId xmlns:a16="http://schemas.microsoft.com/office/drawing/2014/main" id="{16EF2F13-5344-4D3E-8212-D4415826EC4D}"/>
+                <ns2:creationId id="{16EF2F13-5344-4D3E-8212-D4415826EC4D}"/>
               </a:ext>
             </a:extLst>
           </p:cNvPr>
@@ -18935,7 +18935,7 @@
           <p:cNvPr id="25" name="矩形 24">
             <a:extLst>
               <a:ext uri="{FF2B5EF4-FFF2-40B4-BE49-F238E27FC236}">
-                <a16:creationId xmlns:a16="http://schemas.microsoft.com/office/drawing/2014/main" id="{091158EB-B34E-4225-BCEE-22B13EC1548F}"/>
+                <ns2:creationId id="{091158EB-B34E-4225-BCEE-22B13EC1548F}"/>
               </a:ext>
             </a:extLst>
           </p:cNvPr>
@@ -18962,7 +18962,7 @@
           <p:cNvPr id="26" name="矩形 25">
             <a:extLst>
               <a:ext uri="{FF2B5EF4-FFF2-40B4-BE49-F238E27FC236}">
-                <a16:creationId xmlns:a16="http://schemas.microsoft.com/office/drawing/2014/main" id="{B212B317-06B6-4B07-BEDB-3DE615835AC8}"/>
+                <ns2:creationId id="{B212B317-06B6-4B07-BEDB-3DE615835AC8}"/>
               </a:ext>
             </a:extLst>
           </p:cNvPr>
@@ -18997,7 +18997,7 @@
                   <a:srgbClr val="526274"/>
                 </a:solidFill>
               </a:rPr>
-              <a:t>深度学习异常检测</a:t>
+              <a:t>执行异常检测</a:t>
             </a:r>
           </a:p>
         </p:txBody>
@@ -19007,7 +19007,7 @@
           <p:cNvPr id="27" name="矩形 26">
             <a:extLst>
               <a:ext uri="{FF2B5EF4-FFF2-40B4-BE49-F238E27FC236}">
-                <a16:creationId xmlns:a16="http://schemas.microsoft.com/office/drawing/2014/main" id="{64F15BA7-AC5F-4C08-9AB6-7E22CE3906DA}"/>
+                <ns2:creationId id="{64F15BA7-AC5F-4C08-9AB6-7E22CE3906DA}"/>
               </a:ext>
             </a:extLst>
           </p:cNvPr>
@@ -19034,7 +19034,7 @@
           <p:cNvPr id="28" name="矩形 27">
             <a:extLst>
               <a:ext uri="{FF2B5EF4-FFF2-40B4-BE49-F238E27FC236}">
-                <a16:creationId xmlns:a16="http://schemas.microsoft.com/office/drawing/2014/main" id="{EFF89C25-906F-4AC9-B0D6-30B965A278B6}"/>
+                <ns2:creationId id="{EFF89C25-906F-4AC9-B0D6-30B965A278B6}"/>
               </a:ext>
             </a:extLst>
           </p:cNvPr>
@@ -19079,7 +19079,7 @@
           <p:cNvPr id="29" name="矩形 28">
             <a:extLst>
               <a:ext uri="{FF2B5EF4-FFF2-40B4-BE49-F238E27FC236}">
-                <a16:creationId xmlns:a16="http://schemas.microsoft.com/office/drawing/2014/main" id="{7219D8D2-4508-4C66-B89A-8EE9DEC561AA}"/>
+                <ns2:creationId id="{7219D8D2-4508-4C66-B89A-8EE9DEC561AA}"/>
               </a:ext>
             </a:extLst>
           </p:cNvPr>
@@ -19106,7 +19106,7 @@
           <p:cNvPr id="30" name="矩形 29">
             <a:extLst>
               <a:ext uri="{FF2B5EF4-FFF2-40B4-BE49-F238E27FC236}">
-                <a16:creationId xmlns:a16="http://schemas.microsoft.com/office/drawing/2014/main" id="{138F9EC8-5348-4706-B51B-38B317639F09}"/>
+                <ns2:creationId id="{138F9EC8-5348-4706-B51B-38B317639F09}"/>
               </a:ext>
             </a:extLst>
           </p:cNvPr>
@@ -19151,7 +19151,7 @@
           <p:cNvPr id="31" name="矩形 30">
             <a:extLst>
               <a:ext uri="{FF2B5EF4-FFF2-40B4-BE49-F238E27FC236}">
-                <a16:creationId xmlns:a16="http://schemas.microsoft.com/office/drawing/2014/main" id="{617C5D9A-1981-49BD-A375-58117D536DF3}"/>
+                <ns2:creationId id="{617C5D9A-1981-49BD-A375-58117D536DF3}"/>
               </a:ext>
             </a:extLst>
           </p:cNvPr>
@@ -19178,7 +19178,7 @@
           <p:cNvPr id="32" name="矩形 31">
             <a:extLst>
               <a:ext uri="{FF2B5EF4-FFF2-40B4-BE49-F238E27FC236}">
-                <a16:creationId xmlns:a16="http://schemas.microsoft.com/office/drawing/2014/main" id="{63E6820C-C004-46FE-86F3-290E603D02FF}"/>
+                <ns2:creationId id="{63E6820C-C004-46FE-86F3-290E603D02FF}"/>
               </a:ext>
             </a:extLst>
           </p:cNvPr>
@@ -19213,7 +19213,7 @@
                   <a:srgbClr val="526274"/>
                 </a:solidFill>
               </a:rPr>
-              <a:t>异常处理</a:t>
+              <a:t>处理异常结果</a:t>
             </a:r>
           </a:p>
         </p:txBody>
@@ -19223,7 +19223,7 @@
           <p:cNvPr id="33" name="矩形 32">
             <a:extLst>
               <a:ext uri="{FF2B5EF4-FFF2-40B4-BE49-F238E27FC236}">
-                <a16:creationId xmlns:a16="http://schemas.microsoft.com/office/drawing/2014/main" id="{8AD4D611-5DED-4F24-B80C-5BCFEE1B09C9}"/>
+                <ns2:creationId id="{8AD4D611-5DED-4F24-B80C-5BCFEE1B09C9}"/>
               </a:ext>
             </a:extLst>
           </p:cNvPr>
@@ -19250,7 +19250,7 @@
           <p:cNvPr id="34" name="矩形 33">
             <a:extLst>
               <a:ext uri="{FF2B5EF4-FFF2-40B4-BE49-F238E27FC236}">
-                <a16:creationId xmlns:a16="http://schemas.microsoft.com/office/drawing/2014/main" id="{F1FB739A-3A23-4BEA-B88F-21E12FAE674B}"/>
+                <ns2:creationId id="{F1FB739A-3A23-4BEA-B88F-21E12FAE674B}"/>
               </a:ext>
             </a:extLst>
           </p:cNvPr>
@@ -19295,7 +19295,7 @@
           <p:cNvPr id="35" name="矩形 34">
             <a:extLst>
               <a:ext uri="{FF2B5EF4-FFF2-40B4-BE49-F238E27FC236}">
-                <a16:creationId xmlns:a16="http://schemas.microsoft.com/office/drawing/2014/main" id="{A89133F4-51BD-49CE-8F10-A66A4B54D8C6}"/>
+                <ns2:creationId id="{A89133F4-51BD-49CE-8F10-A66A4B54D8C6}"/>
               </a:ext>
             </a:extLst>
           </p:cNvPr>
@@ -19322,7 +19322,7 @@
           <p:cNvPr id="36" name="矩形 35">
             <a:extLst>
               <a:ext uri="{FF2B5EF4-FFF2-40B4-BE49-F238E27FC236}">
-                <a16:creationId xmlns:a16="http://schemas.microsoft.com/office/drawing/2014/main" id="{FFD978EE-76B8-4F90-9D9F-0C8672CECBB0}"/>
+                <ns2:creationId id="{FFD978EE-76B8-4F90-9D9F-0C8672CECBB0}"/>
               </a:ext>
             </a:extLst>
           </p:cNvPr>
@@ -19367,7 +19367,7 @@
           <p:cNvPr id="37" name="矩形 36">
             <a:extLst>
               <a:ext uri="{FF2B5EF4-FFF2-40B4-BE49-F238E27FC236}">
-                <a16:creationId xmlns:a16="http://schemas.microsoft.com/office/drawing/2014/main" id="{830F810F-2C86-4827-815E-B640F4CBE1E4}"/>
+                <ns2:creationId id="{830F810F-2C86-4827-815E-B640F4CBE1E4}"/>
               </a:ext>
             </a:extLst>
           </p:cNvPr>
@@ -19394,7 +19394,7 @@
           <p:cNvPr id="38" name="矩形 37">
             <a:extLst>
               <a:ext uri="{FF2B5EF4-FFF2-40B4-BE49-F238E27FC236}">
-                <a16:creationId xmlns:a16="http://schemas.microsoft.com/office/drawing/2014/main" id="{5CBE9402-209B-4C54-BB0F-34753380B626}"/>
+                <ns2:creationId id="{5CBE9402-209B-4C54-BB0F-34753380B626}"/>
               </a:ext>
             </a:extLst>
           </p:cNvPr>
@@ -19429,7 +19429,7 @@
                   <a:srgbClr val="526274"/>
                 </a:solidFill>
               </a:rPr>
-              <a:t>可视化管理</a:t>
+              <a:t>提供可视化管理</a:t>
             </a:r>
           </a:p>
         </p:txBody>
@@ -19439,7 +19439,7 @@
           <p:cNvPr id="39" name="矩形 38">
             <a:extLst>
               <a:ext uri="{FF2B5EF4-FFF2-40B4-BE49-F238E27FC236}">
-                <a16:creationId xmlns:a16="http://schemas.microsoft.com/office/drawing/2014/main" id="{EB8DFF5C-D0B0-498C-8271-88543E07F6F8}"/>
+                <ns2:creationId id="{EB8DFF5C-D0B0-498C-8271-88543E07F6F8}"/>
               </a:ext>
             </a:extLst>
           </p:cNvPr>
@@ -19466,7 +19466,7 @@
           <p:cNvPr id="40" name="矩形 39">
             <a:extLst>
               <a:ext uri="{FF2B5EF4-FFF2-40B4-BE49-F238E27FC236}">
-                <a16:creationId xmlns:a16="http://schemas.microsoft.com/office/drawing/2014/main" id="{C8D1E073-5B61-49FA-8FE5-6345351CF99C}"/>
+                <ns2:creationId id="{C8D1E073-5B61-49FA-8FE5-6345351CF99C}"/>
               </a:ext>
             </a:extLst>
           </p:cNvPr>
@@ -19511,7 +19511,7 @@
           <p:cNvPr id="41" name="矩形: 圆角 40">
             <a:extLst>
               <a:ext uri="{FF2B5EF4-FFF2-40B4-BE49-F238E27FC236}">
-                <a16:creationId xmlns:a16="http://schemas.microsoft.com/office/drawing/2014/main" id="{1F997E81-051C-404F-86CF-F050D95C5F12}"/>
+                <ns2:creationId id="{1F997E81-051C-404F-86CF-F050D95C5F12}"/>
               </a:ext>
             </a:extLst>
           </p:cNvPr>
@@ -19540,7 +19540,7 @@
           <p:cNvPr id="42" name="矩形 41">
             <a:extLst>
               <a:ext uri="{FF2B5EF4-FFF2-40B4-BE49-F238E27FC236}">
-                <a16:creationId xmlns:a16="http://schemas.microsoft.com/office/drawing/2014/main" id="{A35261D4-16FE-4483-9BAD-A78BD0228B45}"/>
+                <ns2:creationId id="{A35261D4-16FE-4483-9BAD-A78BD0228B45}"/>
               </a:ext>
             </a:extLst>
           </p:cNvPr>
@@ -19575,7 +19575,7 @@
                   <a:srgbClr val="0E9488"/>
                 </a:solidFill>
               </a:rPr>
-              <a:t>整体数据流：设备上报数据 → 数据预处理 → LSTM AutoEncoder 推理 → 计算异常得分 → 业务规则复核 → 生成告警和工单 → 运维反馈进入持续训练。</a:t>
+              <a:t>主数据流：设备上报 → 数据预处理 → LSTM AutoEncoder 推理 → 异常得分 → 业务规则复核 → 告警和工单 → 处理反馈进入持续训练。</a:t>
             </a:r>
           </a:p>
         </p:txBody>
@@ -19583,7 +19583,7 @@
     </p:spTree>
     <p:extLst>
       <p:ext uri="{BB962C8B-B14F-4D97-AF65-F5344CB8AC3E}">
-        <p14:creationId xmlns:p14="http://schemas.microsoft.com/office/powerpoint/2010/main" val="1342928063"/>
+        <ns3:creationId val="1342928063"/>
       </p:ext>
     </p:extLst>
   </p:cSld>
@@ -19594,7 +19594,7 @@
 </file>
 
 <file path=ppt/slides/slide6.xml><?xml version="1.0" encoding="utf-8"?>
-<p:sld xmlns:a="http://schemas.openxmlformats.org/drawingml/2006/main" xmlns:r="http://schemas.openxmlformats.org/officeDocument/2006/relationships" xmlns:p="http://schemas.openxmlformats.org/presentationml/2006/main">
+<p:sld xmlns:a="http://schemas.openxmlformats.org/drawingml/2006/main" xmlns:ns2="http://schemas.microsoft.com/office/drawing/2014/main" xmlns:ns3="http://schemas.microsoft.com/office/powerpoint/2010/main" xmlns:p="http://schemas.openxmlformats.org/presentationml/2006/main">
   <p:cSld>
     <p:spTree>
       <p:nvGrpSpPr>
@@ -19615,7 +19615,7 @@
           <p:cNvPr id="45" name="slide-bg">
             <a:extLst>
               <a:ext uri="{FF2B5EF4-FFF2-40B4-BE49-F238E27FC236}">
-                <a16:creationId xmlns:a16="http://schemas.microsoft.com/office/drawing/2014/main" id="{009BED30-8125-44A8-865D-7721AC0E0333}"/>
+                <ns2:creationId id="{009BED30-8125-44A8-865D-7721AC0E0333}"/>
               </a:ext>
             </a:extLst>
           </p:cNvPr>
@@ -19642,7 +19642,7 @@
           <p:cNvPr id="2" name="title">
             <a:extLst>
               <a:ext uri="{FF2B5EF4-FFF2-40B4-BE49-F238E27FC236}">
-                <a16:creationId xmlns:a16="http://schemas.microsoft.com/office/drawing/2014/main" id="{98D52E65-BC61-4015-9910-803BDE6E517C}"/>
+                <ns2:creationId id="{98D52E65-BC61-4015-9910-803BDE6E517C}"/>
               </a:ext>
             </a:extLst>
           </p:cNvPr>
@@ -19677,7 +19677,7 @@
                   <a:srgbClr val="102033"/>
                 </a:solidFill>
               </a:rPr>
-              <a:t>实验数据与特征工程</a:t>
+              <a:t>数据特征与预处理</a:t>
             </a:r>
           </a:p>
         </p:txBody>
@@ -19687,7 +19687,7 @@
           <p:cNvPr id="3" name="subtitle">
             <a:extLst>
               <a:ext uri="{FF2B5EF4-FFF2-40B4-BE49-F238E27FC236}">
-                <a16:creationId xmlns:a16="http://schemas.microsoft.com/office/drawing/2014/main" id="{64862DE3-A643-45B0-9B27-18CA415C5E11}"/>
+                <ns2:creationId id="{64862DE3-A643-45B0-9B27-18CA415C5E11}"/>
               </a:ext>
             </a:extLst>
           </p:cNvPr>
@@ -19732,7 +19732,7 @@
           <p:cNvPr id="4" name="title-rule">
             <a:extLst>
               <a:ext uri="{FF2B5EF4-FFF2-40B4-BE49-F238E27FC236}">
-                <a16:creationId xmlns:a16="http://schemas.microsoft.com/office/drawing/2014/main" id="{ED52E244-369F-44FA-8B95-B9ECB2FA5F32}"/>
+                <ns2:creationId id="{ED52E244-369F-44FA-8B95-B9ECB2FA5F32}"/>
               </a:ext>
             </a:extLst>
           </p:cNvPr>
@@ -19765,7 +19765,7 @@
           <p:cNvPr id="5" name="矩形 4">
             <a:extLst>
               <a:ext uri="{FF2B5EF4-FFF2-40B4-BE49-F238E27FC236}">
-                <a16:creationId xmlns:a16="http://schemas.microsoft.com/office/drawing/2014/main" id="{003EF8F4-53C3-4987-8CAA-15EA7CCEEEA4}"/>
+                <ns2:creationId id="{003EF8F4-53C3-4987-8CAA-15EA7CCEEEA4}"/>
               </a:ext>
             </a:extLst>
           </p:cNvPr>
@@ -19792,7 +19792,7 @@
           <p:cNvPr id="6" name="矩形 5">
             <a:extLst>
               <a:ext uri="{FF2B5EF4-FFF2-40B4-BE49-F238E27FC236}">
-                <a16:creationId xmlns:a16="http://schemas.microsoft.com/office/drawing/2014/main" id="{C57E4E91-60A8-4FAA-937C-6E384F729B81}"/>
+                <ns2:creationId id="{C57E4E91-60A8-4FAA-937C-6E384F729B81}"/>
               </a:ext>
             </a:extLst>
           </p:cNvPr>
@@ -19837,7 +19837,7 @@
           <p:cNvPr id="7" name="矩形 6">
             <a:extLst>
               <a:ext uri="{FF2B5EF4-FFF2-40B4-BE49-F238E27FC236}">
-                <a16:creationId xmlns:a16="http://schemas.microsoft.com/office/drawing/2014/main" id="{4662C428-1CDE-476D-8847-B64C27436679}"/>
+                <ns2:creationId id="{4662C428-1CDE-476D-8847-B64C27436679}"/>
               </a:ext>
             </a:extLst>
           </p:cNvPr>
@@ -19864,7 +19864,7 @@
           <p:cNvPr id="8" name="矩形 7">
             <a:extLst>
               <a:ext uri="{FF2B5EF4-FFF2-40B4-BE49-F238E27FC236}">
-                <a16:creationId xmlns:a16="http://schemas.microsoft.com/office/drawing/2014/main" id="{24AD5AD0-CC47-460C-8859-E85133B93F19}"/>
+                <ns2:creationId id="{24AD5AD0-CC47-460C-8859-E85133B93F19}"/>
               </a:ext>
             </a:extLst>
           </p:cNvPr>
@@ -19899,7 +19899,7 @@
                   <a:srgbClr val="FFFFFF"/>
                 </a:solidFill>
               </a:rPr>
-              <a:t>含义</a:t>
+              <a:t>业务含义</a:t>
             </a:r>
           </a:p>
         </p:txBody>
@@ -19909,7 +19909,7 @@
           <p:cNvPr id="9" name="矩形 8">
             <a:extLst>
               <a:ext uri="{FF2B5EF4-FFF2-40B4-BE49-F238E27FC236}">
-                <a16:creationId xmlns:a16="http://schemas.microsoft.com/office/drawing/2014/main" id="{55D0F0BE-8CE6-4212-BF69-9620AB93272B}"/>
+                <ns2:creationId id="{55D0F0BE-8CE6-4212-BF69-9620AB93272B}"/>
               </a:ext>
             </a:extLst>
           </p:cNvPr>
@@ -19936,7 +19936,7 @@
           <p:cNvPr id="10" name="矩形 9">
             <a:extLst>
               <a:ext uri="{FF2B5EF4-FFF2-40B4-BE49-F238E27FC236}">
-                <a16:creationId xmlns:a16="http://schemas.microsoft.com/office/drawing/2014/main" id="{CADEE496-8121-4B23-BD6C-F12343E55200}"/>
+                <ns2:creationId id="{CADEE496-8121-4B23-BD6C-F12343E55200}"/>
               </a:ext>
             </a:extLst>
           </p:cNvPr>
@@ -19981,7 +19981,7 @@
           <p:cNvPr id="11" name="矩形 10">
             <a:extLst>
               <a:ext uri="{FF2B5EF4-FFF2-40B4-BE49-F238E27FC236}">
-                <a16:creationId xmlns:a16="http://schemas.microsoft.com/office/drawing/2014/main" id="{17E2C5F6-F974-4E6D-846A-A661BDDA9FF2}"/>
+                <ns2:creationId id="{17E2C5F6-F974-4E6D-846A-A661BDDA9FF2}"/>
               </a:ext>
             </a:extLst>
           </p:cNvPr>
@@ -20008,7 +20008,7 @@
           <p:cNvPr id="12" name="矩形 11">
             <a:extLst>
               <a:ext uri="{FF2B5EF4-FFF2-40B4-BE49-F238E27FC236}">
-                <a16:creationId xmlns:a16="http://schemas.microsoft.com/office/drawing/2014/main" id="{A1C6A9F0-E7C2-413D-BE3A-A086BC0A7908}"/>
+                <ns2:creationId id="{A1C6A9F0-E7C2-413D-BE3A-A086BC0A7908}"/>
               </a:ext>
             </a:extLst>
           </p:cNvPr>
@@ -20053,7 +20053,7 @@
           <p:cNvPr id="13" name="矩形 12">
             <a:extLst>
               <a:ext uri="{FF2B5EF4-FFF2-40B4-BE49-F238E27FC236}">
-                <a16:creationId xmlns:a16="http://schemas.microsoft.com/office/drawing/2014/main" id="{EA60627B-4CF3-4131-AFB8-EC76D9FACCBF}"/>
+                <ns2:creationId id="{EA60627B-4CF3-4131-AFB8-EC76D9FACCBF}"/>
               </a:ext>
             </a:extLst>
           </p:cNvPr>
@@ -20080,7 +20080,7 @@
           <p:cNvPr id="14" name="矩形 13">
             <a:extLst>
               <a:ext uri="{FF2B5EF4-FFF2-40B4-BE49-F238E27FC236}">
-                <a16:creationId xmlns:a16="http://schemas.microsoft.com/office/drawing/2014/main" id="{BEA7A7F0-B3C2-492A-AE64-27B0939F98D3}"/>
+                <ns2:creationId id="{BEA7A7F0-B3C2-492A-AE64-27B0939F98D3}"/>
               </a:ext>
             </a:extLst>
           </p:cNvPr>
@@ -20125,7 +20125,7 @@
           <p:cNvPr id="15" name="矩形 14">
             <a:extLst>
               <a:ext uri="{FF2B5EF4-FFF2-40B4-BE49-F238E27FC236}">
-                <a16:creationId xmlns:a16="http://schemas.microsoft.com/office/drawing/2014/main" id="{0A327947-F160-42FB-9F2F-846818A47768}"/>
+                <ns2:creationId id="{0A327947-F160-42FB-9F2F-846818A47768}"/>
               </a:ext>
             </a:extLst>
           </p:cNvPr>
@@ -20152,7 +20152,7 @@
           <p:cNvPr id="16" name="矩形 15">
             <a:extLst>
               <a:ext uri="{FF2B5EF4-FFF2-40B4-BE49-F238E27FC236}">
-                <a16:creationId xmlns:a16="http://schemas.microsoft.com/office/drawing/2014/main" id="{91740C81-E0FE-49DA-AC02-FAEEE00333F0}"/>
+                <ns2:creationId id="{91740C81-E0FE-49DA-AC02-FAEEE00333F0}"/>
               </a:ext>
             </a:extLst>
           </p:cNvPr>
@@ -20197,7 +20197,7 @@
           <p:cNvPr id="17" name="矩形 16">
             <a:extLst>
               <a:ext uri="{FF2B5EF4-FFF2-40B4-BE49-F238E27FC236}">
-                <a16:creationId xmlns:a16="http://schemas.microsoft.com/office/drawing/2014/main" id="{CFB3C591-3358-4EBA-87BC-4344F1948FF7}"/>
+                <ns2:creationId id="{CFB3C591-3358-4EBA-87BC-4344F1948FF7}"/>
               </a:ext>
             </a:extLst>
           </p:cNvPr>
@@ -20224,7 +20224,7 @@
           <p:cNvPr id="18" name="矩形 17">
             <a:extLst>
               <a:ext uri="{FF2B5EF4-FFF2-40B4-BE49-F238E27FC236}">
-                <a16:creationId xmlns:a16="http://schemas.microsoft.com/office/drawing/2014/main" id="{BD215C72-62C3-493C-994E-411894B75A8E}"/>
+                <ns2:creationId id="{BD215C72-62C3-493C-994E-411894B75A8E}"/>
               </a:ext>
             </a:extLst>
           </p:cNvPr>
@@ -20269,7 +20269,7 @@
           <p:cNvPr id="19" name="矩形 18">
             <a:extLst>
               <a:ext uri="{FF2B5EF4-FFF2-40B4-BE49-F238E27FC236}">
-                <a16:creationId xmlns:a16="http://schemas.microsoft.com/office/drawing/2014/main" id="{E7434E86-4B86-4FF2-886A-26DF18E32F6D}"/>
+                <ns2:creationId id="{E7434E86-4B86-4FF2-886A-26DF18E32F6D}"/>
               </a:ext>
             </a:extLst>
           </p:cNvPr>
@@ -20296,7 +20296,7 @@
           <p:cNvPr id="20" name="矩形 19">
             <a:extLst>
               <a:ext uri="{FF2B5EF4-FFF2-40B4-BE49-F238E27FC236}">
-                <a16:creationId xmlns:a16="http://schemas.microsoft.com/office/drawing/2014/main" id="{D9BA1822-7AD7-40C3-BC3B-440C56A29E90}"/>
+                <ns2:creationId id="{D9BA1822-7AD7-40C3-BC3B-440C56A29E90}"/>
               </a:ext>
             </a:extLst>
           </p:cNvPr>
@@ -20341,7 +20341,7 @@
           <p:cNvPr id="21" name="矩形 20">
             <a:extLst>
               <a:ext uri="{FF2B5EF4-FFF2-40B4-BE49-F238E27FC236}">
-                <a16:creationId xmlns:a16="http://schemas.microsoft.com/office/drawing/2014/main" id="{2325486A-AD08-4387-BC53-C6057C34F036}"/>
+                <ns2:creationId id="{2325486A-AD08-4387-BC53-C6057C34F036}"/>
               </a:ext>
             </a:extLst>
           </p:cNvPr>
@@ -20368,7 +20368,7 @@
           <p:cNvPr id="22" name="矩形 21">
             <a:extLst>
               <a:ext uri="{FF2B5EF4-FFF2-40B4-BE49-F238E27FC236}">
-                <a16:creationId xmlns:a16="http://schemas.microsoft.com/office/drawing/2014/main" id="{04D10E7D-1DEF-412C-BBF5-3C68D78A4B38}"/>
+                <ns2:creationId id="{04D10E7D-1DEF-412C-BBF5-3C68D78A4B38}"/>
               </a:ext>
             </a:extLst>
           </p:cNvPr>
@@ -20413,7 +20413,7 @@
           <p:cNvPr id="23" name="矩形 22">
             <a:extLst>
               <a:ext uri="{FF2B5EF4-FFF2-40B4-BE49-F238E27FC236}">
-                <a16:creationId xmlns:a16="http://schemas.microsoft.com/office/drawing/2014/main" id="{98B293E5-A0D5-414C-8C83-AD15816AB101}"/>
+                <ns2:creationId id="{98B293E5-A0D5-414C-8C83-AD15816AB101}"/>
               </a:ext>
             </a:extLst>
           </p:cNvPr>
@@ -20440,7 +20440,7 @@
           <p:cNvPr id="24" name="矩形 23">
             <a:extLst>
               <a:ext uri="{FF2B5EF4-FFF2-40B4-BE49-F238E27FC236}">
-                <a16:creationId xmlns:a16="http://schemas.microsoft.com/office/drawing/2014/main" id="{5E2EB992-6F53-4EA5-891A-2A2FFFF9161A}"/>
+                <ns2:creationId id="{5E2EB992-6F53-4EA5-891A-2A2FFFF9161A}"/>
               </a:ext>
             </a:extLst>
           </p:cNvPr>
@@ -20485,7 +20485,7 @@
           <p:cNvPr id="25" name="矩形 24">
             <a:extLst>
               <a:ext uri="{FF2B5EF4-FFF2-40B4-BE49-F238E27FC236}">
-                <a16:creationId xmlns:a16="http://schemas.microsoft.com/office/drawing/2014/main" id="{BB4E2E5B-1CB5-4A6A-B384-634953EADFC3}"/>
+                <ns2:creationId id="{BB4E2E5B-1CB5-4A6A-B384-634953EADFC3}"/>
               </a:ext>
             </a:extLst>
           </p:cNvPr>
@@ -20512,7 +20512,7 @@
           <p:cNvPr id="26" name="矩形 25">
             <a:extLst>
               <a:ext uri="{FF2B5EF4-FFF2-40B4-BE49-F238E27FC236}">
-                <a16:creationId xmlns:a16="http://schemas.microsoft.com/office/drawing/2014/main" id="{5742057B-7EF8-420F-AFBD-52BCBD31BCAE}"/>
+                <ns2:creationId id="{5742057B-7EF8-420F-AFBD-52BCBD31BCAE}"/>
               </a:ext>
             </a:extLst>
           </p:cNvPr>
@@ -20557,7 +20557,7 @@
           <p:cNvPr id="27" name="矩形 26">
             <a:extLst>
               <a:ext uri="{FF2B5EF4-FFF2-40B4-BE49-F238E27FC236}">
-                <a16:creationId xmlns:a16="http://schemas.microsoft.com/office/drawing/2014/main" id="{F6A4C00C-3AAC-4BB4-B6ED-AF324A20A5FA}"/>
+                <ns2:creationId id="{F6A4C00C-3AAC-4BB4-B6ED-AF324A20A5FA}"/>
               </a:ext>
             </a:extLst>
           </p:cNvPr>
@@ -20584,7 +20584,7 @@
           <p:cNvPr id="28" name="矩形 27">
             <a:extLst>
               <a:ext uri="{FF2B5EF4-FFF2-40B4-BE49-F238E27FC236}">
-                <a16:creationId xmlns:a16="http://schemas.microsoft.com/office/drawing/2014/main" id="{ED40009B-C159-4336-90C1-B6294CC39B24}"/>
+                <ns2:creationId id="{ED40009B-C159-4336-90C1-B6294CC39B24}"/>
               </a:ext>
             </a:extLst>
           </p:cNvPr>
@@ -20629,7 +20629,7 @@
           <p:cNvPr id="29" name="矩形 28">
             <a:extLst>
               <a:ext uri="{FF2B5EF4-FFF2-40B4-BE49-F238E27FC236}">
-                <a16:creationId xmlns:a16="http://schemas.microsoft.com/office/drawing/2014/main" id="{2FE927E9-74DA-4DB0-A7E7-03299E940A37}"/>
+                <ns2:creationId id="{2FE927E9-74DA-4DB0-A7E7-03299E940A37}"/>
               </a:ext>
             </a:extLst>
           </p:cNvPr>
@@ -20656,7 +20656,7 @@
           <p:cNvPr id="30" name="矩形 29">
             <a:extLst>
               <a:ext uri="{FF2B5EF4-FFF2-40B4-BE49-F238E27FC236}">
-                <a16:creationId xmlns:a16="http://schemas.microsoft.com/office/drawing/2014/main" id="{E3DF4862-A51D-48C0-92EF-9701B6597F63}"/>
+                <ns2:creationId id="{E3DF4862-A51D-48C0-92EF-9701B6597F63}"/>
               </a:ext>
             </a:extLst>
           </p:cNvPr>
@@ -20701,7 +20701,7 @@
           <p:cNvPr id="31" name="矩形 30">
             <a:extLst>
               <a:ext uri="{FF2B5EF4-FFF2-40B4-BE49-F238E27FC236}">
-                <a16:creationId xmlns:a16="http://schemas.microsoft.com/office/drawing/2014/main" id="{1CDBA869-A07B-48FE-8EA1-36666767E892}"/>
+                <ns2:creationId id="{1CDBA869-A07B-48FE-8EA1-36666767E892}"/>
               </a:ext>
             </a:extLst>
           </p:cNvPr>
@@ -20728,7 +20728,7 @@
           <p:cNvPr id="32" name="矩形 31">
             <a:extLst>
               <a:ext uri="{FF2B5EF4-FFF2-40B4-BE49-F238E27FC236}">
-                <a16:creationId xmlns:a16="http://schemas.microsoft.com/office/drawing/2014/main" id="{F54DC72E-9192-47F9-81D9-8001CCD1ACFA}"/>
+                <ns2:creationId id="{F54DC72E-9192-47F9-81D9-8001CCD1ACFA}"/>
               </a:ext>
             </a:extLst>
           </p:cNvPr>
@@ -20773,7 +20773,7 @@
           <p:cNvPr id="33" name="矩形 32">
             <a:extLst>
               <a:ext uri="{FF2B5EF4-FFF2-40B4-BE49-F238E27FC236}">
-                <a16:creationId xmlns:a16="http://schemas.microsoft.com/office/drawing/2014/main" id="{883F1687-12DC-4950-933E-FE72EE4A5BAF}"/>
+                <ns2:creationId id="{883F1687-12DC-4950-933E-FE72EE4A5BAF}"/>
               </a:ext>
             </a:extLst>
           </p:cNvPr>
@@ -20800,7 +20800,7 @@
           <p:cNvPr id="34" name="矩形 33">
             <a:extLst>
               <a:ext uri="{FF2B5EF4-FFF2-40B4-BE49-F238E27FC236}">
-                <a16:creationId xmlns:a16="http://schemas.microsoft.com/office/drawing/2014/main" id="{C0A9B0A6-E01E-4F2C-A04A-FD238C0FB90E}"/>
+                <ns2:creationId id="{C0A9B0A6-E01E-4F2C-A04A-FD238C0FB90E}"/>
               </a:ext>
             </a:extLst>
           </p:cNvPr>
@@ -20845,7 +20845,7 @@
           <p:cNvPr id="35" name="矩形 34">
             <a:extLst>
               <a:ext uri="{FF2B5EF4-FFF2-40B4-BE49-F238E27FC236}">
-                <a16:creationId xmlns:a16="http://schemas.microsoft.com/office/drawing/2014/main" id="{C45C78D1-42A4-41D0-8BBD-F9C24341DCE9}"/>
+                <ns2:creationId id="{C45C78D1-42A4-41D0-8BBD-F9C24341DCE9}"/>
               </a:ext>
             </a:extLst>
           </p:cNvPr>
@@ -20872,7 +20872,7 @@
           <p:cNvPr id="36" name="矩形 35">
             <a:extLst>
               <a:ext uri="{FF2B5EF4-FFF2-40B4-BE49-F238E27FC236}">
-                <a16:creationId xmlns:a16="http://schemas.microsoft.com/office/drawing/2014/main" id="{171646B2-C4BB-4384-A21B-F9B20BA3E5D2}"/>
+                <ns2:creationId id="{171646B2-C4BB-4384-A21B-F9B20BA3E5D2}"/>
               </a:ext>
             </a:extLst>
           </p:cNvPr>
@@ -20917,7 +20917,7 @@
           <p:cNvPr id="37" name="矩形 36">
             <a:extLst>
               <a:ext uri="{FF2B5EF4-FFF2-40B4-BE49-F238E27FC236}">
-                <a16:creationId xmlns:a16="http://schemas.microsoft.com/office/drawing/2014/main" id="{E166EA9B-A4A5-4DB2-8A60-113C90AFD1AF}"/>
+                <ns2:creationId id="{E166EA9B-A4A5-4DB2-8A60-113C90AFD1AF}"/>
               </a:ext>
             </a:extLst>
           </p:cNvPr>
@@ -20962,7 +20962,7 @@
           <p:cNvPr id="38" name="矩形 37">
             <a:extLst>
               <a:ext uri="{FF2B5EF4-FFF2-40B4-BE49-F238E27FC236}">
-                <a16:creationId xmlns:a16="http://schemas.microsoft.com/office/drawing/2014/main" id="{8A7491A2-D4F7-4D61-9DA3-97A17E9B7F48}"/>
+                <ns2:creationId id="{8A7491A2-D4F7-4D61-9DA3-97A17E9B7F48}"/>
               </a:ext>
             </a:extLst>
           </p:cNvPr>
@@ -21007,7 +21007,7 @@
           <p:cNvPr id="39" name="矩形 38">
             <a:extLst>
               <a:ext uri="{FF2B5EF4-FFF2-40B4-BE49-F238E27FC236}">
-                <a16:creationId xmlns:a16="http://schemas.microsoft.com/office/drawing/2014/main" id="{0447C950-9640-43C3-8DFB-98E5E5925DBD}"/>
+                <ns2:creationId id="{0447C950-9640-43C3-8DFB-98E5E5925DBD}"/>
               </a:ext>
             </a:extLst>
           </p:cNvPr>
@@ -21052,7 +21052,7 @@
           <p:cNvPr id="40" name="矩形: 圆角 39">
             <a:extLst>
               <a:ext uri="{FF2B5EF4-FFF2-40B4-BE49-F238E27FC236}">
-                <a16:creationId xmlns:a16="http://schemas.microsoft.com/office/drawing/2014/main" id="{85A4C8E7-0F8F-4A7B-B1A7-F10F3FB121FF}"/>
+                <ns2:creationId id="{85A4C8E7-0F8F-4A7B-B1A7-F10F3FB121FF}"/>
               </a:ext>
             </a:extLst>
           </p:cNvPr>
@@ -21081,7 +21081,7 @@
           <p:cNvPr id="41" name="bullet-0">
             <a:extLst>
               <a:ext uri="{FF2B5EF4-FFF2-40B4-BE49-F238E27FC236}">
-                <a16:creationId xmlns:a16="http://schemas.microsoft.com/office/drawing/2014/main" id="{B37BE6E6-104A-4392-B24A-E070D005C6B9}"/>
+                <ns2:creationId id="{B37BE6E6-104A-4392-B24A-E070D005C6B9}"/>
               </a:ext>
             </a:extLst>
           </p:cNvPr>
@@ -21126,7 +21126,7 @@
           <p:cNvPr id="42" name="bullet-1">
             <a:extLst>
               <a:ext uri="{FF2B5EF4-FFF2-40B4-BE49-F238E27FC236}">
-                <a16:creationId xmlns:a16="http://schemas.microsoft.com/office/drawing/2014/main" id="{6B4157A6-8179-4C1F-8220-B914C34372E1}"/>
+                <ns2:creationId id="{6B4157A6-8179-4C1F-8220-B914C34372E1}"/>
               </a:ext>
             </a:extLst>
           </p:cNvPr>
@@ -21161,7 +21161,7 @@
                   <a:srgbClr val="102033"/>
                 </a:solidFill>
               </a:rPr>
-              <a:t>• 缺失值、无效值和极端值清洗</a:t>
+              <a:t>• 清洗缺失值、无效值和明显极端值</a:t>
             </a:r>
           </a:p>
         </p:txBody>
@@ -21171,7 +21171,7 @@
           <p:cNvPr id="43" name="bullet-2">
             <a:extLst>
               <a:ext uri="{FF2B5EF4-FFF2-40B4-BE49-F238E27FC236}">
-                <a16:creationId xmlns:a16="http://schemas.microsoft.com/office/drawing/2014/main" id="{EE34E3A3-2C33-46E9-B595-3D97321A5A1A}"/>
+                <ns2:creationId id="{EE34E3A3-2C33-46E9-B595-3D97321A5A1A}"/>
               </a:ext>
             </a:extLst>
           </p:cNvPr>
@@ -21216,7 +21216,7 @@
           <p:cNvPr id="44" name="bullet-3">
             <a:extLst>
               <a:ext uri="{FF2B5EF4-FFF2-40B4-BE49-F238E27FC236}">
-                <a16:creationId xmlns:a16="http://schemas.microsoft.com/office/drawing/2014/main" id="{A31FE45B-AE47-4F4C-9BBA-0C8A0F4194D6}"/>
+                <ns2:creationId id="{A31FE45B-AE47-4F4C-9BBA-0C8A0F4194D6}"/>
               </a:ext>
             </a:extLst>
           </p:cNvPr>
@@ -21251,7 +21251,7 @@
                   <a:srgbClr val="102033"/>
                 </a:solidFill>
               </a:rPr>
-              <a:t>• 滑动窗口步长为 1，提升短时异常捕捉能力</a:t>
+              <a:t>• 使用滑动窗口保留最近一段时间的变化趋势</a:t>
             </a:r>
           </a:p>
         </p:txBody>
@@ -21259,7 +21259,7 @@
     </p:spTree>
     <p:extLst>
       <p:ext uri="{BB962C8B-B14F-4D97-AF65-F5344CB8AC3E}">
-        <p14:creationId xmlns:p14="http://schemas.microsoft.com/office/powerpoint/2010/main" val="1099056515"/>
+        <ns3:creationId val="1099056515"/>
       </p:ext>
     </p:extLst>
   </p:cSld>
@@ -21270,7 +21270,7 @@
 </file>
 
 <file path=ppt/slides/slide7.xml><?xml version="1.0" encoding="utf-8"?>
-<p:sld xmlns:a="http://schemas.openxmlformats.org/drawingml/2006/main" xmlns:r="http://schemas.openxmlformats.org/officeDocument/2006/relationships" xmlns:p="http://schemas.openxmlformats.org/presentationml/2006/main">
+<p:sld xmlns:a="http://schemas.openxmlformats.org/drawingml/2006/main" xmlns:ns2="http://schemas.microsoft.com/office/drawing/2014/main" xmlns:ns3="http://schemas.microsoft.com/office/powerpoint/2010/main" xmlns:p="http://schemas.openxmlformats.org/presentationml/2006/main">
   <p:cSld>
     <p:spTree>
       <p:nvGrpSpPr>
@@ -21291,7 +21291,7 @@
           <p:cNvPr id="55" name="slide-bg">
             <a:extLst>
               <a:ext uri="{FF2B5EF4-FFF2-40B4-BE49-F238E27FC236}">
-                <a16:creationId xmlns:a16="http://schemas.microsoft.com/office/drawing/2014/main" id="{DEA7B0D4-F573-4915-96CE-33184720CBBC}"/>
+                <ns2:creationId id="{DEA7B0D4-F573-4915-96CE-33184720CBBC}"/>
               </a:ext>
             </a:extLst>
           </p:cNvPr>
@@ -21318,7 +21318,7 @@
           <p:cNvPr id="2" name="title">
             <a:extLst>
               <a:ext uri="{FF2B5EF4-FFF2-40B4-BE49-F238E27FC236}">
-                <a16:creationId xmlns:a16="http://schemas.microsoft.com/office/drawing/2014/main" id="{95B94C28-BFE9-48D5-A2FD-8D0A8641CB29}"/>
+                <ns2:creationId id="{95B94C28-BFE9-48D5-A2FD-8D0A8641CB29}"/>
               </a:ext>
             </a:extLst>
           </p:cNvPr>
@@ -21353,7 +21353,7 @@
                   <a:srgbClr val="102033"/>
                 </a:solidFill>
               </a:rPr>
-              <a:t>异常场景构造</a:t>
+              <a:t>需求分析与异常场景</a:t>
             </a:r>
           </a:p>
         </p:txBody>
@@ -21363,7 +21363,7 @@
           <p:cNvPr id="3" name="subtitle">
             <a:extLst>
               <a:ext uri="{FF2B5EF4-FFF2-40B4-BE49-F238E27FC236}">
-                <a16:creationId xmlns:a16="http://schemas.microsoft.com/office/drawing/2014/main" id="{07CBFA37-F0F9-47A6-B54A-4CC23906C311}"/>
+                <ns2:creationId id="{07CBFA37-F0F9-47A6-B54A-4CC23906C311}"/>
               </a:ext>
             </a:extLst>
           </p:cNvPr>
@@ -21398,7 +21398,7 @@
                   <a:srgbClr val="526274"/>
                 </a:solidFill>
               </a:rPr>
-              <a:t>通过模拟注入多类异常，覆盖用气异常、硬件异常和通信异常</a:t>
+              <a:t>系统需要覆盖用气异常、设备状态异常、通信异常和管网异常</a:t>
             </a:r>
           </a:p>
         </p:txBody>
@@ -21408,7 +21408,7 @@
           <p:cNvPr id="4" name="title-rule">
             <a:extLst>
               <a:ext uri="{FF2B5EF4-FFF2-40B4-BE49-F238E27FC236}">
-                <a16:creationId xmlns:a16="http://schemas.microsoft.com/office/drawing/2014/main" id="{3E198E86-2051-42DE-8300-66828D4E8ABD}"/>
+                <ns2:creationId id="{3E198E86-2051-42DE-8300-66828D4E8ABD}"/>
               </a:ext>
             </a:extLst>
           </p:cNvPr>
@@ -21441,7 +21441,7 @@
           <p:cNvPr id="5" name="矩形 4">
             <a:extLst>
               <a:ext uri="{FF2B5EF4-FFF2-40B4-BE49-F238E27FC236}">
-                <a16:creationId xmlns:a16="http://schemas.microsoft.com/office/drawing/2014/main" id="{E8926C2B-88F1-47CD-BEE5-CED20B765817}"/>
+                <ns2:creationId id="{E8926C2B-88F1-47CD-BEE5-CED20B765817}"/>
               </a:ext>
             </a:extLst>
           </p:cNvPr>
@@ -21468,7 +21468,7 @@
           <p:cNvPr id="6" name="矩形 5">
             <a:extLst>
               <a:ext uri="{FF2B5EF4-FFF2-40B4-BE49-F238E27FC236}">
-                <a16:creationId xmlns:a16="http://schemas.microsoft.com/office/drawing/2014/main" id="{93D6D401-0445-469B-96E3-21A22713D2C3}"/>
+                <ns2:creationId id="{93D6D401-0445-469B-96E3-21A22713D2C3}"/>
               </a:ext>
             </a:extLst>
           </p:cNvPr>
@@ -21513,7 +21513,7 @@
           <p:cNvPr id="7" name="矩形 6">
             <a:extLst>
               <a:ext uri="{FF2B5EF4-FFF2-40B4-BE49-F238E27FC236}">
-                <a16:creationId xmlns:a16="http://schemas.microsoft.com/office/drawing/2014/main" id="{EE3FA827-6C88-4287-AF5B-A627019DBE3D}"/>
+                <ns2:creationId id="{EE3FA827-6C88-4287-AF5B-A627019DBE3D}"/>
               </a:ext>
             </a:extLst>
           </p:cNvPr>
@@ -21540,7 +21540,7 @@
           <p:cNvPr id="8" name="矩形 7">
             <a:extLst>
               <a:ext uri="{FF2B5EF4-FFF2-40B4-BE49-F238E27FC236}">
-                <a16:creationId xmlns:a16="http://schemas.microsoft.com/office/drawing/2014/main" id="{2F26F348-FE62-46C1-8B44-1CCC36B794A4}"/>
+                <ns2:creationId id="{2F26F348-FE62-46C1-8B44-1CCC36B794A4}"/>
               </a:ext>
             </a:extLst>
           </p:cNvPr>
@@ -21575,7 +21575,7 @@
                   <a:srgbClr val="FFFFFF"/>
                 </a:solidFill>
               </a:rPr>
-              <a:t>构造方式</a:t>
+              <a:t>检测依据</a:t>
             </a:r>
           </a:p>
         </p:txBody>
@@ -21585,7 +21585,7 @@
           <p:cNvPr id="9" name="矩形 8">
             <a:extLst>
               <a:ext uri="{FF2B5EF4-FFF2-40B4-BE49-F238E27FC236}">
-                <a16:creationId xmlns:a16="http://schemas.microsoft.com/office/drawing/2014/main" id="{C864B393-4426-4FAA-8F93-1DF0A2CFD469}"/>
+                <ns2:creationId id="{C864B393-4426-4FAA-8F93-1DF0A2CFD469}"/>
               </a:ext>
             </a:extLst>
           </p:cNvPr>
@@ -21612,7 +21612,7 @@
           <p:cNvPr id="10" name="矩形 9">
             <a:extLst>
               <a:ext uri="{FF2B5EF4-FFF2-40B4-BE49-F238E27FC236}">
-                <a16:creationId xmlns:a16="http://schemas.microsoft.com/office/drawing/2014/main" id="{68E779A7-0C26-4C29-9572-238104F27319}"/>
+                <ns2:creationId id="{68E779A7-0C26-4C29-9572-238104F27319}"/>
               </a:ext>
             </a:extLst>
           </p:cNvPr>
@@ -21647,7 +21647,7 @@
                   <a:srgbClr val="FFFFFF"/>
                 </a:solidFill>
               </a:rPr>
-              <a:t>可能原因</a:t>
+              <a:t>业务含义</a:t>
             </a:r>
           </a:p>
         </p:txBody>
@@ -21657,7 +21657,7 @@
           <p:cNvPr id="11" name="矩形 10">
             <a:extLst>
               <a:ext uri="{FF2B5EF4-FFF2-40B4-BE49-F238E27FC236}">
-                <a16:creationId xmlns:a16="http://schemas.microsoft.com/office/drawing/2014/main" id="{CEFAF84F-0206-4943-AA00-7540785DDEB8}"/>
+                <ns2:creationId id="{CEFAF84F-0206-4943-AA00-7540785DDEB8}"/>
               </a:ext>
             </a:extLst>
           </p:cNvPr>
@@ -21684,7 +21684,7 @@
           <p:cNvPr id="12" name="矩形 11">
             <a:extLst>
               <a:ext uri="{FF2B5EF4-FFF2-40B4-BE49-F238E27FC236}">
-                <a16:creationId xmlns:a16="http://schemas.microsoft.com/office/drawing/2014/main" id="{E47F374F-F934-44FC-94CD-217DA4DE8FA4}"/>
+                <ns2:creationId id="{E47F374F-F934-44FC-94CD-217DA4DE8FA4}"/>
               </a:ext>
             </a:extLst>
           </p:cNvPr>
@@ -21729,7 +21729,7 @@
           <p:cNvPr id="13" name="矩形 12">
             <a:extLst>
               <a:ext uri="{FF2B5EF4-FFF2-40B4-BE49-F238E27FC236}">
-                <a16:creationId xmlns:a16="http://schemas.microsoft.com/office/drawing/2014/main" id="{736AF2F9-82DC-4398-A409-CFE641CA8C3E}"/>
+                <ns2:creationId id="{736AF2F9-82DC-4398-A409-CFE641CA8C3E}"/>
               </a:ext>
             </a:extLst>
           </p:cNvPr>
@@ -21756,7 +21756,7 @@
           <p:cNvPr id="14" name="矩形 13">
             <a:extLst>
               <a:ext uri="{FF2B5EF4-FFF2-40B4-BE49-F238E27FC236}">
-                <a16:creationId xmlns:a16="http://schemas.microsoft.com/office/drawing/2014/main" id="{1812C057-C5A8-472C-ADFE-0BEF07338B66}"/>
+                <ns2:creationId id="{1812C057-C5A8-472C-ADFE-0BEF07338B66}"/>
               </a:ext>
             </a:extLst>
           </p:cNvPr>
@@ -21791,7 +21791,7 @@
                   <a:srgbClr val="526274"/>
                 </a:solidFill>
               </a:rPr>
-              <a:t>某一时间段瞬时流量放大数倍</a:t>
+              <a:t>瞬时流量在短时间内明显放大</a:t>
             </a:r>
           </a:p>
         </p:txBody>
@@ -21801,7 +21801,7 @@
           <p:cNvPr id="15" name="矩形 14">
             <a:extLst>
               <a:ext uri="{FF2B5EF4-FFF2-40B4-BE49-F238E27FC236}">
-                <a16:creationId xmlns:a16="http://schemas.microsoft.com/office/drawing/2014/main" id="{FEE8E832-0443-45C8-998E-C3CB2D619BCF}"/>
+                <ns2:creationId id="{FEE8E832-0443-45C8-998E-C3CB2D619BCF}"/>
               </a:ext>
             </a:extLst>
           </p:cNvPr>
@@ -21828,7 +21828,7 @@
           <p:cNvPr id="16" name="矩形 15">
             <a:extLst>
               <a:ext uri="{FF2B5EF4-FFF2-40B4-BE49-F238E27FC236}">
-                <a16:creationId xmlns:a16="http://schemas.microsoft.com/office/drawing/2014/main" id="{EED6A75A-CBB8-4E06-A0A0-EF46E0048BA2}"/>
+                <ns2:creationId id="{EED6A75A-CBB8-4E06-A0A0-EF46E0048BA2}"/>
               </a:ext>
             </a:extLst>
           </p:cNvPr>
@@ -21873,7 +21873,7 @@
           <p:cNvPr id="17" name="矩形 16">
             <a:extLst>
               <a:ext uri="{FF2B5EF4-FFF2-40B4-BE49-F238E27FC236}">
-                <a16:creationId xmlns:a16="http://schemas.microsoft.com/office/drawing/2014/main" id="{41B5CF31-2870-4B60-A1BD-1F26BF0A7AFA}"/>
+                <ns2:creationId id="{41B5CF31-2870-4B60-A1BD-1F26BF0A7AFA}"/>
               </a:ext>
             </a:extLst>
           </p:cNvPr>
@@ -21900,7 +21900,7 @@
           <p:cNvPr id="18" name="矩形 17">
             <a:extLst>
               <a:ext uri="{FF2B5EF4-FFF2-40B4-BE49-F238E27FC236}">
-                <a16:creationId xmlns:a16="http://schemas.microsoft.com/office/drawing/2014/main" id="{B823D10F-F05D-47F2-A5AA-242224869443}"/>
+                <ns2:creationId id="{B823D10F-F05D-47F2-A5AA-242224869443}"/>
               </a:ext>
             </a:extLst>
           </p:cNvPr>
@@ -21945,7 +21945,7 @@
           <p:cNvPr id="19" name="矩形 18">
             <a:extLst>
               <a:ext uri="{FF2B5EF4-FFF2-40B4-BE49-F238E27FC236}">
-                <a16:creationId xmlns:a16="http://schemas.microsoft.com/office/drawing/2014/main" id="{4F6A79AF-DFA6-4ACA-AAF5-514BBE0D92AA}"/>
+                <ns2:creationId id="{4F6A79AF-DFA6-4ACA-AAF5-514BBE0D92AA}"/>
               </a:ext>
             </a:extLst>
           </p:cNvPr>
@@ -21972,7 +21972,7 @@
           <p:cNvPr id="20" name="矩形 19">
             <a:extLst>
               <a:ext uri="{FF2B5EF4-FFF2-40B4-BE49-F238E27FC236}">
-                <a16:creationId xmlns:a16="http://schemas.microsoft.com/office/drawing/2014/main" id="{6F9CD2E3-0822-418B-83FE-3B481DC58FF6}"/>
+                <ns2:creationId id="{6F9CD2E3-0822-418B-83FE-3B481DC58FF6}"/>
               </a:ext>
             </a:extLst>
           </p:cNvPr>
@@ -22007,7 +22007,7 @@
                   <a:srgbClr val="526274"/>
                 </a:solidFill>
               </a:rPr>
-              <a:t>电池电压降低到异常范围</a:t>
+              <a:t>电池电压低于正常工作范围</a:t>
             </a:r>
           </a:p>
         </p:txBody>
@@ -22017,7 +22017,7 @@
           <p:cNvPr id="21" name="矩形 20">
             <a:extLst>
               <a:ext uri="{FF2B5EF4-FFF2-40B4-BE49-F238E27FC236}">
-                <a16:creationId xmlns:a16="http://schemas.microsoft.com/office/drawing/2014/main" id="{86F2677E-DE5D-4DCD-99EE-93D26A1F8B72}"/>
+                <ns2:creationId id="{86F2677E-DE5D-4DCD-99EE-93D26A1F8B72}"/>
               </a:ext>
             </a:extLst>
           </p:cNvPr>
@@ -22044,7 +22044,7 @@
           <p:cNvPr id="22" name="矩形 21">
             <a:extLst>
               <a:ext uri="{FF2B5EF4-FFF2-40B4-BE49-F238E27FC236}">
-                <a16:creationId xmlns:a16="http://schemas.microsoft.com/office/drawing/2014/main" id="{7A463AA2-D98E-4715-9BD6-95D60ED6DB13}"/>
+                <ns2:creationId id="{7A463AA2-D98E-4715-9BD6-95D60ED6DB13}"/>
               </a:ext>
             </a:extLst>
           </p:cNvPr>
@@ -22089,7 +22089,7 @@
           <p:cNvPr id="23" name="矩形 22">
             <a:extLst>
               <a:ext uri="{FF2B5EF4-FFF2-40B4-BE49-F238E27FC236}">
-                <a16:creationId xmlns:a16="http://schemas.microsoft.com/office/drawing/2014/main" id="{71F71E17-6B21-43B0-AD7F-A73380F356C2}"/>
+                <ns2:creationId id="{71F71E17-6B21-43B0-AD7F-A73380F356C2}"/>
               </a:ext>
             </a:extLst>
           </p:cNvPr>
@@ -22116,7 +22116,7 @@
           <p:cNvPr id="24" name="矩形 23">
             <a:extLst>
               <a:ext uri="{FF2B5EF4-FFF2-40B4-BE49-F238E27FC236}">
-                <a16:creationId xmlns:a16="http://schemas.microsoft.com/office/drawing/2014/main" id="{A73BAEB4-6B7E-4A9A-AF6C-B69075C79D4C}"/>
+                <ns2:creationId id="{A73BAEB4-6B7E-4A9A-AF6C-B69075C79D4C}"/>
               </a:ext>
             </a:extLst>
           </p:cNvPr>
@@ -22161,7 +22161,7 @@
           <p:cNvPr id="25" name="矩形 24">
             <a:extLst>
               <a:ext uri="{FF2B5EF4-FFF2-40B4-BE49-F238E27FC236}">
-                <a16:creationId xmlns:a16="http://schemas.microsoft.com/office/drawing/2014/main" id="{6472B3A6-7C26-48EC-953F-AE1123632D0C}"/>
+                <ns2:creationId id="{6472B3A6-7C26-48EC-953F-AE1123632D0C}"/>
               </a:ext>
             </a:extLst>
           </p:cNvPr>
@@ -22188,7 +22188,7 @@
           <p:cNvPr id="26" name="矩形 25">
             <a:extLst>
               <a:ext uri="{FF2B5EF4-FFF2-40B4-BE49-F238E27FC236}">
-                <a16:creationId xmlns:a16="http://schemas.microsoft.com/office/drawing/2014/main" id="{7DBEEC0E-09B7-47D6-8A68-91258AA4E931}"/>
+                <ns2:creationId id="{7DBEEC0E-09B7-47D6-8A68-91258AA4E931}"/>
               </a:ext>
             </a:extLst>
           </p:cNvPr>
@@ -22223,7 +22223,7 @@
                   <a:srgbClr val="526274"/>
                 </a:solidFill>
               </a:rPr>
-              <a:t>信号强度降低或随机缺失数据</a:t>
+              <a:t>信号强度偏低或数据缺失</a:t>
             </a:r>
           </a:p>
         </p:txBody>
@@ -22233,7 +22233,7 @@
           <p:cNvPr id="27" name="矩形 26">
             <a:extLst>
               <a:ext uri="{FF2B5EF4-FFF2-40B4-BE49-F238E27FC236}">
-                <a16:creationId xmlns:a16="http://schemas.microsoft.com/office/drawing/2014/main" id="{DA64B925-497B-496D-BBFA-EE7508D386ED}"/>
+                <ns2:creationId id="{DA64B925-497B-496D-BBFA-EE7508D386ED}"/>
               </a:ext>
             </a:extLst>
           </p:cNvPr>
@@ -22260,7 +22260,7 @@
           <p:cNvPr id="28" name="矩形 27">
             <a:extLst>
               <a:ext uri="{FF2B5EF4-FFF2-40B4-BE49-F238E27FC236}">
-                <a16:creationId xmlns:a16="http://schemas.microsoft.com/office/drawing/2014/main" id="{8CB25495-686F-478E-92D2-ED9FFDE6185F}"/>
+                <ns2:creationId id="{8CB25495-686F-478E-92D2-ED9FFDE6185F}"/>
               </a:ext>
             </a:extLst>
           </p:cNvPr>
@@ -22305,7 +22305,7 @@
           <p:cNvPr id="29" name="矩形 28">
             <a:extLst>
               <a:ext uri="{FF2B5EF4-FFF2-40B4-BE49-F238E27FC236}">
-                <a16:creationId xmlns:a16="http://schemas.microsoft.com/office/drawing/2014/main" id="{597056ED-2476-48E1-9236-E5C6672F4331}"/>
+                <ns2:creationId id="{597056ED-2476-48E1-9236-E5C6672F4331}"/>
               </a:ext>
             </a:extLst>
           </p:cNvPr>
@@ -22332,7 +22332,7 @@
           <p:cNvPr id="30" name="矩形 29">
             <a:extLst>
               <a:ext uri="{FF2B5EF4-FFF2-40B4-BE49-F238E27FC236}">
-                <a16:creationId xmlns:a16="http://schemas.microsoft.com/office/drawing/2014/main" id="{B1AC7172-CB8A-47BD-876C-9468E6781216}"/>
+                <ns2:creationId id="{B1AC7172-CB8A-47BD-876C-9468E6781216}"/>
               </a:ext>
             </a:extLst>
           </p:cNvPr>
@@ -22377,7 +22377,7 @@
           <p:cNvPr id="31" name="矩形 30">
             <a:extLst>
               <a:ext uri="{FF2B5EF4-FFF2-40B4-BE49-F238E27FC236}">
-                <a16:creationId xmlns:a16="http://schemas.microsoft.com/office/drawing/2014/main" id="{A5E537C7-776F-4E15-8181-25AE42004BC9}"/>
+                <ns2:creationId id="{A5E537C7-776F-4E15-8181-25AE42004BC9}"/>
               </a:ext>
             </a:extLst>
           </p:cNvPr>
@@ -22404,7 +22404,7 @@
           <p:cNvPr id="32" name="矩形 31">
             <a:extLst>
               <a:ext uri="{FF2B5EF4-FFF2-40B4-BE49-F238E27FC236}">
-                <a16:creationId xmlns:a16="http://schemas.microsoft.com/office/drawing/2014/main" id="{D930C4D6-ABBE-4555-9481-7A734697A8C5}"/>
+                <ns2:creationId id="{D930C4D6-ABBE-4555-9481-7A734697A8C5}"/>
               </a:ext>
             </a:extLst>
           </p:cNvPr>
@@ -22439,7 +22439,7 @@
                   <a:srgbClr val="526274"/>
                 </a:solidFill>
               </a:rPr>
-              <a:t>累计用气量加入突然偏移</a:t>
+              <a:t>累计读数出现异常偏移</a:t>
             </a:r>
           </a:p>
         </p:txBody>
@@ -22449,7 +22449,7 @@
           <p:cNvPr id="33" name="矩形 32">
             <a:extLst>
               <a:ext uri="{FF2B5EF4-FFF2-40B4-BE49-F238E27FC236}">
-                <a16:creationId xmlns:a16="http://schemas.microsoft.com/office/drawing/2014/main" id="{D62B8750-833A-40DF-A612-024DD431812B}"/>
+                <ns2:creationId id="{D62B8750-833A-40DF-A612-024DD431812B}"/>
               </a:ext>
             </a:extLst>
           </p:cNvPr>
@@ -22476,7 +22476,7 @@
           <p:cNvPr id="34" name="矩形 33">
             <a:extLst>
               <a:ext uri="{FF2B5EF4-FFF2-40B4-BE49-F238E27FC236}">
-                <a16:creationId xmlns:a16="http://schemas.microsoft.com/office/drawing/2014/main" id="{CEDA6F59-A68A-455A-BA86-69F3EB341F33}"/>
+                <ns2:creationId id="{CEDA6F59-A68A-455A-BA86-69F3EB341F33}"/>
               </a:ext>
             </a:extLst>
           </p:cNvPr>
@@ -22521,7 +22521,7 @@
           <p:cNvPr id="35" name="矩形 34">
             <a:extLst>
               <a:ext uri="{FF2B5EF4-FFF2-40B4-BE49-F238E27FC236}">
-                <a16:creationId xmlns:a16="http://schemas.microsoft.com/office/drawing/2014/main" id="{02B1322E-781A-46DC-A7A5-2E18503D7CD0}"/>
+                <ns2:creationId id="{02B1322E-781A-46DC-A7A5-2E18503D7CD0}"/>
               </a:ext>
             </a:extLst>
           </p:cNvPr>
@@ -22548,7 +22548,7 @@
           <p:cNvPr id="36" name="矩形 35">
             <a:extLst>
               <a:ext uri="{FF2B5EF4-FFF2-40B4-BE49-F238E27FC236}">
-                <a16:creationId xmlns:a16="http://schemas.microsoft.com/office/drawing/2014/main" id="{9D45C802-F230-4772-A56E-E421E8FCB723}"/>
+                <ns2:creationId id="{9D45C802-F230-4772-A56E-E421E8FCB723}"/>
               </a:ext>
             </a:extLst>
           </p:cNvPr>
@@ -22593,7 +22593,7 @@
           <p:cNvPr id="37" name="矩形 36">
             <a:extLst>
               <a:ext uri="{FF2B5EF4-FFF2-40B4-BE49-F238E27FC236}">
-                <a16:creationId xmlns:a16="http://schemas.microsoft.com/office/drawing/2014/main" id="{5277DE51-A21E-4E45-A7B9-73803EB0BEC6}"/>
+                <ns2:creationId id="{5277DE51-A21E-4E45-A7B9-73803EB0BEC6}"/>
               </a:ext>
             </a:extLst>
           </p:cNvPr>
@@ -22620,7 +22620,7 @@
           <p:cNvPr id="38" name="矩形 37">
             <a:extLst>
               <a:ext uri="{FF2B5EF4-FFF2-40B4-BE49-F238E27FC236}">
-                <a16:creationId xmlns:a16="http://schemas.microsoft.com/office/drawing/2014/main" id="{912A6008-A8EA-4222-B6A2-D6E168335D77}"/>
+                <ns2:creationId id="{912A6008-A8EA-4222-B6A2-D6E168335D77}"/>
               </a:ext>
             </a:extLst>
           </p:cNvPr>
@@ -22655,7 +22655,7 @@
                   <a:srgbClr val="526274"/>
                 </a:solidFill>
               </a:rPr>
-              <a:t>管网压力调低或调高</a:t>
+              <a:t>管网压力超出正常范围</a:t>
             </a:r>
           </a:p>
         </p:txBody>
@@ -22665,7 +22665,7 @@
           <p:cNvPr id="39" name="矩形 38">
             <a:extLst>
               <a:ext uri="{FF2B5EF4-FFF2-40B4-BE49-F238E27FC236}">
-                <a16:creationId xmlns:a16="http://schemas.microsoft.com/office/drawing/2014/main" id="{F53CE5E6-FBB7-452D-9A94-C36A46C4E73B}"/>
+                <ns2:creationId id="{F53CE5E6-FBB7-452D-9A94-C36A46C4E73B}"/>
               </a:ext>
             </a:extLst>
           </p:cNvPr>
@@ -22692,7 +22692,7 @@
           <p:cNvPr id="40" name="矩形 39">
             <a:extLst>
               <a:ext uri="{FF2B5EF4-FFF2-40B4-BE49-F238E27FC236}">
-                <a16:creationId xmlns:a16="http://schemas.microsoft.com/office/drawing/2014/main" id="{2F4CF5A3-E79A-4328-AAC0-66BD9D2E83AC}"/>
+                <ns2:creationId id="{2F4CF5A3-E79A-4328-AAC0-66BD9D2E83AC}"/>
               </a:ext>
             </a:extLst>
           </p:cNvPr>
@@ -22737,7 +22737,7 @@
           <p:cNvPr id="41" name="矩形 40">
             <a:extLst>
               <a:ext uri="{FF2B5EF4-FFF2-40B4-BE49-F238E27FC236}">
-                <a16:creationId xmlns:a16="http://schemas.microsoft.com/office/drawing/2014/main" id="{930FDFF7-F892-4A26-8CBA-B0C6DF0A814D}"/>
+                <ns2:creationId id="{930FDFF7-F892-4A26-8CBA-B0C6DF0A814D}"/>
               </a:ext>
             </a:extLst>
           </p:cNvPr>
@@ -22764,7 +22764,7 @@
           <p:cNvPr id="42" name="矩形 41">
             <a:extLst>
               <a:ext uri="{FF2B5EF4-FFF2-40B4-BE49-F238E27FC236}">
-                <a16:creationId xmlns:a16="http://schemas.microsoft.com/office/drawing/2014/main" id="{A1689BDA-8C49-4C89-8AC5-8CDA390AAD60}"/>
+                <ns2:creationId id="{A1689BDA-8C49-4C89-8AC5-8CDA390AAD60}"/>
               </a:ext>
             </a:extLst>
           </p:cNvPr>
@@ -22809,7 +22809,7 @@
           <p:cNvPr id="43" name="矩形 42">
             <a:extLst>
               <a:ext uri="{FF2B5EF4-FFF2-40B4-BE49-F238E27FC236}">
-                <a16:creationId xmlns:a16="http://schemas.microsoft.com/office/drawing/2014/main" id="{1D8755B5-9041-4772-9502-4DB0A1BD968D}"/>
+                <ns2:creationId id="{1D8755B5-9041-4772-9502-4DB0A1BD968D}"/>
               </a:ext>
             </a:extLst>
           </p:cNvPr>
@@ -22836,7 +22836,7 @@
           <p:cNvPr id="44" name="矩形 43">
             <a:extLst>
               <a:ext uri="{FF2B5EF4-FFF2-40B4-BE49-F238E27FC236}">
-                <a16:creationId xmlns:a16="http://schemas.microsoft.com/office/drawing/2014/main" id="{A394FFC0-554F-4F1C-A134-15DBE4C84DA3}"/>
+                <ns2:creationId id="{A394FFC0-554F-4F1C-A134-15DBE4C84DA3}"/>
               </a:ext>
             </a:extLst>
           </p:cNvPr>
@@ -22881,7 +22881,7 @@
           <p:cNvPr id="45" name="矩形 44">
             <a:extLst>
               <a:ext uri="{FF2B5EF4-FFF2-40B4-BE49-F238E27FC236}">
-                <a16:creationId xmlns:a16="http://schemas.microsoft.com/office/drawing/2014/main" id="{C285D5BC-935F-47EF-AACB-4CE96877257F}"/>
+                <ns2:creationId id="{C285D5BC-935F-47EF-AACB-4CE96877257F}"/>
               </a:ext>
             </a:extLst>
           </p:cNvPr>
@@ -22908,7 +22908,7 @@
           <p:cNvPr id="46" name="矩形 45">
             <a:extLst>
               <a:ext uri="{FF2B5EF4-FFF2-40B4-BE49-F238E27FC236}">
-                <a16:creationId xmlns:a16="http://schemas.microsoft.com/office/drawing/2014/main" id="{F2425D22-C0D0-4B01-90A1-BC0F23248140}"/>
+                <ns2:creationId id="{F2425D22-C0D0-4B01-90A1-BC0F23248140}"/>
               </a:ext>
             </a:extLst>
           </p:cNvPr>
@@ -22953,7 +22953,7 @@
           <p:cNvPr id="47" name="矩形: 圆角 46">
             <a:extLst>
               <a:ext uri="{FF2B5EF4-FFF2-40B4-BE49-F238E27FC236}">
-                <a16:creationId xmlns:a16="http://schemas.microsoft.com/office/drawing/2014/main" id="{FCF337AB-4284-4E00-B031-CEC3F2C54C9E}"/>
+                <ns2:creationId id="{FCF337AB-4284-4E00-B031-CEC3F2C54C9E}"/>
               </a:ext>
             </a:extLst>
           </p:cNvPr>
@@ -22982,7 +22982,7 @@
           <p:cNvPr id="48" name="矩形 47">
             <a:extLst>
               <a:ext uri="{FF2B5EF4-FFF2-40B4-BE49-F238E27FC236}">
-                <a16:creationId xmlns:a16="http://schemas.microsoft.com/office/drawing/2014/main" id="{D481300E-0B47-4EB1-8AEC-1B0096602B38}"/>
+                <ns2:creationId id="{D481300E-0B47-4EB1-8AEC-1B0096602B38}"/>
               </a:ext>
             </a:extLst>
           </p:cNvPr>
@@ -23027,7 +23027,7 @@
           <p:cNvPr id="49" name="矩形 48">
             <a:extLst>
               <a:ext uri="{FF2B5EF4-FFF2-40B4-BE49-F238E27FC236}">
-                <a16:creationId xmlns:a16="http://schemas.microsoft.com/office/drawing/2014/main" id="{CC3294E2-E55F-4600-9AF8-0EE387A3853B}"/>
+                <ns2:creationId id="{CC3294E2-E55F-4600-9AF8-0EE387A3853B}"/>
               </a:ext>
             </a:extLst>
           </p:cNvPr>
@@ -23072,7 +23072,7 @@
           <p:cNvPr id="50" name="矩形 49">
             <a:extLst>
               <a:ext uri="{FF2B5EF4-FFF2-40B4-BE49-F238E27FC236}">
-                <a16:creationId xmlns:a16="http://schemas.microsoft.com/office/drawing/2014/main" id="{F73E5F20-B273-4963-BA73-06E34A282636}"/>
+                <ns2:creationId id="{F73E5F20-B273-4963-BA73-06E34A282636}"/>
               </a:ext>
             </a:extLst>
           </p:cNvPr>
@@ -23107,7 +23107,7 @@
                   <a:srgbClr val="526274"/>
                 </a:solidFill>
               </a:rPr>
-              <a:t>符合真实燃气表多数时间正常的业务特征</a:t>
+              <a:t>符合燃气表多数时间正常运行的业务特征</a:t>
             </a:r>
           </a:p>
         </p:txBody>
@@ -23117,7 +23117,7 @@
           <p:cNvPr id="51" name="矩形: 圆角 50">
             <a:extLst>
               <a:ext uri="{FF2B5EF4-FFF2-40B4-BE49-F238E27FC236}">
-                <a16:creationId xmlns:a16="http://schemas.microsoft.com/office/drawing/2014/main" id="{DFC155D6-4B18-4D96-ACA1-FE67B7B0116A}"/>
+                <ns2:creationId id="{DFC155D6-4B18-4D96-ACA1-FE67B7B0116A}"/>
               </a:ext>
             </a:extLst>
           </p:cNvPr>
@@ -23146,7 +23146,7 @@
           <p:cNvPr id="52" name="矩形 51">
             <a:extLst>
               <a:ext uri="{FF2B5EF4-FFF2-40B4-BE49-F238E27FC236}">
-                <a16:creationId xmlns:a16="http://schemas.microsoft.com/office/drawing/2014/main" id="{7203733B-0681-41E9-A1FD-AF5B24032329}"/>
+                <ns2:creationId id="{7203733B-0681-41E9-A1FD-AF5B24032329}"/>
               </a:ext>
             </a:extLst>
           </p:cNvPr>
@@ -23191,7 +23191,7 @@
           <p:cNvPr id="53" name="矩形 52">
             <a:extLst>
               <a:ext uri="{FF2B5EF4-FFF2-40B4-BE49-F238E27FC236}">
-                <a16:creationId xmlns:a16="http://schemas.microsoft.com/office/drawing/2014/main" id="{726657D5-CFB2-45D3-93DB-A3C7383873C9}"/>
+                <ns2:creationId id="{726657D5-CFB2-45D3-93DB-A3C7383873C9}"/>
               </a:ext>
             </a:extLst>
           </p:cNvPr>
@@ -23236,7 +23236,7 @@
           <p:cNvPr id="54" name="矩形 53">
             <a:extLst>
               <a:ext uri="{FF2B5EF4-FFF2-40B4-BE49-F238E27FC236}">
-                <a16:creationId xmlns:a16="http://schemas.microsoft.com/office/drawing/2014/main" id="{AAE575BC-FB0D-4C03-8347-99AD00F274A0}"/>
+                <ns2:creationId id="{AAE575BC-FB0D-4C03-8347-99AD00F274A0}"/>
               </a:ext>
             </a:extLst>
           </p:cNvPr>
@@ -23271,7 +23271,7 @@
                   <a:srgbClr val="526274"/>
                 </a:solidFill>
               </a:rPr>
-              <a:t>用于模型评估与阈值验证</a:t>
+              <a:t>用于模型评估、阈值验证和案例分析</a:t>
             </a:r>
           </a:p>
         </p:txBody>
@@ -23279,7 +23279,7 @@
     </p:spTree>
     <p:extLst>
       <p:ext uri="{BB962C8B-B14F-4D97-AF65-F5344CB8AC3E}">
-        <p14:creationId xmlns:p14="http://schemas.microsoft.com/office/powerpoint/2010/main" val="1749154290"/>
+        <ns3:creationId val="1749154290"/>
       </p:ext>
     </p:extLst>
   </p:cSld>
@@ -23290,7 +23290,7 @@
 </file>
 
 <file path=ppt/slides/slide8.xml><?xml version="1.0" encoding="utf-8"?>
-<p:sld xmlns:a="http://schemas.openxmlformats.org/drawingml/2006/main" xmlns:r="http://schemas.openxmlformats.org/officeDocument/2006/relationships" xmlns:p="http://schemas.openxmlformats.org/presentationml/2006/main">
+<p:sld xmlns:a="http://schemas.openxmlformats.org/drawingml/2006/main" xmlns:ns2="http://schemas.microsoft.com/office/drawing/2014/main" xmlns:ns3="http://schemas.microsoft.com/office/powerpoint/2010/main" xmlns:p="http://schemas.openxmlformats.org/presentationml/2006/main">
   <p:cSld>
     <p:spTree>
       <p:nvGrpSpPr>
@@ -23311,7 +23311,7 @@
           <p:cNvPr id="26" name="slide-bg">
             <a:extLst>
               <a:ext uri="{FF2B5EF4-FFF2-40B4-BE49-F238E27FC236}">
-                <a16:creationId xmlns:a16="http://schemas.microsoft.com/office/drawing/2014/main" id="{7B20B2F6-A64C-4C9F-9A24-03983ABED862}"/>
+                <ns2:creationId id="{7B20B2F6-A64C-4C9F-9A24-03983ABED862}"/>
               </a:ext>
             </a:extLst>
           </p:cNvPr>
@@ -23338,7 +23338,7 @@
           <p:cNvPr id="2" name="title">
             <a:extLst>
               <a:ext uri="{FF2B5EF4-FFF2-40B4-BE49-F238E27FC236}">
-                <a16:creationId xmlns:a16="http://schemas.microsoft.com/office/drawing/2014/main" id="{F6DDD4EE-27A7-417E-9E14-F44DD435DC71}"/>
+                <ns2:creationId id="{F6DDD4EE-27A7-417E-9E14-F44DD435DC71}"/>
               </a:ext>
             </a:extLst>
           </p:cNvPr>
@@ -23373,7 +23373,7 @@
                   <a:srgbClr val="102033"/>
                 </a:solidFill>
               </a:rPr>
-              <a:t>核心模型：LSTM AutoEncoder</a:t>
+              <a:t>核心算法：LSTM AutoEncoder</a:t>
             </a:r>
           </a:p>
         </p:txBody>
@@ -23383,7 +23383,7 @@
           <p:cNvPr id="3" name="subtitle">
             <a:extLst>
               <a:ext uri="{FF2B5EF4-FFF2-40B4-BE49-F238E27FC236}">
-                <a16:creationId xmlns:a16="http://schemas.microsoft.com/office/drawing/2014/main" id="{26E89017-503D-44EF-A93D-09926AA9F92B}"/>
+                <ns2:creationId id="{26E89017-503D-44EF-A93D-09926AA9F92B}"/>
               </a:ext>
             </a:extLst>
           </p:cNvPr>
@@ -23428,7 +23428,7 @@
           <p:cNvPr id="4" name="title-rule">
             <a:extLst>
               <a:ext uri="{FF2B5EF4-FFF2-40B4-BE49-F238E27FC236}">
-                <a16:creationId xmlns:a16="http://schemas.microsoft.com/office/drawing/2014/main" id="{2067B0B4-801B-4B22-9EE4-773F86945591}"/>
+                <ns2:creationId id="{2067B0B4-801B-4B22-9EE4-773F86945591}"/>
               </a:ext>
             </a:extLst>
           </p:cNvPr>
@@ -23461,7 +23461,7 @@
           <p:cNvPr id="5" name="矩形: 圆角 4">
             <a:extLst>
               <a:ext uri="{FF2B5EF4-FFF2-40B4-BE49-F238E27FC236}">
-                <a16:creationId xmlns:a16="http://schemas.microsoft.com/office/drawing/2014/main" id="{AC3C191A-64B1-4ADA-84F8-EF0C8C2E8998}"/>
+                <ns2:creationId id="{AC3C191A-64B1-4ADA-84F8-EF0C8C2E8998}"/>
               </a:ext>
             </a:extLst>
           </p:cNvPr>
@@ -23490,7 +23490,7 @@
           <p:cNvPr id="6" name="矩形 5">
             <a:extLst>
               <a:ext uri="{FF2B5EF4-FFF2-40B4-BE49-F238E27FC236}">
-                <a16:creationId xmlns:a16="http://schemas.microsoft.com/office/drawing/2014/main" id="{4DE954F5-D059-4C2A-ACE2-EDC101C8323E}"/>
+                <ns2:creationId id="{4DE954F5-D059-4C2A-ACE2-EDC101C8323E}"/>
               </a:ext>
             </a:extLst>
           </p:cNvPr>
@@ -23535,7 +23535,7 @@
           <p:cNvPr id="7" name="矩形 6">
             <a:extLst>
               <a:ext uri="{FF2B5EF4-FFF2-40B4-BE49-F238E27FC236}">
-                <a16:creationId xmlns:a16="http://schemas.microsoft.com/office/drawing/2014/main" id="{E8EDA9F0-90D8-4DBE-8B56-D28155F0D60D}"/>
+                <ns2:creationId id="{E8EDA9F0-90D8-4DBE-8B56-D28155F0D60D}"/>
               </a:ext>
             </a:extLst>
           </p:cNvPr>
@@ -23580,7 +23580,7 @@
           <p:cNvPr id="8" name="矩形: 圆角 7">
             <a:extLst>
               <a:ext uri="{FF2B5EF4-FFF2-40B4-BE49-F238E27FC236}">
-                <a16:creationId xmlns:a16="http://schemas.microsoft.com/office/drawing/2014/main" id="{4B047E43-F740-4AAD-AC77-1338A182DC6C}"/>
+                <ns2:creationId id="{4B047E43-F740-4AAD-AC77-1338A182DC6C}"/>
               </a:ext>
             </a:extLst>
           </p:cNvPr>
@@ -23609,7 +23609,7 @@
           <p:cNvPr id="9" name="矩形 8">
             <a:extLst>
               <a:ext uri="{FF2B5EF4-FFF2-40B4-BE49-F238E27FC236}">
-                <a16:creationId xmlns:a16="http://schemas.microsoft.com/office/drawing/2014/main" id="{72546343-0345-4A3C-89B6-27646B1620C5}"/>
+                <ns2:creationId id="{72546343-0345-4A3C-89B6-27646B1620C5}"/>
               </a:ext>
             </a:extLst>
           </p:cNvPr>
@@ -23654,7 +23654,7 @@
           <p:cNvPr id="10" name="矩形 9">
             <a:extLst>
               <a:ext uri="{FF2B5EF4-FFF2-40B4-BE49-F238E27FC236}">
-                <a16:creationId xmlns:a16="http://schemas.microsoft.com/office/drawing/2014/main" id="{62312624-7C5C-47F7-9194-F13EB32F2210}"/>
+                <ns2:creationId id="{62312624-7C5C-47F7-9194-F13EB32F2210}"/>
               </a:ext>
             </a:extLst>
           </p:cNvPr>
@@ -23699,7 +23699,7 @@
           <p:cNvPr id="11" name="矩形: 圆角 10">
             <a:extLst>
               <a:ext uri="{FF2B5EF4-FFF2-40B4-BE49-F238E27FC236}">
-                <a16:creationId xmlns:a16="http://schemas.microsoft.com/office/drawing/2014/main" id="{8B31C767-C8E0-45D8-920A-CAC6EED62198}"/>
+                <ns2:creationId id="{8B31C767-C8E0-45D8-920A-CAC6EED62198}"/>
               </a:ext>
             </a:extLst>
           </p:cNvPr>
@@ -23728,7 +23728,7 @@
           <p:cNvPr id="12" name="矩形 11">
             <a:extLst>
               <a:ext uri="{FF2B5EF4-FFF2-40B4-BE49-F238E27FC236}">
-                <a16:creationId xmlns:a16="http://schemas.microsoft.com/office/drawing/2014/main" id="{7A40D0FD-6ED1-4D06-8804-23A469110B67}"/>
+                <ns2:creationId id="{7A40D0FD-6ED1-4D06-8804-23A469110B67}"/>
               </a:ext>
             </a:extLst>
           </p:cNvPr>
@@ -23773,7 +23773,7 @@
           <p:cNvPr id="13" name="矩形 12">
             <a:extLst>
               <a:ext uri="{FF2B5EF4-FFF2-40B4-BE49-F238E27FC236}">
-                <a16:creationId xmlns:a16="http://schemas.microsoft.com/office/drawing/2014/main" id="{D31EA65B-BDE0-4F82-B91B-BCDD97EDCDA8}"/>
+                <ns2:creationId id="{D31EA65B-BDE0-4F82-B91B-BCDD97EDCDA8}"/>
               </a:ext>
             </a:extLst>
           </p:cNvPr>
@@ -23818,7 +23818,7 @@
           <p:cNvPr id="14" name="矩形: 圆角 13">
             <a:extLst>
               <a:ext uri="{FF2B5EF4-FFF2-40B4-BE49-F238E27FC236}">
-                <a16:creationId xmlns:a16="http://schemas.microsoft.com/office/drawing/2014/main" id="{738C862F-3460-4340-9A71-EE9F12784A97}"/>
+                <ns2:creationId id="{738C862F-3460-4340-9A71-EE9F12784A97}"/>
               </a:ext>
             </a:extLst>
           </p:cNvPr>
@@ -23847,7 +23847,7 @@
           <p:cNvPr id="15" name="矩形 14">
             <a:extLst>
               <a:ext uri="{FF2B5EF4-FFF2-40B4-BE49-F238E27FC236}">
-                <a16:creationId xmlns:a16="http://schemas.microsoft.com/office/drawing/2014/main" id="{FFB565EF-2744-4DDC-91C6-947152D5BF78}"/>
+                <ns2:creationId id="{FFB565EF-2744-4DDC-91C6-947152D5BF78}"/>
               </a:ext>
             </a:extLst>
           </p:cNvPr>
@@ -23892,7 +23892,7 @@
           <p:cNvPr id="16" name="矩形 15">
             <a:extLst>
               <a:ext uri="{FF2B5EF4-FFF2-40B4-BE49-F238E27FC236}">
-                <a16:creationId xmlns:a16="http://schemas.microsoft.com/office/drawing/2014/main" id="{F495A3CF-6123-41F6-A05D-84B2E8563C58}"/>
+                <ns2:creationId id="{F495A3CF-6123-41F6-A05D-84B2E8563C58}"/>
               </a:ext>
             </a:extLst>
           </p:cNvPr>
@@ -23937,7 +23937,7 @@
           <p:cNvPr id="17" name="矩形: 圆角 16">
             <a:extLst>
               <a:ext uri="{FF2B5EF4-FFF2-40B4-BE49-F238E27FC236}">
-                <a16:creationId xmlns:a16="http://schemas.microsoft.com/office/drawing/2014/main" id="{30A7A807-899B-433E-994D-0C728A9FCC3A}"/>
+                <ns2:creationId id="{30A7A807-899B-433E-994D-0C728A9FCC3A}"/>
               </a:ext>
             </a:extLst>
           </p:cNvPr>
@@ -23966,7 +23966,7 @@
           <p:cNvPr id="18" name="矩形 17">
             <a:extLst>
               <a:ext uri="{FF2B5EF4-FFF2-40B4-BE49-F238E27FC236}">
-                <a16:creationId xmlns:a16="http://schemas.microsoft.com/office/drawing/2014/main" id="{E44A80DA-D420-41B5-8A25-659B7D669FB0}"/>
+                <ns2:creationId id="{E44A80DA-D420-41B5-8A25-659B7D669FB0}"/>
               </a:ext>
             </a:extLst>
           </p:cNvPr>
@@ -24011,7 +24011,7 @@
           <p:cNvPr id="19" name="矩形 18">
             <a:extLst>
               <a:ext uri="{FF2B5EF4-FFF2-40B4-BE49-F238E27FC236}">
-                <a16:creationId xmlns:a16="http://schemas.microsoft.com/office/drawing/2014/main" id="{C9F471AF-9DB5-4478-A446-18E3ACF00434}"/>
+                <ns2:creationId id="{C9F471AF-9DB5-4478-A446-18E3ACF00434}"/>
               </a:ext>
             </a:extLst>
           </p:cNvPr>
@@ -24056,7 +24056,7 @@
           <p:cNvPr id="20" name="矩形: 圆角 19">
             <a:extLst>
               <a:ext uri="{FF2B5EF4-FFF2-40B4-BE49-F238E27FC236}">
-                <a16:creationId xmlns:a16="http://schemas.microsoft.com/office/drawing/2014/main" id="{6755778B-C8BD-42A9-9F8B-1C712D60D224}"/>
+                <ns2:creationId id="{6755778B-C8BD-42A9-9F8B-1C712D60D224}"/>
               </a:ext>
             </a:extLst>
           </p:cNvPr>
@@ -24085,7 +24085,7 @@
           <p:cNvPr id="21" name="矩形 20">
             <a:extLst>
               <a:ext uri="{FF2B5EF4-FFF2-40B4-BE49-F238E27FC236}">
-                <a16:creationId xmlns:a16="http://schemas.microsoft.com/office/drawing/2014/main" id="{D11ECE11-DBE1-4364-A54E-2F60B7C52F7D}"/>
+                <ns2:creationId id="{D11ECE11-DBE1-4364-A54E-2F60B7C52F7D}"/>
               </a:ext>
             </a:extLst>
           </p:cNvPr>
@@ -24130,7 +24130,7 @@
           <p:cNvPr id="22" name="矩形 21">
             <a:extLst>
               <a:ext uri="{FF2B5EF4-FFF2-40B4-BE49-F238E27FC236}">
-                <a16:creationId xmlns:a16="http://schemas.microsoft.com/office/drawing/2014/main" id="{FC643F02-2097-4024-9A32-17EBB8F14992}"/>
+                <ns2:creationId id="{FC643F02-2097-4024-9A32-17EBB8F14992}"/>
               </a:ext>
             </a:extLst>
           </p:cNvPr>
@@ -24165,7 +24165,7 @@
                   <a:srgbClr val="102033"/>
                 </a:solidFill>
               </a:rPr>
-              <a:t>模型已经学习正常运行模式，因此原始序列和重构序列差异较小，重构误差低于阈值。</a:t>
+              <a:t>模型已经学习正常运行模式，原始序列和重构序列差异较小，重构误差低于阈值。</a:t>
             </a:r>
           </a:p>
         </p:txBody>
@@ -24175,7 +24175,7 @@
           <p:cNvPr id="23" name="矩形: 圆角 22">
             <a:extLst>
               <a:ext uri="{FF2B5EF4-FFF2-40B4-BE49-F238E27FC236}">
-                <a16:creationId xmlns:a16="http://schemas.microsoft.com/office/drawing/2014/main" id="{7101C6AF-E709-493F-919E-92BFE16E7E89}"/>
+                <ns2:creationId id="{7101C6AF-E709-493F-919E-92BFE16E7E89}"/>
               </a:ext>
             </a:extLst>
           </p:cNvPr>
@@ -24204,7 +24204,7 @@
           <p:cNvPr id="24" name="矩形 23">
             <a:extLst>
               <a:ext uri="{FF2B5EF4-FFF2-40B4-BE49-F238E27FC236}">
-                <a16:creationId xmlns:a16="http://schemas.microsoft.com/office/drawing/2014/main" id="{67A13D02-F199-4793-8BC7-09DE635E9B0B}"/>
+                <ns2:creationId id="{67A13D02-F199-4793-8BC7-09DE635E9B0B}"/>
               </a:ext>
             </a:extLst>
           </p:cNvPr>
@@ -24249,7 +24249,7 @@
           <p:cNvPr id="25" name="矩形 24">
             <a:extLst>
               <a:ext uri="{FF2B5EF4-FFF2-40B4-BE49-F238E27FC236}">
-                <a16:creationId xmlns:a16="http://schemas.microsoft.com/office/drawing/2014/main" id="{350EC246-4EA5-4338-BA4D-2597D24D180D}"/>
+                <ns2:creationId id="{350EC246-4EA5-4338-BA4D-2597D24D180D}"/>
               </a:ext>
             </a:extLst>
           </p:cNvPr>
@@ -24284,7 +24284,7 @@
                   <a:srgbClr val="102033"/>
                 </a:solidFill>
               </a:rPr>
-              <a:t>异常数据偏离正常时序规律，模型难以准确重构，重构误差升高并触发告警。</a:t>
+              <a:t>异常数据偏离正常时序规律，模型难以准确重构，重构误差升高并触发后续判定。</a:t>
             </a:r>
           </a:p>
         </p:txBody>
@@ -24292,7 +24292,7 @@
     </p:spTree>
     <p:extLst>
       <p:ext uri="{BB962C8B-B14F-4D97-AF65-F5344CB8AC3E}">
-        <p14:creationId xmlns:p14="http://schemas.microsoft.com/office/powerpoint/2010/main" val="1522686693"/>
+        <ns3:creationId val="1522686693"/>
       </p:ext>
     </p:extLst>
   </p:cSld>
@@ -24303,7 +24303,7 @@
 </file>
 
 <file path=ppt/slides/slide9.xml><?xml version="1.0" encoding="utf-8"?>
-<p:sld xmlns:a="http://schemas.openxmlformats.org/drawingml/2006/main" xmlns:r="http://schemas.openxmlformats.org/officeDocument/2006/relationships" xmlns:p="http://schemas.openxmlformats.org/presentationml/2006/main">
+<p:sld xmlns:a="http://schemas.openxmlformats.org/drawingml/2006/main" xmlns:ns2="http://schemas.microsoft.com/office/drawing/2014/main" xmlns:ns3="http://schemas.microsoft.com/office/powerpoint/2010/main" xmlns:p="http://schemas.openxmlformats.org/presentationml/2006/main">
   <p:cSld>
     <p:spTree>
       <p:nvGrpSpPr>
@@ -24324,7 +24324,7 @@
           <p:cNvPr id="49" name="slide-bg">
             <a:extLst>
               <a:ext uri="{FF2B5EF4-FFF2-40B4-BE49-F238E27FC236}">
-                <a16:creationId xmlns:a16="http://schemas.microsoft.com/office/drawing/2014/main" id="{E5FB7594-3D5E-4A5B-ADFB-5EFB65975956}"/>
+                <ns2:creationId id="{E5FB7594-3D5E-4A5B-ADFB-5EFB65975956}"/>
               </a:ext>
             </a:extLst>
           </p:cNvPr>
@@ -24351,7 +24351,7 @@
           <p:cNvPr id="2" name="title">
             <a:extLst>
               <a:ext uri="{FF2B5EF4-FFF2-40B4-BE49-F238E27FC236}">
-                <a16:creationId xmlns:a16="http://schemas.microsoft.com/office/drawing/2014/main" id="{52FCFFDC-FCEA-4EBC-8239-CC7BB0A196A6}"/>
+                <ns2:creationId id="{52FCFFDC-FCEA-4EBC-8239-CC7BB0A196A6}"/>
               </a:ext>
             </a:extLst>
           </p:cNvPr>
@@ -24386,7 +24386,7 @@
                   <a:srgbClr val="102033"/>
                 </a:solidFill>
               </a:rPr>
-              <a:t>模型训练与超参数</a:t>
+              <a:t>模型训练与参数设置</a:t>
             </a:r>
           </a:p>
         </p:txBody>
@@ -24396,7 +24396,7 @@
           <p:cNvPr id="3" name="subtitle">
             <a:extLst>
               <a:ext uri="{FF2B5EF4-FFF2-40B4-BE49-F238E27FC236}">
-                <a16:creationId xmlns:a16="http://schemas.microsoft.com/office/drawing/2014/main" id="{AC0056D8-C275-4945-9858-274EAAACA3DC}"/>
+                <ns2:creationId id="{AC0056D8-C275-4945-9858-274EAAACA3DC}"/>
               </a:ext>
             </a:extLst>
           </p:cNvPr>
@@ -24431,7 +24431,7 @@
                   <a:srgbClr val="526274"/>
                 </a:solidFill>
               </a:rPr>
-              <a:t>训练重点不是分类异常类型，而是充分学习正常数据的重构规律</a:t>
+              <a:t>训练重点不是直接分类异常类型，而是充分学习正常数据的重构规律</a:t>
             </a:r>
           </a:p>
         </p:txBody>
@@ -24441,7 +24441,7 @@
           <p:cNvPr id="4" name="title-rule">
             <a:extLst>
               <a:ext uri="{FF2B5EF4-FFF2-40B4-BE49-F238E27FC236}">
-                <a16:creationId xmlns:a16="http://schemas.microsoft.com/office/drawing/2014/main" id="{09F46FA4-2637-414E-8C44-40A6CF98C60C}"/>
+                <ns2:creationId id="{09F46FA4-2637-414E-8C44-40A6CF98C60C}"/>
               </a:ext>
             </a:extLst>
           </p:cNvPr>
@@ -24474,7 +24474,7 @@
           <p:cNvPr id="5" name="矩形 4">
             <a:extLst>
               <a:ext uri="{FF2B5EF4-FFF2-40B4-BE49-F238E27FC236}">
-                <a16:creationId xmlns:a16="http://schemas.microsoft.com/office/drawing/2014/main" id="{ED7F2A20-9FFB-468A-ABFA-87EE7F0DEA1A}"/>
+                <ns2:creationId id="{ED7F2A20-9FFB-468A-ABFA-87EE7F0DEA1A}"/>
               </a:ext>
             </a:extLst>
           </p:cNvPr>
@@ -24501,7 +24501,7 @@
           <p:cNvPr id="6" name="矩形 5">
             <a:extLst>
               <a:ext uri="{FF2B5EF4-FFF2-40B4-BE49-F238E27FC236}">
-                <a16:creationId xmlns:a16="http://schemas.microsoft.com/office/drawing/2014/main" id="{40383943-6003-4ED9-9982-D7C0D0C585F4}"/>
+                <ns2:creationId id="{40383943-6003-4ED9-9982-D7C0D0C585F4}"/>
               </a:ext>
             </a:extLst>
           </p:cNvPr>
@@ -24546,7 +24546,7 @@
           <p:cNvPr id="7" name="矩形 6">
             <a:extLst>
               <a:ext uri="{FF2B5EF4-FFF2-40B4-BE49-F238E27FC236}">
-                <a16:creationId xmlns:a16="http://schemas.microsoft.com/office/drawing/2014/main" id="{446B6E9E-DE0B-4783-8B08-83D58AF576CE}"/>
+                <ns2:creationId id="{446B6E9E-DE0B-4783-8B08-83D58AF576CE}"/>
               </a:ext>
             </a:extLst>
           </p:cNvPr>
@@ -24573,7 +24573,7 @@
           <p:cNvPr id="8" name="矩形 7">
             <a:extLst>
               <a:ext uri="{FF2B5EF4-FFF2-40B4-BE49-F238E27FC236}">
-                <a16:creationId xmlns:a16="http://schemas.microsoft.com/office/drawing/2014/main" id="{07865537-4EAF-4066-98A3-2396CC41BCB0}"/>
+                <ns2:creationId id="{07865537-4EAF-4066-98A3-2396CC41BCB0}"/>
               </a:ext>
             </a:extLst>
           </p:cNvPr>
@@ -24618,7 +24618,7 @@
           <p:cNvPr id="9" name="矩形 8">
             <a:extLst>
               <a:ext uri="{FF2B5EF4-FFF2-40B4-BE49-F238E27FC236}">
-                <a16:creationId xmlns:a16="http://schemas.microsoft.com/office/drawing/2014/main" id="{BC92EA7B-EA3D-41EE-BC6D-9A12AD2A5C02}"/>
+                <ns2:creationId id="{BC92EA7B-EA3D-41EE-BC6D-9A12AD2A5C02}"/>
               </a:ext>
             </a:extLst>
           </p:cNvPr>
@@ -24645,7 +24645,7 @@
           <p:cNvPr id="10" name="矩形 9">
             <a:extLst>
               <a:ext uri="{FF2B5EF4-FFF2-40B4-BE49-F238E27FC236}">
-                <a16:creationId xmlns:a16="http://schemas.microsoft.com/office/drawing/2014/main" id="{065475C6-8CA7-4263-9E8F-5852AF73D99F}"/>
+                <ns2:creationId id="{065475C6-8CA7-4263-9E8F-5852AF73D99F}"/>
               </a:ext>
             </a:extLst>
           </p:cNvPr>
@@ -24690,7 +24690,7 @@
           <p:cNvPr id="11" name="矩形 10">
             <a:extLst>
               <a:ext uri="{FF2B5EF4-FFF2-40B4-BE49-F238E27FC236}">
-                <a16:creationId xmlns:a16="http://schemas.microsoft.com/office/drawing/2014/main" id="{1B5DD543-E2C4-4854-904F-8272E6872773}"/>
+                <ns2:creationId id="{1B5DD543-E2C4-4854-904F-8272E6872773}"/>
               </a:ext>
             </a:extLst>
           </p:cNvPr>
@@ -24717,7 +24717,7 @@
           <p:cNvPr id="12" name="矩形 11">
             <a:extLst>
               <a:ext uri="{FF2B5EF4-FFF2-40B4-BE49-F238E27FC236}">
-                <a16:creationId xmlns:a16="http://schemas.microsoft.com/office/drawing/2014/main" id="{2C7491BE-3DE7-43CD-95D5-46BC37BE2117}"/>
+                <ns2:creationId id="{2C7491BE-3DE7-43CD-95D5-46BC37BE2117}"/>
               </a:ext>
             </a:extLst>
           </p:cNvPr>
@@ -24762,7 +24762,7 @@
           <p:cNvPr id="13" name="矩形 12">
             <a:extLst>
               <a:ext uri="{FF2B5EF4-FFF2-40B4-BE49-F238E27FC236}">
-                <a16:creationId xmlns:a16="http://schemas.microsoft.com/office/drawing/2014/main" id="{5553E926-486C-4F03-9855-A22B84AB3889}"/>
+                <ns2:creationId id="{5553E926-486C-4F03-9855-A22B84AB3889}"/>
               </a:ext>
             </a:extLst>
           </p:cNvPr>
@@ -24789,7 +24789,7 @@
           <p:cNvPr id="14" name="矩形 13">
             <a:extLst>
               <a:ext uri="{FF2B5EF4-FFF2-40B4-BE49-F238E27FC236}">
-                <a16:creationId xmlns:a16="http://schemas.microsoft.com/office/drawing/2014/main" id="{57039A81-5D84-45B4-8F74-A8E0229CC45A}"/>
+                <ns2:creationId id="{57039A81-5D84-45B4-8F74-A8E0229CC45A}"/>
               </a:ext>
             </a:extLst>
           </p:cNvPr>
@@ -24834,7 +24834,7 @@
           <p:cNvPr id="15" name="矩形 14">
             <a:extLst>
               <a:ext uri="{FF2B5EF4-FFF2-40B4-BE49-F238E27FC236}">
-                <a16:creationId xmlns:a16="http://schemas.microsoft.com/office/drawing/2014/main" id="{D8DB1C61-3881-48F3-AAC7-1AC3363D1219}"/>
+                <ns2:creationId id="{D8DB1C61-3881-48F3-AAC7-1AC3363D1219}"/>
               </a:ext>
             </a:extLst>
           </p:cNvPr>
@@ -24861,7 +24861,7 @@
           <p:cNvPr id="16" name="矩形 15">
             <a:extLst>
               <a:ext uri="{FF2B5EF4-FFF2-40B4-BE49-F238E27FC236}">
-                <a16:creationId xmlns:a16="http://schemas.microsoft.com/office/drawing/2014/main" id="{4C6208BC-5CE2-4B3E-AD6F-75C2B93ACB8B}"/>
+                <ns2:creationId id="{4C6208BC-5CE2-4B3E-AD6F-75C2B93ACB8B}"/>
               </a:ext>
             </a:extLst>
           </p:cNvPr>
@@ -24906,7 +24906,7 @@
           <p:cNvPr id="17" name="矩形 16">
             <a:extLst>
               <a:ext uri="{FF2B5EF4-FFF2-40B4-BE49-F238E27FC236}">
-                <a16:creationId xmlns:a16="http://schemas.microsoft.com/office/drawing/2014/main" id="{D194D115-BAC5-486E-BFE2-610B0696DBF9}"/>
+                <ns2:creationId id="{D194D115-BAC5-486E-BFE2-610B0696DBF9}"/>
               </a:ext>
             </a:extLst>
           </p:cNvPr>
@@ -24933,7 +24933,7 @@
           <p:cNvPr id="18" name="矩形 17">
             <a:extLst>
               <a:ext uri="{FF2B5EF4-FFF2-40B4-BE49-F238E27FC236}">
-                <a16:creationId xmlns:a16="http://schemas.microsoft.com/office/drawing/2014/main" id="{E2A5E780-B7BD-45F0-B16A-B993D8B67646}"/>
+                <ns2:creationId id="{E2A5E780-B7BD-45F0-B16A-B993D8B67646}"/>
               </a:ext>
             </a:extLst>
           </p:cNvPr>
@@ -24978,7 +24978,7 @@
           <p:cNvPr id="19" name="矩形 18">
             <a:extLst>
               <a:ext uri="{FF2B5EF4-FFF2-40B4-BE49-F238E27FC236}">
-                <a16:creationId xmlns:a16="http://schemas.microsoft.com/office/drawing/2014/main" id="{C6DE7234-74FF-4994-AAF9-2F039F5295D5}"/>
+                <ns2:creationId id="{C6DE7234-74FF-4994-AAF9-2F039F5295D5}"/>
               </a:ext>
             </a:extLst>
           </p:cNvPr>
@@ -25005,7 +25005,7 @@
           <p:cNvPr id="20" name="矩形 19">
             <a:extLst>
               <a:ext uri="{FF2B5EF4-FFF2-40B4-BE49-F238E27FC236}">
-                <a16:creationId xmlns:a16="http://schemas.microsoft.com/office/drawing/2014/main" id="{77462EA7-88F2-4880-B28D-E1F8E9C463E3}"/>
+                <ns2:creationId id="{77462EA7-88F2-4880-B28D-E1F8E9C463E3}"/>
               </a:ext>
             </a:extLst>
           </p:cNvPr>
@@ -25050,7 +25050,7 @@
           <p:cNvPr id="21" name="矩形 20">
             <a:extLst>
               <a:ext uri="{FF2B5EF4-FFF2-40B4-BE49-F238E27FC236}">
-                <a16:creationId xmlns:a16="http://schemas.microsoft.com/office/drawing/2014/main" id="{17A559AF-0D68-4E83-82B7-124C754A826A}"/>
+                <ns2:creationId id="{17A559AF-0D68-4E83-82B7-124C754A826A}"/>
               </a:ext>
             </a:extLst>
           </p:cNvPr>
@@ -25077,7 +25077,7 @@
           <p:cNvPr id="22" name="矩形 21">
             <a:extLst>
               <a:ext uri="{FF2B5EF4-FFF2-40B4-BE49-F238E27FC236}">
-                <a16:creationId xmlns:a16="http://schemas.microsoft.com/office/drawing/2014/main" id="{2E15B7D6-8D65-426C-828C-8F47DFB141D5}"/>
+                <ns2:creationId id="{2E15B7D6-8D65-426C-828C-8F47DFB141D5}"/>
               </a:ext>
             </a:extLst>
           </p:cNvPr>
@@ -25122,7 +25122,7 @@
           <p:cNvPr id="23" name="矩形 22">
             <a:extLst>
               <a:ext uri="{FF2B5EF4-FFF2-40B4-BE49-F238E27FC236}">
-                <a16:creationId xmlns:a16="http://schemas.microsoft.com/office/drawing/2014/main" id="{4A1EC476-69A7-4308-8573-4E4A12761FFF}"/>
+                <ns2:creationId id="{4A1EC476-69A7-4308-8573-4E4A12761FFF}"/>
               </a:ext>
             </a:extLst>
           </p:cNvPr>
@@ -25149,7 +25149,7 @@
           <p:cNvPr id="24" name="矩形 23">
             <a:extLst>
               <a:ext uri="{FF2B5EF4-FFF2-40B4-BE49-F238E27FC236}">
-                <a16:creationId xmlns:a16="http://schemas.microsoft.com/office/drawing/2014/main" id="{5DDF3CD4-042E-4EFA-A6A0-A098A3248F32}"/>
+                <ns2:creationId id="{5DDF3CD4-042E-4EFA-A6A0-A098A3248F32}"/>
               </a:ext>
             </a:extLst>
           </p:cNvPr>
@@ -25194,7 +25194,7 @@
           <p:cNvPr id="25" name="矩形 24">
             <a:extLst>
               <a:ext uri="{FF2B5EF4-FFF2-40B4-BE49-F238E27FC236}">
-                <a16:creationId xmlns:a16="http://schemas.microsoft.com/office/drawing/2014/main" id="{6C0CA03F-62BB-4B80-87C1-9B87AEB24128}"/>
+                <ns2:creationId id="{6C0CA03F-62BB-4B80-87C1-9B87AEB24128}"/>
               </a:ext>
             </a:extLst>
           </p:cNvPr>
@@ -25221,7 +25221,7 @@
           <p:cNvPr id="26" name="矩形 25">
             <a:extLst>
               <a:ext uri="{FF2B5EF4-FFF2-40B4-BE49-F238E27FC236}">
-                <a16:creationId xmlns:a16="http://schemas.microsoft.com/office/drawing/2014/main" id="{8527CC6D-922A-4919-975A-F1F55475B353}"/>
+                <ns2:creationId id="{8527CC6D-922A-4919-975A-F1F55475B353}"/>
               </a:ext>
             </a:extLst>
           </p:cNvPr>
@@ -25266,7 +25266,7 @@
           <p:cNvPr id="27" name="矩形 26">
             <a:extLst>
               <a:ext uri="{FF2B5EF4-FFF2-40B4-BE49-F238E27FC236}">
-                <a16:creationId xmlns:a16="http://schemas.microsoft.com/office/drawing/2014/main" id="{1A9DC2EF-944B-4770-ABBA-49A3664B13EE}"/>
+                <ns2:creationId id="{1A9DC2EF-944B-4770-ABBA-49A3664B13EE}"/>
               </a:ext>
             </a:extLst>
           </p:cNvPr>
@@ -25293,7 +25293,7 @@
           <p:cNvPr id="28" name="矩形 27">
             <a:extLst>
               <a:ext uri="{FF2B5EF4-FFF2-40B4-BE49-F238E27FC236}">
-                <a16:creationId xmlns:a16="http://schemas.microsoft.com/office/drawing/2014/main" id="{FE60B36D-49C8-4A84-8161-57AC3C792C92}"/>
+                <ns2:creationId id="{FE60B36D-49C8-4A84-8161-57AC3C792C92}"/>
               </a:ext>
             </a:extLst>
           </p:cNvPr>
@@ -25338,7 +25338,7 @@
           <p:cNvPr id="29" name="矩形 28">
             <a:extLst>
               <a:ext uri="{FF2B5EF4-FFF2-40B4-BE49-F238E27FC236}">
-                <a16:creationId xmlns:a16="http://schemas.microsoft.com/office/drawing/2014/main" id="{4D074301-65E2-4C75-8E8D-6516F6391122}"/>
+                <ns2:creationId id="{4D074301-65E2-4C75-8E8D-6516F6391122}"/>
               </a:ext>
             </a:extLst>
           </p:cNvPr>
@@ -25365,7 +25365,7 @@
           <p:cNvPr id="30" name="矩形 29">
             <a:extLst>
               <a:ext uri="{FF2B5EF4-FFF2-40B4-BE49-F238E27FC236}">
-                <a16:creationId xmlns:a16="http://schemas.microsoft.com/office/drawing/2014/main" id="{59EDF4A7-3C52-496A-AEEB-6D2FAA7549DF}"/>
+                <ns2:creationId id="{59EDF4A7-3C52-496A-AEEB-6D2FAA7549DF}"/>
               </a:ext>
             </a:extLst>
           </p:cNvPr>
@@ -25410,7 +25410,7 @@
           <p:cNvPr id="31" name="矩形 30">
             <a:extLst>
               <a:ext uri="{FF2B5EF4-FFF2-40B4-BE49-F238E27FC236}">
-                <a16:creationId xmlns:a16="http://schemas.microsoft.com/office/drawing/2014/main" id="{1D6FBD6F-D98A-437C-8A4D-3490F1878E64}"/>
+                <ns2:creationId id="{1D6FBD6F-D98A-437C-8A4D-3490F1878E64}"/>
               </a:ext>
             </a:extLst>
           </p:cNvPr>
@@ -25437,7 +25437,7 @@
           <p:cNvPr id="32" name="矩形 31">
             <a:extLst>
               <a:ext uri="{FF2B5EF4-FFF2-40B4-BE49-F238E27FC236}">
-                <a16:creationId xmlns:a16="http://schemas.microsoft.com/office/drawing/2014/main" id="{8B7BBF05-EFAD-43F3-B6F4-ADFD1FFFEBFC}"/>
+                <ns2:creationId id="{8B7BBF05-EFAD-43F3-B6F4-ADFD1FFFEBFC}"/>
               </a:ext>
             </a:extLst>
           </p:cNvPr>
@@ -25482,7 +25482,7 @@
           <p:cNvPr id="33" name="矩形 32">
             <a:extLst>
               <a:ext uri="{FF2B5EF4-FFF2-40B4-BE49-F238E27FC236}">
-                <a16:creationId xmlns:a16="http://schemas.microsoft.com/office/drawing/2014/main" id="{5B3D6629-ABED-4E73-AD2F-EB39FF4777A9}"/>
+                <ns2:creationId id="{5B3D6629-ABED-4E73-AD2F-EB39FF4777A9}"/>
               </a:ext>
             </a:extLst>
           </p:cNvPr>
@@ -25509,7 +25509,7 @@
           <p:cNvPr id="34" name="矩形 33">
             <a:extLst>
               <a:ext uri="{FF2B5EF4-FFF2-40B4-BE49-F238E27FC236}">
-                <a16:creationId xmlns:a16="http://schemas.microsoft.com/office/drawing/2014/main" id="{DED1BF6E-AE2B-43CF-BF41-2CC19FCB6E0E}"/>
+                <ns2:creationId id="{DED1BF6E-AE2B-43CF-BF41-2CC19FCB6E0E}"/>
               </a:ext>
             </a:extLst>
           </p:cNvPr>
@@ -25554,7 +25554,7 @@
           <p:cNvPr id="35" name="矩形 34">
             <a:extLst>
               <a:ext uri="{FF2B5EF4-FFF2-40B4-BE49-F238E27FC236}">
-                <a16:creationId xmlns:a16="http://schemas.microsoft.com/office/drawing/2014/main" id="{7BDF1409-F693-47C3-9A3A-F4F122EEAA4C}"/>
+                <ns2:creationId id="{7BDF1409-F693-47C3-9A3A-F4F122EEAA4C}"/>
               </a:ext>
             </a:extLst>
           </p:cNvPr>
@@ -25581,7 +25581,7 @@
           <p:cNvPr id="36" name="矩形 35">
             <a:extLst>
               <a:ext uri="{FF2B5EF4-FFF2-40B4-BE49-F238E27FC236}">
-                <a16:creationId xmlns:a16="http://schemas.microsoft.com/office/drawing/2014/main" id="{493965EC-202C-4808-9E6C-4B1940EC42B4}"/>
+                <ns2:creationId id="{493965EC-202C-4808-9E6C-4B1940EC42B4}"/>
               </a:ext>
             </a:extLst>
           </p:cNvPr>
@@ -25626,7 +25626,7 @@
           <p:cNvPr id="37" name="矩形 36">
             <a:extLst>
               <a:ext uri="{FF2B5EF4-FFF2-40B4-BE49-F238E27FC236}">
-                <a16:creationId xmlns:a16="http://schemas.microsoft.com/office/drawing/2014/main" id="{AB2C6831-2E56-4281-9AB7-7A4B996A0925}"/>
+                <ns2:creationId id="{AB2C6831-2E56-4281-9AB7-7A4B996A0925}"/>
               </a:ext>
             </a:extLst>
           </p:cNvPr>
@@ -25653,7 +25653,7 @@
           <p:cNvPr id="38" name="矩形 37">
             <a:extLst>
               <a:ext uri="{FF2B5EF4-FFF2-40B4-BE49-F238E27FC236}">
-                <a16:creationId xmlns:a16="http://schemas.microsoft.com/office/drawing/2014/main" id="{8880EE5B-8588-489B-BC91-50F5E9E43240}"/>
+                <ns2:creationId id="{8880EE5B-8588-489B-BC91-50F5E9E43240}"/>
               </a:ext>
             </a:extLst>
           </p:cNvPr>
@@ -25698,7 +25698,7 @@
           <p:cNvPr id="39" name="矩形 38">
             <a:extLst>
               <a:ext uri="{FF2B5EF4-FFF2-40B4-BE49-F238E27FC236}">
-                <a16:creationId xmlns:a16="http://schemas.microsoft.com/office/drawing/2014/main" id="{8F1066E5-A10B-4AEA-990F-FD0E730ED7AA}"/>
+                <ns2:creationId id="{8F1066E5-A10B-4AEA-990F-FD0E730ED7AA}"/>
               </a:ext>
             </a:extLst>
           </p:cNvPr>
@@ -25725,7 +25725,7 @@
           <p:cNvPr id="40" name="矩形 39">
             <a:extLst>
               <a:ext uri="{FF2B5EF4-FFF2-40B4-BE49-F238E27FC236}">
-                <a16:creationId xmlns:a16="http://schemas.microsoft.com/office/drawing/2014/main" id="{5E25AF5F-B94D-477E-AF40-9624C0E6C53D}"/>
+                <ns2:creationId id="{5E25AF5F-B94D-477E-AF40-9624C0E6C53D}"/>
               </a:ext>
             </a:extLst>
           </p:cNvPr>
@@ -25770,7 +25770,7 @@
           <p:cNvPr id="41" name="矩形: 圆角 40">
             <a:extLst>
               <a:ext uri="{FF2B5EF4-FFF2-40B4-BE49-F238E27FC236}">
-                <a16:creationId xmlns:a16="http://schemas.microsoft.com/office/drawing/2014/main" id="{2406C9AF-D6FB-4594-8956-7309DCC155D6}"/>
+                <ns2:creationId id="{2406C9AF-D6FB-4594-8956-7309DCC155D6}"/>
               </a:ext>
             </a:extLst>
           </p:cNvPr>
@@ -25799,7 +25799,7 @@
           <p:cNvPr id="42" name="bullet-0">
             <a:extLst>
               <a:ext uri="{FF2B5EF4-FFF2-40B4-BE49-F238E27FC236}">
-                <a16:creationId xmlns:a16="http://schemas.microsoft.com/office/drawing/2014/main" id="{4DACDF4B-FFA5-456E-A7A3-04BC0D7F375E}"/>
+                <ns2:creationId id="{4DACDF4B-FFA5-456E-A7A3-04BC0D7F375E}"/>
               </a:ext>
             </a:extLst>
           </p:cNvPr>
@@ -25844,7 +25844,7 @@
           <p:cNvPr id="43" name="bullet-1">
             <a:extLst>
               <a:ext uri="{FF2B5EF4-FFF2-40B4-BE49-F238E27FC236}">
-                <a16:creationId xmlns:a16="http://schemas.microsoft.com/office/drawing/2014/main" id="{883C460D-FCC3-4B2C-B1AC-EFAFE441E728}"/>
+                <ns2:creationId id="{883C460D-FCC3-4B2C-B1AC-EFAFE441E728}"/>
               </a:ext>
             </a:extLst>
           </p:cNvPr>
@@ -25889,7 +25889,7 @@
           <p:cNvPr id="44" name="bullet-2">
             <a:extLst>
               <a:ext uri="{FF2B5EF4-FFF2-40B4-BE49-F238E27FC236}">
-                <a16:creationId xmlns:a16="http://schemas.microsoft.com/office/drawing/2014/main" id="{BBF99368-C381-4209-AB60-10AD944DDC35}"/>
+                <ns2:creationId id="{BBF99368-C381-4209-AB60-10AD944DDC35}"/>
               </a:ext>
             </a:extLst>
           </p:cNvPr>
@@ -25934,7 +25934,7 @@
           <p:cNvPr id="45" name="bullet-3">
             <a:extLst>
               <a:ext uri="{FF2B5EF4-FFF2-40B4-BE49-F238E27FC236}">
-                <a16:creationId xmlns:a16="http://schemas.microsoft.com/office/drawing/2014/main" id="{D98E5732-A305-4FC9-9309-053F96797516}"/>
+                <ns2:creationId id="{D98E5732-A305-4FC9-9309-053F96797516}"/>
               </a:ext>
             </a:extLst>
           </p:cNvPr>
@@ -25979,7 +25979,7 @@
           <p:cNvPr id="46" name="bullet-4">
             <a:extLst>
               <a:ext uri="{FF2B5EF4-FFF2-40B4-BE49-F238E27FC236}">
-                <a16:creationId xmlns:a16="http://schemas.microsoft.com/office/drawing/2014/main" id="{2D4F7D09-A0B6-497F-A8B4-0E009F3A7599}"/>
+                <ns2:creationId id="{2D4F7D09-A0B6-497F-A8B4-0E009F3A7599}"/>
               </a:ext>
             </a:extLst>
           </p:cNvPr>
@@ -26014,7 +26014,7 @@
                   <a:srgbClr val="102033"/>
                 </a:solidFill>
               </a:rPr>
-              <a:t>• 模型文件、标准化器和阈值写入模型元数据</a:t>
+              <a:t>• 模型、标准化器和阈值写入模型元数据</a:t>
             </a:r>
           </a:p>
         </p:txBody>
@@ -26024,7 +26024,7 @@
           <p:cNvPr id="47" name="矩形: 圆角 46">
             <a:extLst>
               <a:ext uri="{FF2B5EF4-FFF2-40B4-BE49-F238E27FC236}">
-                <a16:creationId xmlns:a16="http://schemas.microsoft.com/office/drawing/2014/main" id="{10C3E6EC-BFC1-4794-8D8E-469FF0800587}"/>
+                <ns2:creationId id="{10C3E6EC-BFC1-4794-8D8E-469FF0800587}"/>
               </a:ext>
             </a:extLst>
           </p:cNvPr>
@@ -26053,7 +26053,7 @@
           <p:cNvPr id="48" name="矩形 47">
             <a:extLst>
               <a:ext uri="{FF2B5EF4-FFF2-40B4-BE49-F238E27FC236}">
-                <a16:creationId xmlns:a16="http://schemas.microsoft.com/office/drawing/2014/main" id="{DAE59D45-A5F6-4B0D-9B5F-B76F2E259EFC}"/>
+                <ns2:creationId id="{DAE59D45-A5F6-4B0D-9B5F-B76F2E259EFC}"/>
               </a:ext>
             </a:extLst>
           </p:cNvPr>
@@ -26088,7 +26088,7 @@
                   <a:srgbClr val="0E9488"/>
                 </a:solidFill>
               </a:rPr>
-              <a:t>隐藏层维度 32 在表达能力和压缩约束之间折中，避免模型过度记忆输入，从而保留异常检测所需的重构差异。</a:t>
+              <a:t>隐藏层维度 32 在表达能力和压缩约束之间折中，避免模型直接记忆输入，从而保留异常检测所需的重构差异。</a:t>
             </a:r>
           </a:p>
         </p:txBody>
@@ -26096,7 +26096,7 @@
     </p:spTree>
     <p:extLst>
       <p:ext uri="{BB962C8B-B14F-4D97-AF65-F5344CB8AC3E}">
-        <p14:creationId xmlns:p14="http://schemas.microsoft.com/office/powerpoint/2010/main" val="1727058856"/>
+        <ns3:creationId val="1727058856"/>
       </p:ext>
     </p:extLst>
   </p:cSld>
